--- a/Science_Teesside/Teaching_Packs/BUILD/lessons/W5A/BUILD_Science_Autumn1_W5A_Body_Needs.pptx
+++ b/Science_Teesside/Teaching_Packs/BUILD/lessons/W5A/BUILD_Science_Autumn1_W5A_Body_Needs.pptx
@@ -2,23 +2,23 @@
 <file path=ppt/presentation.xml><?xml version="1.0" encoding="utf-8"?>
 <p:presentation xmlns:p="http://schemas.openxmlformats.org/presentationml/2006/main">
   <p:sldMasterIdLst>
-    <p:sldMasterId xmlns:r="http://schemas.openxmlformats.org/officeDocument/2006/relationships" id="2147483648" r:id="Rff3814563ea2467a"/>
+    <p:sldMasterId xmlns:r="http://schemas.openxmlformats.org/officeDocument/2006/relationships" id="2147483648" r:id="R4d5d14aecfb5460a"/>
   </p:sldMasterIdLst>
   <p:notesMasterIdLst>
-    <p:notesMasterId xmlns:r="http://schemas.openxmlformats.org/officeDocument/2006/relationships" r:id="R3a3f413a7bd74144"/>
+    <p:notesMasterId xmlns:r="http://schemas.openxmlformats.org/officeDocument/2006/relationships" r:id="Rb00341a3df0d4ecb"/>
   </p:notesMasterIdLst>
   <p:sldIdLst>
-    <p:sldId xmlns:r="http://schemas.openxmlformats.org/officeDocument/2006/relationships" id="256" r:id="R8e4a5436e9e14bb5"/>
-    <p:sldId xmlns:r="http://schemas.openxmlformats.org/officeDocument/2006/relationships" id="257" r:id="R731cdea21f3e445d"/>
-    <p:sldId xmlns:r="http://schemas.openxmlformats.org/officeDocument/2006/relationships" id="258" r:id="R1aa3c90412cc485a"/>
-    <p:sldId xmlns:r="http://schemas.openxmlformats.org/officeDocument/2006/relationships" id="259" r:id="R2ea3031ffc174009"/>
-    <p:sldId xmlns:r="http://schemas.openxmlformats.org/officeDocument/2006/relationships" id="260" r:id="Rb29f92384f414031"/>
-    <p:sldId xmlns:r="http://schemas.openxmlformats.org/officeDocument/2006/relationships" id="261" r:id="R7e2b0e36edd94842"/>
-    <p:sldId xmlns:r="http://schemas.openxmlformats.org/officeDocument/2006/relationships" id="262" r:id="Rb3ecc317fcc2454c"/>
-    <p:sldId xmlns:r="http://schemas.openxmlformats.org/officeDocument/2006/relationships" id="263" r:id="Re4fb2f7ffeec4ff9"/>
-    <p:sldId xmlns:r="http://schemas.openxmlformats.org/officeDocument/2006/relationships" id="264" r:id="Rf0f2c12d46154f98"/>
-    <p:sldId xmlns:r="http://schemas.openxmlformats.org/officeDocument/2006/relationships" id="265" r:id="Rc1d3bae2dc75453e"/>
-    <p:sldId xmlns:r="http://schemas.openxmlformats.org/officeDocument/2006/relationships" id="266" r:id="Ra5a2d457e0504fc8"/>
+    <p:sldId xmlns:r="http://schemas.openxmlformats.org/officeDocument/2006/relationships" id="256" r:id="Rac6978a884fb4afb"/>
+    <p:sldId xmlns:r="http://schemas.openxmlformats.org/officeDocument/2006/relationships" id="257" r:id="R0b22302e00fa4741"/>
+    <p:sldId xmlns:r="http://schemas.openxmlformats.org/officeDocument/2006/relationships" id="258" r:id="R62ffc6680e644d85"/>
+    <p:sldId xmlns:r="http://schemas.openxmlformats.org/officeDocument/2006/relationships" id="259" r:id="Rc10fa7d1a97640ef"/>
+    <p:sldId xmlns:r="http://schemas.openxmlformats.org/officeDocument/2006/relationships" id="260" r:id="Redbebb7a5b0849f8"/>
+    <p:sldId xmlns:r="http://schemas.openxmlformats.org/officeDocument/2006/relationships" id="261" r:id="R244992179c004145"/>
+    <p:sldId xmlns:r="http://schemas.openxmlformats.org/officeDocument/2006/relationships" id="262" r:id="Re1945cb1d75840cf"/>
+    <p:sldId xmlns:r="http://schemas.openxmlformats.org/officeDocument/2006/relationships" id="263" r:id="R2361aecf787b4286"/>
+    <p:sldId xmlns:r="http://schemas.openxmlformats.org/officeDocument/2006/relationships" id="264" r:id="R8b51f80bf05c429d"/>
+    <p:sldId xmlns:r="http://schemas.openxmlformats.org/officeDocument/2006/relationships" id="265" r:id="R1dd53801ff874a04"/>
+    <p:sldId xmlns:r="http://schemas.openxmlformats.org/officeDocument/2006/relationships" id="266" r:id="R223cea6103cb447d"/>
   </p:sldIdLst>
   <p:sldSz cx="12192000" cy="6858000"/>
   <p:notesSz cx="6858000" cy="9144000"/>
@@ -500,6 +500,15 @@
               <a:t>[/Sources]</a:t>
             </a:r>
           </a:p>
+          <a:p xmlns:a="http://schemas.openxmlformats.org/drawingml/2006/main">
+            <a:r>
+              <a:t>
+[Sources]
+https://madebymatt.uk/Lessons/Science_Teesside/Teaching_Packs/BUILD/ — original lesson text, timings and teacher notes retained.
+https://madebymatt.uk/Lessons/Science_Teesside/Build/ — existing Made by Matt scientific artwork, where shown.
+[/Sources]</a:t>
+            </a:r>
+          </a:p>
         </p:txBody>
       </p:sp>
       <p:sp>
@@ -615,6 +624,15 @@
               <a:t>[/Sources]</a:t>
             </a:r>
           </a:p>
+          <a:p xmlns:a="http://schemas.openxmlformats.org/drawingml/2006/main">
+            <a:r>
+              <a:t>
+[Sources]
+https://madebymatt.uk/Lessons/Science_Teesside/Teaching_Packs/BUILD/ — original lesson text, timings and teacher notes retained.
+https://madebymatt.uk/Lessons/Science_Teesside/Build/ — existing Made by Matt scientific artwork, where shown.
+[/Sources]</a:t>
+            </a:r>
+          </a:p>
         </p:txBody>
       </p:sp>
       <p:sp>
@@ -730,6 +748,15 @@
               <a:t>[/Sources]</a:t>
             </a:r>
           </a:p>
+          <a:p xmlns:a="http://schemas.openxmlformats.org/drawingml/2006/main">
+            <a:r>
+              <a:t>
+[Sources]
+https://madebymatt.uk/Lessons/Science_Teesside/Teaching_Packs/BUILD/ — original lesson text, timings and teacher notes retained.
+https://madebymatt.uk/Lessons/Science_Teesside/Build/ — existing Made by Matt scientific artwork, where shown.
+[/Sources]</a:t>
+            </a:r>
+          </a:p>
         </p:txBody>
       </p:sp>
       <p:sp>
@@ -845,6 +872,15 @@
               <a:t>[/Sources]</a:t>
             </a:r>
           </a:p>
+          <a:p xmlns:a="http://schemas.openxmlformats.org/drawingml/2006/main">
+            <a:r>
+              <a:t>
+[Sources]
+https://madebymatt.uk/Lessons/Science_Teesside/Teaching_Packs/BUILD/ — original lesson text, timings and teacher notes retained.
+https://madebymatt.uk/Lessons/Science_Teesside/Build/ — existing Made by Matt scientific artwork, where shown.
+[/Sources]</a:t>
+            </a:r>
+          </a:p>
         </p:txBody>
       </p:sp>
       <p:sp>
@@ -960,6 +996,15 @@
               <a:t>[/Sources]</a:t>
             </a:r>
           </a:p>
+          <a:p xmlns:a="http://schemas.openxmlformats.org/drawingml/2006/main">
+            <a:r>
+              <a:t>
+[Sources]
+https://madebymatt.uk/Lessons/Science_Teesside/Teaching_Packs/BUILD/ — original lesson text, timings and teacher notes retained.
+https://madebymatt.uk/Lessons/Science_Teesside/Build/ — existing Made by Matt scientific artwork, where shown.
+[/Sources]</a:t>
+            </a:r>
+          </a:p>
         </p:txBody>
       </p:sp>
       <p:sp>
@@ -1075,6 +1120,15 @@
               <a:t>[/Sources]</a:t>
             </a:r>
           </a:p>
+          <a:p xmlns:a="http://schemas.openxmlformats.org/drawingml/2006/main">
+            <a:r>
+              <a:t>
+[Sources]
+https://madebymatt.uk/Lessons/Science_Teesside/Teaching_Packs/BUILD/ — original lesson text, timings and teacher notes retained.
+https://madebymatt.uk/Lessons/Science_Teesside/Build/ — existing Made by Matt scientific artwork, where shown.
+[/Sources]</a:t>
+            </a:r>
+          </a:p>
         </p:txBody>
       </p:sp>
       <p:sp>
@@ -1190,6 +1244,15 @@
               <a:t>[/Sources]</a:t>
             </a:r>
           </a:p>
+          <a:p xmlns:a="http://schemas.openxmlformats.org/drawingml/2006/main">
+            <a:r>
+              <a:t>
+[Sources]
+https://madebymatt.uk/Lessons/Science_Teesside/Teaching_Packs/BUILD/ — original lesson text, timings and teacher notes retained.
+https://madebymatt.uk/Lessons/Science_Teesside/Build/ — existing Made by Matt scientific artwork, where shown.
+[/Sources]</a:t>
+            </a:r>
+          </a:p>
         </p:txBody>
       </p:sp>
       <p:sp>
@@ -1305,6 +1368,15 @@
               <a:t>[/Sources]</a:t>
             </a:r>
           </a:p>
+          <a:p xmlns:a="http://schemas.openxmlformats.org/drawingml/2006/main">
+            <a:r>
+              <a:t>
+[Sources]
+https://madebymatt.uk/Lessons/Science_Teesside/Teaching_Packs/BUILD/ — original lesson text, timings and teacher notes retained.
+https://madebymatt.uk/Lessons/Science_Teesside/Build/ — existing Made by Matt scientific artwork, where shown.
+[/Sources]</a:t>
+            </a:r>
+          </a:p>
         </p:txBody>
       </p:sp>
       <p:sp>
@@ -1420,6 +1492,15 @@
               <a:t>[/Sources]</a:t>
             </a:r>
           </a:p>
+          <a:p xmlns:a="http://schemas.openxmlformats.org/drawingml/2006/main">
+            <a:r>
+              <a:t>
+[Sources]
+https://madebymatt.uk/Lessons/Science_Teesside/Teaching_Packs/BUILD/ — original lesson text, timings and teacher notes retained.
+https://madebymatt.uk/Lessons/Science_Teesside/Build/ — existing Made by Matt scientific artwork, where shown.
+[/Sources]</a:t>
+            </a:r>
+          </a:p>
         </p:txBody>
       </p:sp>
       <p:sp>
@@ -1535,6 +1616,15 @@
               <a:t>[/Sources]</a:t>
             </a:r>
           </a:p>
+          <a:p xmlns:a="http://schemas.openxmlformats.org/drawingml/2006/main">
+            <a:r>
+              <a:t>
+[Sources]
+https://madebymatt.uk/Lessons/Science_Teesside/Teaching_Packs/BUILD/ — original lesson text, timings and teacher notes retained.
+https://madebymatt.uk/Lessons/Science_Teesside/Build/ — existing Made by Matt scientific artwork, where shown.
+[/Sources]</a:t>
+            </a:r>
+          </a:p>
         </p:txBody>
       </p:sp>
       <p:sp>
@@ -1648,6 +1738,15 @@
           <a:p xmlns:a="http://schemas.openxmlformats.org/drawingml/2006/main">
             <a:r>
               <a:t>[/Sources]</a:t>
+            </a:r>
+          </a:p>
+          <a:p xmlns:a="http://schemas.openxmlformats.org/drawingml/2006/main">
+            <a:r>
+              <a:t>
+[Sources]
+https://madebymatt.uk/Lessons/Science_Teesside/Teaching_Packs/BUILD/ — original lesson text, timings and teacher notes retained.
+https://madebymatt.uk/Lessons/Science_Teesside/Build/ — existing Made by Matt scientific artwork, where shown.
+[/Sources]</a:t>
             </a:r>
           </a:p>
         </p:txBody>
@@ -1715,7 +1814,7 @@
   </p:cSld>
   <p:clrMap bg1="lt1" tx1="dk1" bg2="lt2" tx2="dk2" accent1="accent1" accent2="accent2" accent3="accent3" accent4="accent4" accent5="accent5" accent6="accent6" hlink="hlink" folHlink="folHlink"/>
   <p:sldLayoutIdLst>
-    <p:sldLayoutId xmlns:r="http://schemas.openxmlformats.org/officeDocument/2006/relationships" id="2147483649" r:id="Raa975ffd43654924"/>
+    <p:sldLayoutId xmlns:r="http://schemas.openxmlformats.org/officeDocument/2006/relationships" id="2147483649" r:id="Rd24fc18886c44209"/>
   </p:sldLayoutIdLst>
   <p:txStyles>
     <p:titleStyle>
@@ -2248,7 +2347,7 @@
     <p:bg>
       <p:bgPr>
         <a:solidFill xmlns:a="http://schemas.openxmlformats.org/drawingml/2006/main">
-          <a:srgbClr val="F5F1E8"/>
+          <a:srgbClr val="FBF9F3"/>
         </a:solidFill>
       </p:bgPr>
     </p:bg>
@@ -2277,8 +2376,8 @@
         </p:nvSpPr>
         <p:spPr>
           <a:xfrm xmlns:a="http://schemas.openxmlformats.org/drawingml/2006/main">
-            <a:off x="609600" y="552450"/>
-            <a:ext cx="781050" cy="57150"/>
+            <a:off x="609600" y="742950"/>
+            <a:ext cx="9906000" cy="38100"/>
           </a:xfrm>
           <a:prstGeom xmlns:a="http://schemas.openxmlformats.org/drawingml/2006/main" prst="rect">
             <a:avLst/>
@@ -2308,8 +2407,8 @@
         </p:nvSpPr>
         <p:spPr>
           <a:xfrm xmlns:a="http://schemas.openxmlformats.org/drawingml/2006/main">
-            <a:off x="609600" y="762000"/>
-            <a:ext cx="9334500" cy="285750"/>
+            <a:off x="609600" y="342900"/>
+            <a:ext cx="9334500" cy="266700"/>
           </a:xfrm>
           <a:prstGeom xmlns:a="http://schemas.openxmlformats.org/drawingml/2006/main" prst="rect">
             <a:avLst/>
@@ -2321,21 +2420,30 @@
           </a:ln>
         </p:spPr>
         <p:txBody>
-          <a:bodyPr xmlns:a="http://schemas.openxmlformats.org/drawingml/2006/main" lIns="0" tIns="0" rIns="0" bIns="0" anchor="ctr"/>
-          <a:lstStyle xmlns:a="http://schemas.openxmlformats.org/drawingml/2006/main"/>
-          <a:p xmlns:a="http://schemas.openxmlformats.org/drawingml/2006/main">
-            <a:pPr>
-              <a:defRPr sz="1500" b="1">
+          <a:bodyPr xmlns:a="http://schemas.openxmlformats.org/drawingml/2006/main" wrap="square" lIns="0" tIns="0" rIns="0" bIns="0" anchor="ctr">
+            <a:noAutofit/>
+          </a:bodyPr>
+          <a:lstStyle xmlns:a="http://schemas.openxmlformats.org/drawingml/2006/main"/>
+          <a:p xmlns:a="http://schemas.openxmlformats.org/drawingml/2006/main">
+            <a:pPr>
+              <a:buNone/>
+              <a:defRPr sz="1425" b="1">
                 <a:solidFill>
                   <a:srgbClr val="28685E"/>
                 </a:solidFill>
-              </a:defRPr>
-            </a:pPr>
-            <a:r>
-              <a:rPr sz="1500" b="1">
+                <a:latin typeface="Arial"/>
+                <a:ea typeface="Arial"/>
+                <a:cs typeface="Arial"/>
+              </a:defRPr>
+            </a:pPr>
+            <a:r>
+              <a:rPr sz="1425" b="1">
                 <a:solidFill>
                   <a:srgbClr val="28685E"/>
                 </a:solidFill>
+                <a:latin typeface="Arial"/>
+                <a:ea typeface="Arial"/>
+                <a:cs typeface="Arial"/>
               </a:rPr>
               <a:t>MADE BY MATT  /  BUILD SCIENCE</a:t>
             </a:r>
@@ -2344,14 +2452,14 @@
       </p:sp>
       <p:pic>
         <p:nvPicPr>
-          <p:cNvPr id="12" name=""/>
+          <p:cNvPr id="15" name=""/>
           <p:cNvPicPr>
             <a:picLocks xmlns:a="http://schemas.openxmlformats.org/drawingml/2006/main" noChangeAspect="1"/>
           </p:cNvPicPr>
           <p:nvPr/>
         </p:nvPicPr>
         <p:blipFill>
-          <a:blip xmlns:r="http://schemas.openxmlformats.org/officeDocument/2006/relationships" xmlns:a="http://schemas.openxmlformats.org/drawingml/2006/main" r:embed="Rfad96ba659404a2c"/>
+          <a:blip xmlns:r="http://schemas.openxmlformats.org/officeDocument/2006/relationships" xmlns:a="http://schemas.openxmlformats.org/drawingml/2006/main" r:embed="Rae72ec2cd06e41f2"/>
           <a:stretch xmlns:a="http://schemas.openxmlformats.org/drawingml/2006/main"/>
         </p:blipFill>
         <p:spPr>
@@ -2380,8 +2488,8 @@
         </p:nvSpPr>
         <p:spPr>
           <a:xfrm xmlns:a="http://schemas.openxmlformats.org/drawingml/2006/main">
-            <a:off x="609600" y="1352550"/>
-            <a:ext cx="10972800" cy="952500"/>
+            <a:off x="609600" y="1047750"/>
+            <a:ext cx="10972800" cy="895350"/>
           </a:xfrm>
           <a:prstGeom xmlns:a="http://schemas.openxmlformats.org/drawingml/2006/main" prst="rect">
             <a:avLst/>
@@ -2393,21 +2501,30 @@
           </a:ln>
         </p:spPr>
         <p:txBody>
-          <a:bodyPr xmlns:a="http://schemas.openxmlformats.org/drawingml/2006/main" lIns="0" tIns="0" rIns="0" bIns="0" anchor="ctr"/>
-          <a:lstStyle xmlns:a="http://schemas.openxmlformats.org/drawingml/2006/main"/>
-          <a:p xmlns:a="http://schemas.openxmlformats.org/drawingml/2006/main">
-            <a:pPr>
-              <a:defRPr sz="3750" b="1">
-                <a:solidFill>
-                  <a:srgbClr val="152B3A"/>
-                </a:solidFill>
-              </a:defRPr>
-            </a:pPr>
-            <a:r>
-              <a:rPr sz="3750" b="1">
-                <a:solidFill>
-                  <a:srgbClr val="152B3A"/>
-                </a:solidFill>
+          <a:bodyPr xmlns:a="http://schemas.openxmlformats.org/drawingml/2006/main" wrap="square" lIns="0" tIns="0" rIns="0" bIns="0" anchor="ctr">
+            <a:noAutofit/>
+          </a:bodyPr>
+          <a:lstStyle xmlns:a="http://schemas.openxmlformats.org/drawingml/2006/main"/>
+          <a:p xmlns:a="http://schemas.openxmlformats.org/drawingml/2006/main">
+            <a:pPr>
+              <a:buNone/>
+              <a:defRPr sz="3600" b="1">
+                <a:solidFill>
+                  <a:srgbClr val="152B3A"/>
+                </a:solidFill>
+                <a:latin typeface="Arial"/>
+                <a:ea typeface="Arial"/>
+                <a:cs typeface="Arial"/>
+              </a:defRPr>
+            </a:pPr>
+            <a:r>
+              <a:rPr sz="3600" b="1">
+                <a:solidFill>
+                  <a:srgbClr val="152B3A"/>
+                </a:solidFill>
+                <a:latin typeface="Arial"/>
+                <a:ea typeface="Arial"/>
+                <a:cs typeface="Arial"/>
               </a:rPr>
               <a:t>What a body needs</a:t>
             </a:r>
@@ -2474,21 +2591,30 @@
           </a:ln>
         </p:spPr>
         <p:txBody>
-          <a:bodyPr xmlns:a="http://schemas.openxmlformats.org/drawingml/2006/main" lIns="0" tIns="0" rIns="0" bIns="0" anchor="ctr"/>
-          <a:lstStyle xmlns:a="http://schemas.openxmlformats.org/drawingml/2006/main"/>
-          <a:p xmlns:a="http://schemas.openxmlformats.org/drawingml/2006/main">
-            <a:pPr>
-              <a:defRPr sz="1275" b="0">
+          <a:bodyPr xmlns:a="http://schemas.openxmlformats.org/drawingml/2006/main" wrap="square" lIns="0" tIns="0" rIns="0" bIns="0" anchor="ctr">
+            <a:noAutofit/>
+          </a:bodyPr>
+          <a:lstStyle xmlns:a="http://schemas.openxmlformats.org/drawingml/2006/main"/>
+          <a:p xmlns:a="http://schemas.openxmlformats.org/drawingml/2006/main">
+            <a:pPr>
+              <a:buNone/>
+              <a:defRPr sz="1200" b="0">
                 <a:solidFill>
                   <a:srgbClr val="50616B"/>
                 </a:solidFill>
-              </a:defRPr>
-            </a:pPr>
-            <a:r>
-              <a:rPr sz="1275" b="0">
+                <a:latin typeface="Arial"/>
+                <a:ea typeface="Arial"/>
+                <a:cs typeface="Arial"/>
+              </a:defRPr>
+            </a:pPr>
+            <a:r>
+              <a:rPr sz="1200" b="0">
                 <a:solidFill>
                   <a:srgbClr val="50616B"/>
                 </a:solidFill>
+                <a:latin typeface="Arial"/>
+                <a:ea typeface="Arial"/>
+                <a:cs typeface="Arial"/>
               </a:rPr>
               <a:t>AUTUMN 1  ·  WEEK 5  ·  LESSON A</a:t>
             </a:r>
@@ -2524,14 +2650,20 @@
           </a:ln>
         </p:spPr>
         <p:txBody>
-          <a:bodyPr xmlns:a="http://schemas.openxmlformats.org/drawingml/2006/main" lIns="0" tIns="0" rIns="0" bIns="0" anchor="ctr"/>
-          <a:lstStyle xmlns:a="http://schemas.openxmlformats.org/drawingml/2006/main"/>
-          <a:p xmlns:a="http://schemas.openxmlformats.org/drawingml/2006/main">
-            <a:pPr>
+          <a:bodyPr xmlns:a="http://schemas.openxmlformats.org/drawingml/2006/main" wrap="square" lIns="0" tIns="0" rIns="0" bIns="0" anchor="ctr">
+            <a:noAutofit/>
+          </a:bodyPr>
+          <a:lstStyle xmlns:a="http://schemas.openxmlformats.org/drawingml/2006/main"/>
+          <a:p xmlns:a="http://schemas.openxmlformats.org/drawingml/2006/main">
+            <a:pPr>
+              <a:buNone/>
               <a:defRPr sz="1350" b="1">
                 <a:solidFill>
                   <a:srgbClr val="28685E"/>
                 </a:solidFill>
+                <a:latin typeface="Arial"/>
+                <a:ea typeface="Arial"/>
+                <a:cs typeface="Arial"/>
               </a:defRPr>
             </a:pPr>
             <a:r>
@@ -2539,6 +2671,9 @@
                 <a:solidFill>
                   <a:srgbClr val="28685E"/>
                 </a:solidFill>
+                <a:latin typeface="Arial"/>
+                <a:ea typeface="Arial"/>
+                <a:cs typeface="Arial"/>
               </a:rPr>
               <a:t>01</a:t>
             </a:r>
@@ -2561,8 +2696,8 @@
         </p:nvSpPr>
         <p:spPr>
           <a:xfrm xmlns:a="http://schemas.openxmlformats.org/drawingml/2006/main">
-            <a:off x="609600" y="2809875"/>
-            <a:ext cx="10668000" cy="1000125"/>
+            <a:off x="609600" y="2400300"/>
+            <a:ext cx="6191250" cy="1409700"/>
           </a:xfrm>
           <a:prstGeom xmlns:a="http://schemas.openxmlformats.org/drawingml/2006/main" prst="rect">
             <a:avLst/>
@@ -2574,21 +2709,30 @@
           </a:ln>
         </p:spPr>
         <p:txBody>
-          <a:bodyPr xmlns:a="http://schemas.openxmlformats.org/drawingml/2006/main" lIns="0" tIns="0" rIns="0" bIns="0" anchor="ctr"/>
-          <a:lstStyle xmlns:a="http://schemas.openxmlformats.org/drawingml/2006/main"/>
-          <a:p xmlns:a="http://schemas.openxmlformats.org/drawingml/2006/main">
-            <a:pPr>
-              <a:defRPr sz="3900" b="1">
+          <a:bodyPr xmlns:a="http://schemas.openxmlformats.org/drawingml/2006/main" wrap="square" lIns="0" tIns="0" rIns="0" bIns="0" anchor="ctr">
+            <a:noAutofit/>
+          </a:bodyPr>
+          <a:lstStyle xmlns:a="http://schemas.openxmlformats.org/drawingml/2006/main"/>
+          <a:p xmlns:a="http://schemas.openxmlformats.org/drawingml/2006/main">
+            <a:pPr>
+              <a:buNone/>
+              <a:defRPr sz="3450" b="1">
                 <a:solidFill>
                   <a:srgbClr val="28685E"/>
                 </a:solidFill>
-              </a:defRPr>
-            </a:pPr>
-            <a:r>
-              <a:rPr sz="3900" b="1">
+                <a:latin typeface="Arial"/>
+                <a:ea typeface="Arial"/>
+                <a:cs typeface="Arial"/>
+              </a:defRPr>
+            </a:pPr>
+            <a:r>
+              <a:rPr sz="3450" b="1">
                 <a:solidFill>
                   <a:srgbClr val="28685E"/>
                 </a:solidFill>
+                <a:latin typeface="Arial"/>
+                <a:ea typeface="Arial"/>
+                <a:cs typeface="Arial"/>
               </a:rPr>
               <a:t>Food has more than one job.</a:t>
             </a:r>
@@ -2611,8 +2755,8 @@
         </p:nvSpPr>
         <p:spPr>
           <a:xfrm xmlns:a="http://schemas.openxmlformats.org/drawingml/2006/main">
-            <a:off x="609600" y="4143375"/>
-            <a:ext cx="10668000" cy="1143000"/>
+            <a:off x="609600" y="4286250"/>
+            <a:ext cx="6667500" cy="1314450"/>
           </a:xfrm>
           <a:prstGeom xmlns:a="http://schemas.openxmlformats.org/drawingml/2006/main" prst="rect">
             <a:avLst/>
@@ -2624,27 +2768,58 @@
           </a:ln>
         </p:spPr>
         <p:txBody>
-          <a:bodyPr xmlns:a="http://schemas.openxmlformats.org/drawingml/2006/main" lIns="0" tIns="0" rIns="0" bIns="0" anchor="ctr"/>
-          <a:lstStyle xmlns:a="http://schemas.openxmlformats.org/drawingml/2006/main"/>
-          <a:p xmlns:a="http://schemas.openxmlformats.org/drawingml/2006/main">
-            <a:pPr>
-              <a:defRPr sz="2550" b="0">
-                <a:solidFill>
-                  <a:srgbClr val="152B3A"/>
-                </a:solidFill>
-              </a:defRPr>
-            </a:pPr>
-            <a:r>
-              <a:rPr sz="2550" b="0">
-                <a:solidFill>
-                  <a:srgbClr val="152B3A"/>
-                </a:solidFill>
+          <a:bodyPr xmlns:a="http://schemas.openxmlformats.org/drawingml/2006/main" wrap="square" lIns="0" tIns="0" rIns="0" bIns="0" anchor="ctr">
+            <a:noAutofit/>
+          </a:bodyPr>
+          <a:lstStyle xmlns:a="http://schemas.openxmlformats.org/drawingml/2006/main"/>
+          <a:p xmlns:a="http://schemas.openxmlformats.org/drawingml/2006/main">
+            <a:pPr>
+              <a:buNone/>
+              <a:defRPr sz="2400" b="0">
+                <a:solidFill>
+                  <a:srgbClr val="152B3A"/>
+                </a:solidFill>
+                <a:latin typeface="Arial"/>
+                <a:ea typeface="Arial"/>
+                <a:cs typeface="Arial"/>
+              </a:defRPr>
+            </a:pPr>
+            <a:r>
+              <a:rPr sz="2400" b="0">
+                <a:solidFill>
+                  <a:srgbClr val="152B3A"/>
+                </a:solidFill>
+                <a:latin typeface="Arial"/>
+                <a:ea typeface="Arial"/>
+                <a:cs typeface="Arial"/>
               </a:rPr>
               <a:t>I can explain why a body needs a range of nutrients.</a:t>
             </a:r>
           </a:p>
         </p:txBody>
       </p:sp>
+      <p:pic>
+        <p:nvPicPr>
+          <p:cNvPr id="22" name=""/>
+          <p:cNvPicPr>
+            <a:picLocks xmlns:a="http://schemas.openxmlformats.org/drawingml/2006/main" noChangeAspect="1"/>
+          </p:cNvPicPr>
+          <p:nvPr/>
+        </p:nvPicPr>
+        <p:blipFill>
+          <a:blip xmlns:r="http://schemas.openxmlformats.org/officeDocument/2006/relationships" xmlns:a="http://schemas.openxmlformats.org/drawingml/2006/main" r:embed="R19c9810ed7c446ef"/>
+          <a:stretch xmlns:a="http://schemas.openxmlformats.org/drawingml/2006/main"/>
+        </p:blipFill>
+        <p:spPr>
+          <a:xfrm xmlns:a="http://schemas.openxmlformats.org/drawingml/2006/main">
+            <a:off x="8209598" y="2190750"/>
+            <a:ext cx="2535555" cy="3143250"/>
+          </a:xfrm>
+          <a:prstGeom xmlns:a="http://schemas.openxmlformats.org/drawingml/2006/main" prst="rect">
+            <a:avLst/>
+          </a:prstGeom>
+        </p:spPr>
+      </p:pic>
     </p:spTree>
     <p:extLst>
       <p:ext uri="{BB962C8B-B14F-4D97-AF65-F5344CB8AC3E}">
@@ -2661,7 +2836,7 @@
     <p:bg>
       <p:bgPr>
         <a:solidFill xmlns:a="http://schemas.openxmlformats.org/drawingml/2006/main">
-          <a:srgbClr val="F5F1E8"/>
+          <a:srgbClr val="FBF9F3"/>
         </a:solidFill>
       </p:bgPr>
     </p:bg>
@@ -2690,8 +2865,8 @@
         </p:nvSpPr>
         <p:spPr>
           <a:xfrm xmlns:a="http://schemas.openxmlformats.org/drawingml/2006/main">
-            <a:off x="609600" y="552450"/>
-            <a:ext cx="781050" cy="57150"/>
+            <a:off x="609600" y="742950"/>
+            <a:ext cx="9906000" cy="38100"/>
           </a:xfrm>
           <a:prstGeom xmlns:a="http://schemas.openxmlformats.org/drawingml/2006/main" prst="rect">
             <a:avLst/>
@@ -2721,8 +2896,8 @@
         </p:nvSpPr>
         <p:spPr>
           <a:xfrm xmlns:a="http://schemas.openxmlformats.org/drawingml/2006/main">
-            <a:off x="609600" y="762000"/>
-            <a:ext cx="9334500" cy="285750"/>
+            <a:off x="609600" y="342900"/>
+            <a:ext cx="9334500" cy="266700"/>
           </a:xfrm>
           <a:prstGeom xmlns:a="http://schemas.openxmlformats.org/drawingml/2006/main" prst="rect">
             <a:avLst/>
@@ -2734,21 +2909,30 @@
           </a:ln>
         </p:spPr>
         <p:txBody>
-          <a:bodyPr xmlns:a="http://schemas.openxmlformats.org/drawingml/2006/main" lIns="0" tIns="0" rIns="0" bIns="0" anchor="ctr"/>
-          <a:lstStyle xmlns:a="http://schemas.openxmlformats.org/drawingml/2006/main"/>
-          <a:p xmlns:a="http://schemas.openxmlformats.org/drawingml/2006/main">
-            <a:pPr>
-              <a:defRPr sz="1500" b="1">
+          <a:bodyPr xmlns:a="http://schemas.openxmlformats.org/drawingml/2006/main" wrap="square" lIns="0" tIns="0" rIns="0" bIns="0" anchor="ctr">
+            <a:noAutofit/>
+          </a:bodyPr>
+          <a:lstStyle xmlns:a="http://schemas.openxmlformats.org/drawingml/2006/main"/>
+          <a:p xmlns:a="http://schemas.openxmlformats.org/drawingml/2006/main">
+            <a:pPr>
+              <a:buNone/>
+              <a:defRPr sz="1425" b="1">
                 <a:solidFill>
                   <a:srgbClr val="28685E"/>
                 </a:solidFill>
-              </a:defRPr>
-            </a:pPr>
-            <a:r>
-              <a:rPr sz="1500" b="1">
+                <a:latin typeface="Arial"/>
+                <a:ea typeface="Arial"/>
+                <a:cs typeface="Arial"/>
+              </a:defRPr>
+            </a:pPr>
+            <a:r>
+              <a:rPr sz="1425" b="1">
                 <a:solidFill>
                   <a:srgbClr val="28685E"/>
                 </a:solidFill>
+                <a:latin typeface="Arial"/>
+                <a:ea typeface="Arial"/>
+                <a:cs typeface="Arial"/>
               </a:rPr>
               <a:t>MADE BY MATT  /  BUILD SCIENCE</a:t>
             </a:r>
@@ -2757,14 +2941,14 @@
       </p:sp>
       <p:pic>
         <p:nvPicPr>
-          <p:cNvPr id="14" name=""/>
+          <p:cNvPr id="18" name=""/>
           <p:cNvPicPr>
             <a:picLocks xmlns:a="http://schemas.openxmlformats.org/drawingml/2006/main" noChangeAspect="1"/>
           </p:cNvPicPr>
           <p:nvPr/>
         </p:nvPicPr>
         <p:blipFill>
-          <a:blip xmlns:r="http://schemas.openxmlformats.org/officeDocument/2006/relationships" xmlns:a="http://schemas.openxmlformats.org/drawingml/2006/main" r:embed="Rc1c30059d01e40be"/>
+          <a:blip xmlns:r="http://schemas.openxmlformats.org/officeDocument/2006/relationships" xmlns:a="http://schemas.openxmlformats.org/drawingml/2006/main" r:embed="R1f6069f9398b4f05"/>
           <a:stretch xmlns:a="http://schemas.openxmlformats.org/drawingml/2006/main"/>
         </p:blipFill>
         <p:spPr>
@@ -2793,8 +2977,8 @@
         </p:nvSpPr>
         <p:spPr>
           <a:xfrm xmlns:a="http://schemas.openxmlformats.org/drawingml/2006/main">
-            <a:off x="609600" y="1352550"/>
-            <a:ext cx="10972800" cy="952500"/>
+            <a:off x="609600" y="1047750"/>
+            <a:ext cx="10972800" cy="895350"/>
           </a:xfrm>
           <a:prstGeom xmlns:a="http://schemas.openxmlformats.org/drawingml/2006/main" prst="rect">
             <a:avLst/>
@@ -2806,21 +2990,30 @@
           </a:ln>
         </p:spPr>
         <p:txBody>
-          <a:bodyPr xmlns:a="http://schemas.openxmlformats.org/drawingml/2006/main" lIns="0" tIns="0" rIns="0" bIns="0" anchor="ctr"/>
-          <a:lstStyle xmlns:a="http://schemas.openxmlformats.org/drawingml/2006/main"/>
-          <a:p xmlns:a="http://schemas.openxmlformats.org/drawingml/2006/main">
-            <a:pPr>
-              <a:defRPr sz="3750" b="1">
-                <a:solidFill>
-                  <a:srgbClr val="152B3A"/>
-                </a:solidFill>
-              </a:defRPr>
-            </a:pPr>
-            <a:r>
-              <a:rPr sz="3750" b="1">
-                <a:solidFill>
-                  <a:srgbClr val="152B3A"/>
-                </a:solidFill>
+          <a:bodyPr xmlns:a="http://schemas.openxmlformats.org/drawingml/2006/main" wrap="square" lIns="0" tIns="0" rIns="0" bIns="0" anchor="ctr">
+            <a:noAutofit/>
+          </a:bodyPr>
+          <a:lstStyle xmlns:a="http://schemas.openxmlformats.org/drawingml/2006/main"/>
+          <a:p xmlns:a="http://schemas.openxmlformats.org/drawingml/2006/main">
+            <a:pPr>
+              <a:buNone/>
+              <a:defRPr sz="3600" b="1">
+                <a:solidFill>
+                  <a:srgbClr val="152B3A"/>
+                </a:solidFill>
+                <a:latin typeface="Arial"/>
+                <a:ea typeface="Arial"/>
+                <a:cs typeface="Arial"/>
+              </a:defRPr>
+            </a:pPr>
+            <a:r>
+              <a:rPr sz="3600" b="1">
+                <a:solidFill>
+                  <a:srgbClr val="152B3A"/>
+                </a:solidFill>
+                <a:latin typeface="Arial"/>
+                <a:ea typeface="Arial"/>
+                <a:cs typeface="Arial"/>
               </a:rPr>
               <a:t>Match and challenge a claim</a:t>
             </a:r>
@@ -2887,21 +3080,30 @@
           </a:ln>
         </p:spPr>
         <p:txBody>
-          <a:bodyPr xmlns:a="http://schemas.openxmlformats.org/drawingml/2006/main" lIns="0" tIns="0" rIns="0" bIns="0" anchor="ctr"/>
-          <a:lstStyle xmlns:a="http://schemas.openxmlformats.org/drawingml/2006/main"/>
-          <a:p xmlns:a="http://schemas.openxmlformats.org/drawingml/2006/main">
-            <a:pPr>
-              <a:defRPr sz="1275" b="0">
+          <a:bodyPr xmlns:a="http://schemas.openxmlformats.org/drawingml/2006/main" wrap="square" lIns="0" tIns="0" rIns="0" bIns="0" anchor="ctr">
+            <a:noAutofit/>
+          </a:bodyPr>
+          <a:lstStyle xmlns:a="http://schemas.openxmlformats.org/drawingml/2006/main"/>
+          <a:p xmlns:a="http://schemas.openxmlformats.org/drawingml/2006/main">
+            <a:pPr>
+              <a:buNone/>
+              <a:defRPr sz="1200" b="0">
                 <a:solidFill>
                   <a:srgbClr val="50616B"/>
                 </a:solidFill>
-              </a:defRPr>
-            </a:pPr>
-            <a:r>
-              <a:rPr sz="1275" b="0">
+                <a:latin typeface="Arial"/>
+                <a:ea typeface="Arial"/>
+                <a:cs typeface="Arial"/>
+              </a:defRPr>
+            </a:pPr>
+            <a:r>
+              <a:rPr sz="1200" b="0">
                 <a:solidFill>
                   <a:srgbClr val="50616B"/>
                 </a:solidFill>
+                <a:latin typeface="Arial"/>
+                <a:ea typeface="Arial"/>
+                <a:cs typeface="Arial"/>
               </a:rPr>
               <a:t>AUTUMN 1  ·  WEEK 5  ·  LESSON A</a:t>
             </a:r>
@@ -2937,14 +3139,20 @@
           </a:ln>
         </p:spPr>
         <p:txBody>
-          <a:bodyPr xmlns:a="http://schemas.openxmlformats.org/drawingml/2006/main" lIns="0" tIns="0" rIns="0" bIns="0" anchor="ctr"/>
-          <a:lstStyle xmlns:a="http://schemas.openxmlformats.org/drawingml/2006/main"/>
-          <a:p xmlns:a="http://schemas.openxmlformats.org/drawingml/2006/main">
-            <a:pPr>
+          <a:bodyPr xmlns:a="http://schemas.openxmlformats.org/drawingml/2006/main" wrap="square" lIns="0" tIns="0" rIns="0" bIns="0" anchor="ctr">
+            <a:noAutofit/>
+          </a:bodyPr>
+          <a:lstStyle xmlns:a="http://schemas.openxmlformats.org/drawingml/2006/main"/>
+          <a:p xmlns:a="http://schemas.openxmlformats.org/drawingml/2006/main">
+            <a:pPr>
+              <a:buNone/>
               <a:defRPr sz="1350" b="1">
                 <a:solidFill>
                   <a:srgbClr val="28685E"/>
                 </a:solidFill>
+                <a:latin typeface="Arial"/>
+                <a:ea typeface="Arial"/>
+                <a:cs typeface="Arial"/>
               </a:defRPr>
             </a:pPr>
             <a:r>
@@ -2952,6 +3160,9 @@
                 <a:solidFill>
                   <a:srgbClr val="28685E"/>
                 </a:solidFill>
+                <a:latin typeface="Arial"/>
+                <a:ea typeface="Arial"/>
+                <a:cs typeface="Arial"/>
               </a:rPr>
               <a:t>10</a:t>
             </a:r>
@@ -2974,8 +3185,8 @@
         </p:nvSpPr>
         <p:spPr>
           <a:xfrm xmlns:a="http://schemas.openxmlformats.org/drawingml/2006/main">
-            <a:off x="609600" y="2619375"/>
-            <a:ext cx="4953000" cy="428625"/>
+            <a:off x="609600" y="2257425"/>
+            <a:ext cx="5143500" cy="533400"/>
           </a:xfrm>
           <a:prstGeom xmlns:a="http://schemas.openxmlformats.org/drawingml/2006/main" prst="rect">
             <a:avLst/>
@@ -2987,21 +3198,30 @@
           </a:ln>
         </p:spPr>
         <p:txBody>
-          <a:bodyPr xmlns:a="http://schemas.openxmlformats.org/drawingml/2006/main" lIns="0" tIns="0" rIns="0" bIns="0" anchor="ctr"/>
-          <a:lstStyle xmlns:a="http://schemas.openxmlformats.org/drawingml/2006/main"/>
-          <a:p xmlns:a="http://schemas.openxmlformats.org/drawingml/2006/main">
-            <a:pPr>
-              <a:defRPr sz="2025" b="1">
+          <a:bodyPr xmlns:a="http://schemas.openxmlformats.org/drawingml/2006/main" wrap="square" lIns="0" tIns="0" rIns="0" bIns="0" anchor="ctr">
+            <a:noAutofit/>
+          </a:bodyPr>
+          <a:lstStyle xmlns:a="http://schemas.openxmlformats.org/drawingml/2006/main"/>
+          <a:p xmlns:a="http://schemas.openxmlformats.org/drawingml/2006/main">
+            <a:pPr>
+              <a:buNone/>
+              <a:defRPr sz="2100" b="1">
                 <a:solidFill>
                   <a:srgbClr val="28685E"/>
                 </a:solidFill>
-              </a:defRPr>
-            </a:pPr>
-            <a:r>
-              <a:rPr sz="2025" b="1">
+                <a:latin typeface="Arial"/>
+                <a:ea typeface="Arial"/>
+                <a:cs typeface="Arial"/>
+              </a:defRPr>
+            </a:pPr>
+            <a:r>
+              <a:rPr sz="2100" b="1">
                 <a:solidFill>
                   <a:srgbClr val="28685E"/>
                 </a:solidFill>
+                <a:latin typeface="Arial"/>
+                <a:ea typeface="Arial"/>
+                <a:cs typeface="Arial"/>
               </a:rPr>
               <a:t>MATCH THE EXAMPLES</a:t>
             </a:r>
@@ -3024,8 +3244,8 @@
         </p:nvSpPr>
         <p:spPr>
           <a:xfrm xmlns:a="http://schemas.openxmlformats.org/drawingml/2006/main">
-            <a:off x="6572250" y="2619375"/>
-            <a:ext cx="4953000" cy="428625"/>
+            <a:off x="6572250" y="2257425"/>
+            <a:ext cx="5010150" cy="533400"/>
           </a:xfrm>
           <a:prstGeom xmlns:a="http://schemas.openxmlformats.org/drawingml/2006/main" prst="rect">
             <a:avLst/>
@@ -3037,21 +3257,30 @@
           </a:ln>
         </p:spPr>
         <p:txBody>
-          <a:bodyPr xmlns:a="http://schemas.openxmlformats.org/drawingml/2006/main" lIns="0" tIns="0" rIns="0" bIns="0" anchor="ctr"/>
-          <a:lstStyle xmlns:a="http://schemas.openxmlformats.org/drawingml/2006/main"/>
-          <a:p xmlns:a="http://schemas.openxmlformats.org/drawingml/2006/main">
-            <a:pPr>
-              <a:defRPr sz="2025" b="1">
+          <a:bodyPr xmlns:a="http://schemas.openxmlformats.org/drawingml/2006/main" wrap="square" lIns="0" tIns="0" rIns="0" bIns="0" anchor="ctr">
+            <a:noAutofit/>
+          </a:bodyPr>
+          <a:lstStyle xmlns:a="http://schemas.openxmlformats.org/drawingml/2006/main"/>
+          <a:p xmlns:a="http://schemas.openxmlformats.org/drawingml/2006/main">
+            <a:pPr>
+              <a:buNone/>
+              <a:defRPr sz="2100" b="1">
                 <a:solidFill>
                   <a:srgbClr val="A65D25"/>
                 </a:solidFill>
-              </a:defRPr>
-            </a:pPr>
-            <a:r>
-              <a:rPr sz="2025" b="1">
+                <a:latin typeface="Arial"/>
+                <a:ea typeface="Arial"/>
+                <a:cs typeface="Arial"/>
+              </a:defRPr>
+            </a:pPr>
+            <a:r>
+              <a:rPr sz="2100" b="1">
                 <a:solidFill>
                   <a:srgbClr val="A65D25"/>
                 </a:solidFill>
+                <a:latin typeface="Arial"/>
+                <a:ea typeface="Arial"/>
+                <a:cs typeface="Arial"/>
               </a:rPr>
               <a:t>CHECK THE CLAIM</a:t>
             </a:r>
@@ -3074,8 +3303,8 @@
         </p:nvSpPr>
         <p:spPr>
           <a:xfrm xmlns:a="http://schemas.openxmlformats.org/drawingml/2006/main">
-            <a:off x="609600" y="3333750"/>
-            <a:ext cx="4953000" cy="2524125"/>
+            <a:off x="609600" y="3238500"/>
+            <a:ext cx="5143500" cy="2286000"/>
           </a:xfrm>
           <a:prstGeom xmlns:a="http://schemas.openxmlformats.org/drawingml/2006/main" prst="rect">
             <a:avLst/>
@@ -3087,14 +3316,20 @@
           </a:ln>
         </p:spPr>
         <p:txBody>
-          <a:bodyPr xmlns:a="http://schemas.openxmlformats.org/drawingml/2006/main" lIns="0" tIns="0" rIns="0" bIns="0" anchor="ctr"/>
-          <a:lstStyle xmlns:a="http://schemas.openxmlformats.org/drawingml/2006/main"/>
-          <a:p xmlns:a="http://schemas.openxmlformats.org/drawingml/2006/main">
-            <a:pPr>
+          <a:bodyPr xmlns:a="http://schemas.openxmlformats.org/drawingml/2006/main" wrap="square" lIns="0" tIns="0" rIns="0" bIns="0" anchor="ctr">
+            <a:noAutofit/>
+          </a:bodyPr>
+          <a:lstStyle xmlns:a="http://schemas.openxmlformats.org/drawingml/2006/main"/>
+          <a:p xmlns:a="http://schemas.openxmlformats.org/drawingml/2006/main">
+            <a:pPr>
+              <a:buNone/>
               <a:defRPr sz="2400" b="0">
                 <a:solidFill>
                   <a:srgbClr val="152B3A"/>
                 </a:solidFill>
+                <a:latin typeface="Arial"/>
+                <a:ea typeface="Arial"/>
+                <a:cs typeface="Arial"/>
               </a:defRPr>
             </a:pPr>
             <a:r>
@@ -3102,16 +3337,23 @@
                 <a:solidFill>
                   <a:srgbClr val="152B3A"/>
                 </a:solidFill>
+                <a:latin typeface="Arial"/>
+                <a:ea typeface="Arial"/>
+                <a:cs typeface="Arial"/>
               </a:rPr>
               <a:t>Cow — ?</a:t>
             </a:r>
           </a:p>
           <a:p xmlns:a="http://schemas.openxmlformats.org/drawingml/2006/main">
             <a:pPr>
+              <a:buNone/>
               <a:defRPr sz="2400" b="0">
                 <a:solidFill>
                   <a:srgbClr val="152B3A"/>
                 </a:solidFill>
+                <a:latin typeface="Arial"/>
+                <a:ea typeface="Arial"/>
+                <a:cs typeface="Arial"/>
               </a:defRPr>
             </a:pPr>
             <a:r>
@@ -3119,16 +3361,23 @@
                 <a:solidFill>
                   <a:srgbClr val="152B3A"/>
                 </a:solidFill>
+                <a:latin typeface="Arial"/>
+                <a:ea typeface="Arial"/>
+                <a:cs typeface="Arial"/>
               </a:rPr>
               <a:t>Owl — ?</a:t>
             </a:r>
           </a:p>
           <a:p xmlns:a="http://schemas.openxmlformats.org/drawingml/2006/main">
             <a:pPr>
+              <a:buNone/>
               <a:defRPr sz="2400" b="0">
                 <a:solidFill>
                   <a:srgbClr val="152B3A"/>
                 </a:solidFill>
+                <a:latin typeface="Arial"/>
+                <a:ea typeface="Arial"/>
+                <a:cs typeface="Arial"/>
               </a:defRPr>
             </a:pPr>
             <a:r>
@@ -3136,16 +3385,23 @@
                 <a:solidFill>
                   <a:srgbClr val="152B3A"/>
                 </a:solidFill>
+                <a:latin typeface="Arial"/>
+                <a:ea typeface="Arial"/>
+                <a:cs typeface="Arial"/>
               </a:rPr>
               <a:t>Caterpillar — ?</a:t>
             </a:r>
           </a:p>
           <a:p xmlns:a="http://schemas.openxmlformats.org/drawingml/2006/main">
             <a:pPr>
+              <a:buNone/>
               <a:defRPr sz="2400" b="0">
                 <a:solidFill>
                   <a:srgbClr val="152B3A"/>
                 </a:solidFill>
+                <a:latin typeface="Arial"/>
+                <a:ea typeface="Arial"/>
+                <a:cs typeface="Arial"/>
               </a:defRPr>
             </a:pPr>
             <a:r>
@@ -3153,6 +3409,9 @@
                 <a:solidFill>
                   <a:srgbClr val="152B3A"/>
                 </a:solidFill>
+                <a:latin typeface="Arial"/>
+                <a:ea typeface="Arial"/>
+                <a:cs typeface="Arial"/>
               </a:rPr>
               <a:t>Goldfish — ?</a:t>
             </a:r>
@@ -3175,8 +3434,8 @@
         </p:nvSpPr>
         <p:spPr>
           <a:xfrm xmlns:a="http://schemas.openxmlformats.org/drawingml/2006/main">
-            <a:off x="6572250" y="3333750"/>
-            <a:ext cx="4857750" cy="2524125"/>
+            <a:off x="6572250" y="3238500"/>
+            <a:ext cx="5010150" cy="2286000"/>
           </a:xfrm>
           <a:prstGeom xmlns:a="http://schemas.openxmlformats.org/drawingml/2006/main" prst="rect">
             <a:avLst/>
@@ -3188,14 +3447,20 @@
           </a:ln>
         </p:spPr>
         <p:txBody>
-          <a:bodyPr xmlns:a="http://schemas.openxmlformats.org/drawingml/2006/main" lIns="0" tIns="0" rIns="0" bIns="0" anchor="ctr"/>
-          <a:lstStyle xmlns:a="http://schemas.openxmlformats.org/drawingml/2006/main"/>
-          <a:p xmlns:a="http://schemas.openxmlformats.org/drawingml/2006/main">
-            <a:pPr>
+          <a:bodyPr xmlns:a="http://schemas.openxmlformats.org/drawingml/2006/main" wrap="square" lIns="0" tIns="0" rIns="0" bIns="0" anchor="ctr">
+            <a:noAutofit/>
+          </a:bodyPr>
+          <a:lstStyle xmlns:a="http://schemas.openxmlformats.org/drawingml/2006/main"/>
+          <a:p xmlns:a="http://schemas.openxmlformats.org/drawingml/2006/main">
+            <a:pPr>
+              <a:buNone/>
               <a:defRPr sz="2400" b="0">
                 <a:solidFill>
                   <a:srgbClr val="152B3A"/>
                 </a:solidFill>
+                <a:latin typeface="Arial"/>
+                <a:ea typeface="Arial"/>
+                <a:cs typeface="Arial"/>
               </a:defRPr>
             </a:pPr>
             <a:r>
@@ -3203,16 +3468,23 @@
                 <a:solidFill>
                   <a:srgbClr val="152B3A"/>
                 </a:solidFill>
+                <a:latin typeface="Arial"/>
+                <a:ea typeface="Arial"/>
+                <a:cs typeface="Arial"/>
               </a:rPr>
               <a:t>“Every animal needs the same food.”</a:t>
             </a:r>
           </a:p>
           <a:p xmlns:a="http://schemas.openxmlformats.org/drawingml/2006/main">
             <a:pPr>
+              <a:buNone/>
               <a:defRPr sz="2400" b="0">
                 <a:solidFill>
                   <a:srgbClr val="152B3A"/>
                 </a:solidFill>
+                <a:latin typeface="Arial"/>
+                <a:ea typeface="Arial"/>
+                <a:cs typeface="Arial"/>
               </a:defRPr>
             </a:pPr>
             <a:r>
@@ -3220,16 +3492,23 @@
                 <a:solidFill>
                   <a:srgbClr val="152B3A"/>
                 </a:solidFill>
+                <a:latin typeface="Arial"/>
+                <a:ea typeface="Arial"/>
+                <a:cs typeface="Arial"/>
               </a:rPr>
               <a:t>Agree or correct it.</a:t>
             </a:r>
           </a:p>
           <a:p xmlns:a="http://schemas.openxmlformats.org/drawingml/2006/main">
             <a:pPr>
+              <a:buNone/>
               <a:defRPr sz="2400" b="0">
                 <a:solidFill>
                   <a:srgbClr val="152B3A"/>
                 </a:solidFill>
+                <a:latin typeface="Arial"/>
+                <a:ea typeface="Arial"/>
+                <a:cs typeface="Arial"/>
               </a:defRPr>
             </a:pPr>
             <a:r>
@@ -3237,11 +3516,76 @@
                 <a:solidFill>
                   <a:srgbClr val="152B3A"/>
                 </a:solidFill>
+                <a:latin typeface="Arial"/>
+                <a:ea typeface="Arial"/>
+                <a:cs typeface="Arial"/>
               </a:rPr>
               <a:t>Use two examples as evidence.</a:t>
             </a:r>
           </a:p>
         </p:txBody>
+      </p:sp>
+      <p:sp>
+        <p:nvSpPr>
+          <p:cNvPr id="14" name="">
+            <a:extLst xmlns:a="http://schemas.openxmlformats.org/drawingml/2006/main">
+              <a:ext uri="{FF2B5EF4-FFF2-40B4-BE49-F238E27FC236}">
+                <a16:creationId xmlns:a16="http://schemas.microsoft.com/office/drawing/2014/main" id="{CB8C8BC0-FCF0-4285-BD46-85F9CB4EC79A}"/>
+              </a:ext>
+            </a:extLst>
+          </p:cNvPr>
+          <p:cNvSpPr>
+            <a:spLocks xmlns:a="http://schemas.openxmlformats.org/drawingml/2006/main" noGrp="1"/>
+          </p:cNvSpPr>
+          <p:nvPr/>
+        </p:nvSpPr>
+        <p:spPr>
+          <a:xfrm xmlns:a="http://schemas.openxmlformats.org/drawingml/2006/main">
+            <a:off x="609600" y="2886075"/>
+            <a:ext cx="5048250" cy="0"/>
+          </a:xfrm>
+          <a:prstGeom xmlns:a="http://schemas.openxmlformats.org/drawingml/2006/main" prst="line">
+            <a:avLst/>
+          </a:prstGeom>
+          <a:noFill xmlns:a="http://schemas.openxmlformats.org/drawingml/2006/main"/>
+          <a:ln xmlns:a="http://schemas.openxmlformats.org/drawingml/2006/main" w="28575">
+            <a:solidFill>
+              <a:srgbClr val="DCE7DD"/>
+            </a:solidFill>
+            <a:prstDash val="solid"/>
+          </a:ln>
+        </p:spPr>
+      </p:sp>
+      <p:sp>
+        <p:nvSpPr>
+          <p:cNvPr id="15" name="">
+            <a:extLst xmlns:a="http://schemas.openxmlformats.org/drawingml/2006/main">
+              <a:ext uri="{FF2B5EF4-FFF2-40B4-BE49-F238E27FC236}">
+                <a16:creationId xmlns:a16="http://schemas.microsoft.com/office/drawing/2014/main" id="{E12E817A-E773-4E22-AD93-64AE7EA2CA19}"/>
+              </a:ext>
+            </a:extLst>
+          </p:cNvPr>
+          <p:cNvSpPr>
+            <a:spLocks xmlns:a="http://schemas.openxmlformats.org/drawingml/2006/main" noGrp="1"/>
+          </p:cNvSpPr>
+          <p:nvPr/>
+        </p:nvSpPr>
+        <p:spPr>
+          <a:xfrm xmlns:a="http://schemas.openxmlformats.org/drawingml/2006/main">
+            <a:off x="6572250" y="2886075"/>
+            <a:ext cx="5010150" cy="0"/>
+          </a:xfrm>
+          <a:prstGeom xmlns:a="http://schemas.openxmlformats.org/drawingml/2006/main" prst="line">
+            <a:avLst/>
+          </a:prstGeom>
+          <a:noFill xmlns:a="http://schemas.openxmlformats.org/drawingml/2006/main"/>
+          <a:ln xmlns:a="http://schemas.openxmlformats.org/drawingml/2006/main" w="28575">
+            <a:solidFill>
+              <a:srgbClr val="DCE7DD"/>
+            </a:solidFill>
+            <a:prstDash val="solid"/>
+          </a:ln>
+        </p:spPr>
       </p:sp>
     </p:spTree>
     <p:extLst>
@@ -3259,7 +3603,7 @@
     <p:bg>
       <p:bgPr>
         <a:solidFill xmlns:a="http://schemas.openxmlformats.org/drawingml/2006/main">
-          <a:srgbClr val="F5F1E8"/>
+          <a:srgbClr val="FBF9F3"/>
         </a:solidFill>
       </p:bgPr>
     </p:bg>
@@ -3288,8 +3632,8 @@
         </p:nvSpPr>
         <p:spPr>
           <a:xfrm xmlns:a="http://schemas.openxmlformats.org/drawingml/2006/main">
-            <a:off x="609600" y="552450"/>
-            <a:ext cx="781050" cy="57150"/>
+            <a:off x="609600" y="742950"/>
+            <a:ext cx="9906000" cy="38100"/>
           </a:xfrm>
           <a:prstGeom xmlns:a="http://schemas.openxmlformats.org/drawingml/2006/main" prst="rect">
             <a:avLst/>
@@ -3319,8 +3663,8 @@
         </p:nvSpPr>
         <p:spPr>
           <a:xfrm xmlns:a="http://schemas.openxmlformats.org/drawingml/2006/main">
-            <a:off x="609600" y="762000"/>
-            <a:ext cx="9334500" cy="285750"/>
+            <a:off x="609600" y="342900"/>
+            <a:ext cx="9334500" cy="266700"/>
           </a:xfrm>
           <a:prstGeom xmlns:a="http://schemas.openxmlformats.org/drawingml/2006/main" prst="rect">
             <a:avLst/>
@@ -3332,21 +3676,30 @@
           </a:ln>
         </p:spPr>
         <p:txBody>
-          <a:bodyPr xmlns:a="http://schemas.openxmlformats.org/drawingml/2006/main" lIns="0" tIns="0" rIns="0" bIns="0" anchor="ctr"/>
-          <a:lstStyle xmlns:a="http://schemas.openxmlformats.org/drawingml/2006/main"/>
-          <a:p xmlns:a="http://schemas.openxmlformats.org/drawingml/2006/main">
-            <a:pPr>
-              <a:defRPr sz="1500" b="1">
+          <a:bodyPr xmlns:a="http://schemas.openxmlformats.org/drawingml/2006/main" wrap="square" lIns="0" tIns="0" rIns="0" bIns="0" anchor="ctr">
+            <a:noAutofit/>
+          </a:bodyPr>
+          <a:lstStyle xmlns:a="http://schemas.openxmlformats.org/drawingml/2006/main"/>
+          <a:p xmlns:a="http://schemas.openxmlformats.org/drawingml/2006/main">
+            <a:pPr>
+              <a:buNone/>
+              <a:defRPr sz="1425" b="1">
                 <a:solidFill>
                   <a:srgbClr val="28685E"/>
                 </a:solidFill>
-              </a:defRPr>
-            </a:pPr>
-            <a:r>
-              <a:rPr sz="1500" b="1">
+                <a:latin typeface="Arial"/>
+                <a:ea typeface="Arial"/>
+                <a:cs typeface="Arial"/>
+              </a:defRPr>
+            </a:pPr>
+            <a:r>
+              <a:rPr sz="1425" b="1">
                 <a:solidFill>
                   <a:srgbClr val="28685E"/>
                 </a:solidFill>
+                <a:latin typeface="Arial"/>
+                <a:ea typeface="Arial"/>
+                <a:cs typeface="Arial"/>
               </a:rPr>
               <a:t>MADE BY MATT  /  BUILD SCIENCE</a:t>
             </a:r>
@@ -3355,14 +3708,14 @@
       </p:sp>
       <p:pic>
         <p:nvPicPr>
-          <p:cNvPr id="14" name=""/>
+          <p:cNvPr id="16" name=""/>
           <p:cNvPicPr>
             <a:picLocks xmlns:a="http://schemas.openxmlformats.org/drawingml/2006/main" noChangeAspect="1"/>
           </p:cNvPicPr>
           <p:nvPr/>
         </p:nvPicPr>
         <p:blipFill>
-          <a:blip xmlns:r="http://schemas.openxmlformats.org/officeDocument/2006/relationships" xmlns:a="http://schemas.openxmlformats.org/drawingml/2006/main" r:embed="R5930ad18f7224008"/>
+          <a:blip xmlns:r="http://schemas.openxmlformats.org/officeDocument/2006/relationships" xmlns:a="http://schemas.openxmlformats.org/drawingml/2006/main" r:embed="R5456030157ca496b"/>
           <a:stretch xmlns:a="http://schemas.openxmlformats.org/drawingml/2006/main"/>
         </p:blipFill>
         <p:spPr>
@@ -3391,8 +3744,8 @@
         </p:nvSpPr>
         <p:spPr>
           <a:xfrm xmlns:a="http://schemas.openxmlformats.org/drawingml/2006/main">
-            <a:off x="609600" y="1352550"/>
-            <a:ext cx="10972800" cy="952500"/>
+            <a:off x="609600" y="1047750"/>
+            <a:ext cx="10972800" cy="895350"/>
           </a:xfrm>
           <a:prstGeom xmlns:a="http://schemas.openxmlformats.org/drawingml/2006/main" prst="rect">
             <a:avLst/>
@@ -3404,21 +3757,30 @@
           </a:ln>
         </p:spPr>
         <p:txBody>
-          <a:bodyPr xmlns:a="http://schemas.openxmlformats.org/drawingml/2006/main" lIns="0" tIns="0" rIns="0" bIns="0" anchor="ctr"/>
-          <a:lstStyle xmlns:a="http://schemas.openxmlformats.org/drawingml/2006/main"/>
-          <a:p xmlns:a="http://schemas.openxmlformats.org/drawingml/2006/main">
-            <a:pPr>
-              <a:defRPr sz="3750" b="1">
-                <a:solidFill>
-                  <a:srgbClr val="152B3A"/>
-                </a:solidFill>
-              </a:defRPr>
-            </a:pPr>
-            <a:r>
-              <a:rPr sz="3750" b="1">
-                <a:solidFill>
-                  <a:srgbClr val="152B3A"/>
-                </a:solidFill>
+          <a:bodyPr xmlns:a="http://schemas.openxmlformats.org/drawingml/2006/main" wrap="square" lIns="0" tIns="0" rIns="0" bIns="0" anchor="ctr">
+            <a:noAutofit/>
+          </a:bodyPr>
+          <a:lstStyle xmlns:a="http://schemas.openxmlformats.org/drawingml/2006/main"/>
+          <a:p xmlns:a="http://schemas.openxmlformats.org/drawingml/2006/main">
+            <a:pPr>
+              <a:buNone/>
+              <a:defRPr sz="3600" b="1">
+                <a:solidFill>
+                  <a:srgbClr val="152B3A"/>
+                </a:solidFill>
+                <a:latin typeface="Arial"/>
+                <a:ea typeface="Arial"/>
+                <a:cs typeface="Arial"/>
+              </a:defRPr>
+            </a:pPr>
+            <a:r>
+              <a:rPr sz="3600" b="1">
+                <a:solidFill>
+                  <a:srgbClr val="152B3A"/>
+                </a:solidFill>
+                <a:latin typeface="Arial"/>
+                <a:ea typeface="Arial"/>
+                <a:cs typeface="Arial"/>
               </a:rPr>
               <a:t>Compare two choices and save</a:t>
             </a:r>
@@ -3485,21 +3847,30 @@
           </a:ln>
         </p:spPr>
         <p:txBody>
-          <a:bodyPr xmlns:a="http://schemas.openxmlformats.org/drawingml/2006/main" lIns="0" tIns="0" rIns="0" bIns="0" anchor="ctr"/>
-          <a:lstStyle xmlns:a="http://schemas.openxmlformats.org/drawingml/2006/main"/>
-          <a:p xmlns:a="http://schemas.openxmlformats.org/drawingml/2006/main">
-            <a:pPr>
-              <a:defRPr sz="1275" b="0">
+          <a:bodyPr xmlns:a="http://schemas.openxmlformats.org/drawingml/2006/main" wrap="square" lIns="0" tIns="0" rIns="0" bIns="0" anchor="ctr">
+            <a:noAutofit/>
+          </a:bodyPr>
+          <a:lstStyle xmlns:a="http://schemas.openxmlformats.org/drawingml/2006/main"/>
+          <a:p xmlns:a="http://schemas.openxmlformats.org/drawingml/2006/main">
+            <a:pPr>
+              <a:buNone/>
+              <a:defRPr sz="1200" b="0">
                 <a:solidFill>
                   <a:srgbClr val="50616B"/>
                 </a:solidFill>
-              </a:defRPr>
-            </a:pPr>
-            <a:r>
-              <a:rPr sz="1275" b="0">
+                <a:latin typeface="Arial"/>
+                <a:ea typeface="Arial"/>
+                <a:cs typeface="Arial"/>
+              </a:defRPr>
+            </a:pPr>
+            <a:r>
+              <a:rPr sz="1200" b="0">
                 <a:solidFill>
                   <a:srgbClr val="50616B"/>
                 </a:solidFill>
+                <a:latin typeface="Arial"/>
+                <a:ea typeface="Arial"/>
+                <a:cs typeface="Arial"/>
               </a:rPr>
               <a:t>AUTUMN 1  ·  WEEK 5  ·  LESSON A</a:t>
             </a:r>
@@ -3535,14 +3906,20 @@
           </a:ln>
         </p:spPr>
         <p:txBody>
-          <a:bodyPr xmlns:a="http://schemas.openxmlformats.org/drawingml/2006/main" lIns="0" tIns="0" rIns="0" bIns="0" anchor="ctr"/>
-          <a:lstStyle xmlns:a="http://schemas.openxmlformats.org/drawingml/2006/main"/>
-          <a:p xmlns:a="http://schemas.openxmlformats.org/drawingml/2006/main">
-            <a:pPr>
+          <a:bodyPr xmlns:a="http://schemas.openxmlformats.org/drawingml/2006/main" wrap="square" lIns="0" tIns="0" rIns="0" bIns="0" anchor="ctr">
+            <a:noAutofit/>
+          </a:bodyPr>
+          <a:lstStyle xmlns:a="http://schemas.openxmlformats.org/drawingml/2006/main"/>
+          <a:p xmlns:a="http://schemas.openxmlformats.org/drawingml/2006/main">
+            <a:pPr>
+              <a:buNone/>
               <a:defRPr sz="1350" b="1">
                 <a:solidFill>
                   <a:srgbClr val="28685E"/>
                 </a:solidFill>
+                <a:latin typeface="Arial"/>
+                <a:ea typeface="Arial"/>
+                <a:cs typeface="Arial"/>
               </a:defRPr>
             </a:pPr>
             <a:r>
@@ -3550,6 +3927,9 @@
                 <a:solidFill>
                   <a:srgbClr val="28685E"/>
                 </a:solidFill>
+                <a:latin typeface="Arial"/>
+                <a:ea typeface="Arial"/>
+                <a:cs typeface="Arial"/>
               </a:rPr>
               <a:t>11</a:t>
             </a:r>
@@ -3572,8 +3952,8 @@
         </p:nvSpPr>
         <p:spPr>
           <a:xfrm xmlns:a="http://schemas.openxmlformats.org/drawingml/2006/main">
-            <a:off x="609600" y="2619375"/>
-            <a:ext cx="10972800" cy="714375"/>
+            <a:off x="609600" y="2305050"/>
+            <a:ext cx="10972800" cy="704850"/>
           </a:xfrm>
           <a:prstGeom xmlns:a="http://schemas.openxmlformats.org/drawingml/2006/main" prst="rect">
             <a:avLst/>
@@ -3585,14 +3965,20 @@
           </a:ln>
         </p:spPr>
         <p:txBody>
-          <a:bodyPr xmlns:a="http://schemas.openxmlformats.org/drawingml/2006/main" lIns="0" tIns="0" rIns="0" bIns="0" anchor="ctr"/>
-          <a:lstStyle xmlns:a="http://schemas.openxmlformats.org/drawingml/2006/main"/>
-          <a:p xmlns:a="http://schemas.openxmlformats.org/drawingml/2006/main">
-            <a:pPr>
+          <a:bodyPr xmlns:a="http://schemas.openxmlformats.org/drawingml/2006/main" wrap="square" lIns="0" tIns="0" rIns="0" bIns="0" anchor="ctr">
+            <a:noAutofit/>
+          </a:bodyPr>
+          <a:lstStyle xmlns:a="http://schemas.openxmlformats.org/drawingml/2006/main"/>
+          <a:p xmlns:a="http://schemas.openxmlformats.org/drawingml/2006/main">
+            <a:pPr>
+              <a:buNone/>
               <a:defRPr sz="2550" b="0">
                 <a:solidFill>
                   <a:srgbClr val="152B3A"/>
                 </a:solidFill>
+                <a:latin typeface="Arial"/>
+                <a:ea typeface="Arial"/>
+                <a:cs typeface="Arial"/>
               </a:defRPr>
             </a:pPr>
             <a:r>
@@ -3600,6 +3986,9 @@
                 <a:solidFill>
                   <a:srgbClr val="152B3A"/>
                 </a:solidFill>
+                <a:latin typeface="Arial"/>
+                <a:ea typeface="Arial"/>
+                <a:cs typeface="Arial"/>
               </a:rPr>
               <a:t>Choose two animals and two food cards.</a:t>
             </a:r>
@@ -3622,8 +4011,8 @@
         </p:nvSpPr>
         <p:spPr>
           <a:xfrm xmlns:a="http://schemas.openxmlformats.org/drawingml/2006/main">
-            <a:off x="609600" y="3409950"/>
-            <a:ext cx="10972800" cy="714375"/>
+            <a:off x="609600" y="3143250"/>
+            <a:ext cx="10972800" cy="704850"/>
           </a:xfrm>
           <a:prstGeom xmlns:a="http://schemas.openxmlformats.org/drawingml/2006/main" prst="rect">
             <a:avLst/>
@@ -3635,14 +4024,20 @@
           </a:ln>
         </p:spPr>
         <p:txBody>
-          <a:bodyPr xmlns:a="http://schemas.openxmlformats.org/drawingml/2006/main" lIns="0" tIns="0" rIns="0" bIns="0" anchor="ctr"/>
-          <a:lstStyle xmlns:a="http://schemas.openxmlformats.org/drawingml/2006/main"/>
-          <a:p xmlns:a="http://schemas.openxmlformats.org/drawingml/2006/main">
-            <a:pPr>
+          <a:bodyPr xmlns:a="http://schemas.openxmlformats.org/drawingml/2006/main" wrap="square" lIns="0" tIns="0" rIns="0" bIns="0" anchor="ctr">
+            <a:noAutofit/>
+          </a:bodyPr>
+          <a:lstStyle xmlns:a="http://schemas.openxmlformats.org/drawingml/2006/main"/>
+          <a:p xmlns:a="http://schemas.openxmlformats.org/drawingml/2006/main">
+            <a:pPr>
+              <a:buNone/>
               <a:defRPr sz="2550" b="0">
                 <a:solidFill>
                   <a:srgbClr val="152B3A"/>
                 </a:solidFill>
+                <a:latin typeface="Arial"/>
+                <a:ea typeface="Arial"/>
+                <a:cs typeface="Arial"/>
               </a:defRPr>
             </a:pPr>
             <a:r>
@@ -3650,6 +4045,9 @@
                 <a:solidFill>
                   <a:srgbClr val="152B3A"/>
                 </a:solidFill>
+                <a:latin typeface="Arial"/>
+                <a:ea typeface="Arial"/>
+                <a:cs typeface="Arial"/>
               </a:rPr>
               <a:t>Would the same food suit both examples?</a:t>
             </a:r>
@@ -3672,8 +4070,8 @@
         </p:nvSpPr>
         <p:spPr>
           <a:xfrm xmlns:a="http://schemas.openxmlformats.org/drawingml/2006/main">
-            <a:off x="609600" y="4200525"/>
-            <a:ext cx="10972800" cy="714375"/>
+            <a:off x="609600" y="3981450"/>
+            <a:ext cx="10972800" cy="704850"/>
           </a:xfrm>
           <a:prstGeom xmlns:a="http://schemas.openxmlformats.org/drawingml/2006/main" prst="rect">
             <a:avLst/>
@@ -3685,14 +4083,20 @@
           </a:ln>
         </p:spPr>
         <p:txBody>
-          <a:bodyPr xmlns:a="http://schemas.openxmlformats.org/drawingml/2006/main" lIns="0" tIns="0" rIns="0" bIns="0" anchor="ctr"/>
-          <a:lstStyle xmlns:a="http://schemas.openxmlformats.org/drawingml/2006/main"/>
-          <a:p xmlns:a="http://schemas.openxmlformats.org/drawingml/2006/main">
-            <a:pPr>
+          <a:bodyPr xmlns:a="http://schemas.openxmlformats.org/drawingml/2006/main" wrap="square" lIns="0" tIns="0" rIns="0" bIns="0" anchor="ctr">
+            <a:noAutofit/>
+          </a:bodyPr>
+          <a:lstStyle xmlns:a="http://schemas.openxmlformats.org/drawingml/2006/main"/>
+          <a:p xmlns:a="http://schemas.openxmlformats.org/drawingml/2006/main">
+            <a:pPr>
+              <a:buNone/>
               <a:defRPr sz="2550" b="0">
                 <a:solidFill>
                   <a:srgbClr val="152B3A"/>
                 </a:solidFill>
+                <a:latin typeface="Arial"/>
+                <a:ea typeface="Arial"/>
+                <a:cs typeface="Arial"/>
               </a:defRPr>
             </a:pPr>
             <a:r>
@@ -3700,6 +4104,9 @@
                 <a:solidFill>
                   <a:srgbClr val="152B3A"/>
                 </a:solidFill>
+                <a:latin typeface="Arial"/>
+                <a:ea typeface="Arial"/>
+                <a:cs typeface="Arial"/>
               </a:rPr>
               <a:t>Explain or point to your evidence.</a:t>
             </a:r>
@@ -3722,8 +4129,8 @@
         </p:nvSpPr>
         <p:spPr>
           <a:xfrm xmlns:a="http://schemas.openxmlformats.org/drawingml/2006/main">
-            <a:off x="609600" y="4991100"/>
-            <a:ext cx="10972800" cy="714375"/>
+            <a:off x="609600" y="4819650"/>
+            <a:ext cx="10972800" cy="704850"/>
           </a:xfrm>
           <a:prstGeom xmlns:a="http://schemas.openxmlformats.org/drawingml/2006/main" prst="rect">
             <a:avLst/>
@@ -3735,21 +4142,30 @@
           </a:ln>
         </p:spPr>
         <p:txBody>
-          <a:bodyPr xmlns:a="http://schemas.openxmlformats.org/drawingml/2006/main" lIns="0" tIns="0" rIns="0" bIns="0" anchor="ctr"/>
-          <a:lstStyle xmlns:a="http://schemas.openxmlformats.org/drawingml/2006/main"/>
-          <a:p xmlns:a="http://schemas.openxmlformats.org/drawingml/2006/main">
-            <a:pPr>
-              <a:defRPr sz="2550" b="0">
-                <a:solidFill>
-                  <a:srgbClr val="152B3A"/>
-                </a:solidFill>
-              </a:defRPr>
-            </a:pPr>
-            <a:r>
-              <a:rPr sz="2550" b="0">
-                <a:solidFill>
-                  <a:srgbClr val="152B3A"/>
-                </a:solidFill>
+          <a:bodyPr xmlns:a="http://schemas.openxmlformats.org/drawingml/2006/main" wrap="square" lIns="0" tIns="0" rIns="0" bIns="0" anchor="ctr">
+            <a:noAutofit/>
+          </a:bodyPr>
+          <a:lstStyle xmlns:a="http://schemas.openxmlformats.org/drawingml/2006/main"/>
+          <a:p xmlns:a="http://schemas.openxmlformats.org/drawingml/2006/main">
+            <a:pPr>
+              <a:buNone/>
+              <a:defRPr sz="2550" b="1">
+                <a:solidFill>
+                  <a:srgbClr val="28685E"/>
+                </a:solidFill>
+                <a:latin typeface="Arial"/>
+                <a:ea typeface="Arial"/>
+                <a:cs typeface="Arial"/>
+              </a:defRPr>
+            </a:pPr>
+            <a:r>
+              <a:rPr sz="2550" b="1">
+                <a:solidFill>
+                  <a:srgbClr val="28685E"/>
+                </a:solidFill>
+                <a:latin typeface="Arial"/>
+                <a:ea typeface="Arial"/>
+                <a:cs typeface="Arial"/>
               </a:rPr>
               <a:t>Save the cards and your reason.</a:t>
             </a:r>
@@ -3772,7 +4188,7 @@
     <p:bg>
       <p:bgPr>
         <a:solidFill xmlns:a="http://schemas.openxmlformats.org/drawingml/2006/main">
-          <a:srgbClr val="F5F1E8"/>
+          <a:srgbClr val="FBF9F3"/>
         </a:solidFill>
       </p:bgPr>
     </p:bg>
@@ -3801,8 +4217,8 @@
         </p:nvSpPr>
         <p:spPr>
           <a:xfrm xmlns:a="http://schemas.openxmlformats.org/drawingml/2006/main">
-            <a:off x="609600" y="552450"/>
-            <a:ext cx="781050" cy="57150"/>
+            <a:off x="609600" y="742950"/>
+            <a:ext cx="9906000" cy="38100"/>
           </a:xfrm>
           <a:prstGeom xmlns:a="http://schemas.openxmlformats.org/drawingml/2006/main" prst="rect">
             <a:avLst/>
@@ -3832,8 +4248,8 @@
         </p:nvSpPr>
         <p:spPr>
           <a:xfrm xmlns:a="http://schemas.openxmlformats.org/drawingml/2006/main">
-            <a:off x="609600" y="762000"/>
-            <a:ext cx="9334500" cy="285750"/>
+            <a:off x="609600" y="342900"/>
+            <a:ext cx="9334500" cy="266700"/>
           </a:xfrm>
           <a:prstGeom xmlns:a="http://schemas.openxmlformats.org/drawingml/2006/main" prst="rect">
             <a:avLst/>
@@ -3845,21 +4261,30 @@
           </a:ln>
         </p:spPr>
         <p:txBody>
-          <a:bodyPr xmlns:a="http://schemas.openxmlformats.org/drawingml/2006/main" lIns="0" tIns="0" rIns="0" bIns="0" anchor="ctr"/>
-          <a:lstStyle xmlns:a="http://schemas.openxmlformats.org/drawingml/2006/main"/>
-          <a:p xmlns:a="http://schemas.openxmlformats.org/drawingml/2006/main">
-            <a:pPr>
-              <a:defRPr sz="1500" b="1">
+          <a:bodyPr xmlns:a="http://schemas.openxmlformats.org/drawingml/2006/main" wrap="square" lIns="0" tIns="0" rIns="0" bIns="0" anchor="ctr">
+            <a:noAutofit/>
+          </a:bodyPr>
+          <a:lstStyle xmlns:a="http://schemas.openxmlformats.org/drawingml/2006/main"/>
+          <a:p xmlns:a="http://schemas.openxmlformats.org/drawingml/2006/main">
+            <a:pPr>
+              <a:buNone/>
+              <a:defRPr sz="1425" b="1">
                 <a:solidFill>
                   <a:srgbClr val="28685E"/>
                 </a:solidFill>
-              </a:defRPr>
-            </a:pPr>
-            <a:r>
-              <a:rPr sz="1500" b="1">
+                <a:latin typeface="Arial"/>
+                <a:ea typeface="Arial"/>
+                <a:cs typeface="Arial"/>
+              </a:defRPr>
+            </a:pPr>
+            <a:r>
+              <a:rPr sz="1425" b="1">
                 <a:solidFill>
                   <a:srgbClr val="28685E"/>
                 </a:solidFill>
+                <a:latin typeface="Arial"/>
+                <a:ea typeface="Arial"/>
+                <a:cs typeface="Arial"/>
               </a:rPr>
               <a:t>MADE BY MATT  /  BUILD SCIENCE</a:t>
             </a:r>
@@ -3868,14 +4293,14 @@
       </p:sp>
       <p:pic>
         <p:nvPicPr>
-          <p:cNvPr id="13" name=""/>
+          <p:cNvPr id="15" name=""/>
           <p:cNvPicPr>
             <a:picLocks xmlns:a="http://schemas.openxmlformats.org/drawingml/2006/main" noChangeAspect="1"/>
           </p:cNvPicPr>
           <p:nvPr/>
         </p:nvPicPr>
         <p:blipFill>
-          <a:blip xmlns:r="http://schemas.openxmlformats.org/officeDocument/2006/relationships" xmlns:a="http://schemas.openxmlformats.org/drawingml/2006/main" r:embed="R0aa27fc97e4343ac"/>
+          <a:blip xmlns:r="http://schemas.openxmlformats.org/officeDocument/2006/relationships" xmlns:a="http://schemas.openxmlformats.org/drawingml/2006/main" r:embed="Rb622b6ef8cc14b05"/>
           <a:stretch xmlns:a="http://schemas.openxmlformats.org/drawingml/2006/main"/>
         </p:blipFill>
         <p:spPr>
@@ -3904,8 +4329,8 @@
         </p:nvSpPr>
         <p:spPr>
           <a:xfrm xmlns:a="http://schemas.openxmlformats.org/drawingml/2006/main">
-            <a:off x="609600" y="1352550"/>
-            <a:ext cx="10972800" cy="952500"/>
+            <a:off x="609600" y="1047750"/>
+            <a:ext cx="10972800" cy="895350"/>
           </a:xfrm>
           <a:prstGeom xmlns:a="http://schemas.openxmlformats.org/drawingml/2006/main" prst="rect">
             <a:avLst/>
@@ -3917,21 +4342,30 @@
           </a:ln>
         </p:spPr>
         <p:txBody>
-          <a:bodyPr xmlns:a="http://schemas.openxmlformats.org/drawingml/2006/main" lIns="0" tIns="0" rIns="0" bIns="0" anchor="ctr"/>
-          <a:lstStyle xmlns:a="http://schemas.openxmlformats.org/drawingml/2006/main"/>
-          <a:p xmlns:a="http://schemas.openxmlformats.org/drawingml/2006/main">
-            <a:pPr>
-              <a:defRPr sz="3750" b="1">
-                <a:solidFill>
-                  <a:srgbClr val="152B3A"/>
-                </a:solidFill>
-              </a:defRPr>
-            </a:pPr>
-            <a:r>
-              <a:rPr sz="3750" b="1">
-                <a:solidFill>
-                  <a:srgbClr val="152B3A"/>
-                </a:solidFill>
+          <a:bodyPr xmlns:a="http://schemas.openxmlformats.org/drawingml/2006/main" wrap="square" lIns="0" tIns="0" rIns="0" bIns="0" anchor="ctr">
+            <a:noAutofit/>
+          </a:bodyPr>
+          <a:lstStyle xmlns:a="http://schemas.openxmlformats.org/drawingml/2006/main"/>
+          <a:p xmlns:a="http://schemas.openxmlformats.org/drawingml/2006/main">
+            <a:pPr>
+              <a:buNone/>
+              <a:defRPr sz="3600" b="1">
+                <a:solidFill>
+                  <a:srgbClr val="152B3A"/>
+                </a:solidFill>
+                <a:latin typeface="Arial"/>
+                <a:ea typeface="Arial"/>
+                <a:cs typeface="Arial"/>
+              </a:defRPr>
+            </a:pPr>
+            <a:r>
+              <a:rPr sz="3600" b="1">
+                <a:solidFill>
+                  <a:srgbClr val="152B3A"/>
+                </a:solidFill>
+                <a:latin typeface="Arial"/>
+                <a:ea typeface="Arial"/>
+                <a:cs typeface="Arial"/>
               </a:rPr>
               <a:t>Start with a body job</a:t>
             </a:r>
@@ -3998,21 +4432,30 @@
           </a:ln>
         </p:spPr>
         <p:txBody>
-          <a:bodyPr xmlns:a="http://schemas.openxmlformats.org/drawingml/2006/main" lIns="0" tIns="0" rIns="0" bIns="0" anchor="ctr"/>
-          <a:lstStyle xmlns:a="http://schemas.openxmlformats.org/drawingml/2006/main"/>
-          <a:p xmlns:a="http://schemas.openxmlformats.org/drawingml/2006/main">
-            <a:pPr>
-              <a:defRPr sz="1275" b="0">
+          <a:bodyPr xmlns:a="http://schemas.openxmlformats.org/drawingml/2006/main" wrap="square" lIns="0" tIns="0" rIns="0" bIns="0" anchor="ctr">
+            <a:noAutofit/>
+          </a:bodyPr>
+          <a:lstStyle xmlns:a="http://schemas.openxmlformats.org/drawingml/2006/main"/>
+          <a:p xmlns:a="http://schemas.openxmlformats.org/drawingml/2006/main">
+            <a:pPr>
+              <a:buNone/>
+              <a:defRPr sz="1200" b="0">
                 <a:solidFill>
                   <a:srgbClr val="50616B"/>
                 </a:solidFill>
-              </a:defRPr>
-            </a:pPr>
-            <a:r>
-              <a:rPr sz="1275" b="0">
+                <a:latin typeface="Arial"/>
+                <a:ea typeface="Arial"/>
+                <a:cs typeface="Arial"/>
+              </a:defRPr>
+            </a:pPr>
+            <a:r>
+              <a:rPr sz="1200" b="0">
                 <a:solidFill>
                   <a:srgbClr val="50616B"/>
                 </a:solidFill>
+                <a:latin typeface="Arial"/>
+                <a:ea typeface="Arial"/>
+                <a:cs typeface="Arial"/>
               </a:rPr>
               <a:t>AUTUMN 1  ·  WEEK 5  ·  LESSON A</a:t>
             </a:r>
@@ -4048,14 +4491,20 @@
           </a:ln>
         </p:spPr>
         <p:txBody>
-          <a:bodyPr xmlns:a="http://schemas.openxmlformats.org/drawingml/2006/main" lIns="0" tIns="0" rIns="0" bIns="0" anchor="ctr"/>
-          <a:lstStyle xmlns:a="http://schemas.openxmlformats.org/drawingml/2006/main"/>
-          <a:p xmlns:a="http://schemas.openxmlformats.org/drawingml/2006/main">
-            <a:pPr>
+          <a:bodyPr xmlns:a="http://schemas.openxmlformats.org/drawingml/2006/main" wrap="square" lIns="0" tIns="0" rIns="0" bIns="0" anchor="ctr">
+            <a:noAutofit/>
+          </a:bodyPr>
+          <a:lstStyle xmlns:a="http://schemas.openxmlformats.org/drawingml/2006/main"/>
+          <a:p xmlns:a="http://schemas.openxmlformats.org/drawingml/2006/main">
+            <a:pPr>
+              <a:buNone/>
               <a:defRPr sz="1350" b="1">
                 <a:solidFill>
                   <a:srgbClr val="28685E"/>
                 </a:solidFill>
+                <a:latin typeface="Arial"/>
+                <a:ea typeface="Arial"/>
+                <a:cs typeface="Arial"/>
               </a:defRPr>
             </a:pPr>
             <a:r>
@@ -4063,6 +4512,9 @@
                 <a:solidFill>
                   <a:srgbClr val="28685E"/>
                 </a:solidFill>
+                <a:latin typeface="Arial"/>
+                <a:ea typeface="Arial"/>
+                <a:cs typeface="Arial"/>
               </a:rPr>
               <a:t>02</a:t>
             </a:r>
@@ -4085,8 +4537,8 @@
         </p:nvSpPr>
         <p:spPr>
           <a:xfrm xmlns:a="http://schemas.openxmlformats.org/drawingml/2006/main">
-            <a:off x="609600" y="2619375"/>
-            <a:ext cx="10972800" cy="781050"/>
+            <a:off x="609600" y="2305050"/>
+            <a:ext cx="10972800" cy="914400"/>
           </a:xfrm>
           <a:prstGeom xmlns:a="http://schemas.openxmlformats.org/drawingml/2006/main" prst="rect">
             <a:avLst/>
@@ -4098,14 +4550,20 @@
           </a:ln>
         </p:spPr>
         <p:txBody>
-          <a:bodyPr xmlns:a="http://schemas.openxmlformats.org/drawingml/2006/main" lIns="0" tIns="0" rIns="0" bIns="0" anchor="ctr"/>
-          <a:lstStyle xmlns:a="http://schemas.openxmlformats.org/drawingml/2006/main"/>
-          <a:p xmlns:a="http://schemas.openxmlformats.org/drawingml/2006/main">
-            <a:pPr>
+          <a:bodyPr xmlns:a="http://schemas.openxmlformats.org/drawingml/2006/main" wrap="square" lIns="0" tIns="0" rIns="0" bIns="0" anchor="ctr">
+            <a:noAutofit/>
+          </a:bodyPr>
+          <a:lstStyle xmlns:a="http://schemas.openxmlformats.org/drawingml/2006/main"/>
+          <a:p xmlns:a="http://schemas.openxmlformats.org/drawingml/2006/main">
+            <a:pPr>
+              <a:buNone/>
               <a:defRPr sz="2550" b="0">
                 <a:solidFill>
                   <a:srgbClr val="152B3A"/>
                 </a:solidFill>
+                <a:latin typeface="Arial"/>
+                <a:ea typeface="Arial"/>
+                <a:cs typeface="Arial"/>
               </a:defRPr>
             </a:pPr>
             <a:r>
@@ -4113,6 +4571,9 @@
                 <a:solidFill>
                   <a:srgbClr val="152B3A"/>
                 </a:solidFill>
+                <a:latin typeface="Arial"/>
+                <a:ea typeface="Arial"/>
+                <a:cs typeface="Arial"/>
               </a:rPr>
               <a:t>Think about a model body, not your own meals.</a:t>
             </a:r>
@@ -4135,8 +4596,8 @@
         </p:nvSpPr>
         <p:spPr>
           <a:xfrm xmlns:a="http://schemas.openxmlformats.org/drawingml/2006/main">
-            <a:off x="609600" y="3476625"/>
-            <a:ext cx="10972800" cy="781050"/>
+            <a:off x="609600" y="3352800"/>
+            <a:ext cx="10972800" cy="914400"/>
           </a:xfrm>
           <a:prstGeom xmlns:a="http://schemas.openxmlformats.org/drawingml/2006/main" prst="rect">
             <a:avLst/>
@@ -4148,14 +4609,20 @@
           </a:ln>
         </p:spPr>
         <p:txBody>
-          <a:bodyPr xmlns:a="http://schemas.openxmlformats.org/drawingml/2006/main" lIns="0" tIns="0" rIns="0" bIns="0" anchor="ctr"/>
-          <a:lstStyle xmlns:a="http://schemas.openxmlformats.org/drawingml/2006/main"/>
-          <a:p xmlns:a="http://schemas.openxmlformats.org/drawingml/2006/main">
-            <a:pPr>
+          <a:bodyPr xmlns:a="http://schemas.openxmlformats.org/drawingml/2006/main" wrap="square" lIns="0" tIns="0" rIns="0" bIns="0" anchor="ctr">
+            <a:noAutofit/>
+          </a:bodyPr>
+          <a:lstStyle xmlns:a="http://schemas.openxmlformats.org/drawingml/2006/main"/>
+          <a:p xmlns:a="http://schemas.openxmlformats.org/drawingml/2006/main">
+            <a:pPr>
+              <a:buNone/>
               <a:defRPr sz="2550" b="0">
                 <a:solidFill>
                   <a:srgbClr val="152B3A"/>
                 </a:solidFill>
+                <a:latin typeface="Arial"/>
+                <a:ea typeface="Arial"/>
+                <a:cs typeface="Arial"/>
               </a:defRPr>
             </a:pPr>
             <a:r>
@@ -4163,6 +4630,9 @@
                 <a:solidFill>
                   <a:srgbClr val="152B3A"/>
                 </a:solidFill>
+                <a:latin typeface="Arial"/>
+                <a:ea typeface="Arial"/>
+                <a:cs typeface="Arial"/>
               </a:rPr>
               <a:t>What does food help a body do?</a:t>
             </a:r>
@@ -4185,8 +4655,8 @@
         </p:nvSpPr>
         <p:spPr>
           <a:xfrm xmlns:a="http://schemas.openxmlformats.org/drawingml/2006/main">
-            <a:off x="609600" y="4333875"/>
-            <a:ext cx="10972800" cy="781050"/>
+            <a:off x="609600" y="4400550"/>
+            <a:ext cx="10972800" cy="914400"/>
           </a:xfrm>
           <a:prstGeom xmlns:a="http://schemas.openxmlformats.org/drawingml/2006/main" prst="rect">
             <a:avLst/>
@@ -4198,21 +4668,30 @@
           </a:ln>
         </p:spPr>
         <p:txBody>
-          <a:bodyPr xmlns:a="http://schemas.openxmlformats.org/drawingml/2006/main" lIns="0" tIns="0" rIns="0" bIns="0" anchor="ctr"/>
-          <a:lstStyle xmlns:a="http://schemas.openxmlformats.org/drawingml/2006/main"/>
-          <a:p xmlns:a="http://schemas.openxmlformats.org/drawingml/2006/main">
-            <a:pPr>
-              <a:defRPr sz="2550" b="0">
-                <a:solidFill>
-                  <a:srgbClr val="152B3A"/>
-                </a:solidFill>
-              </a:defRPr>
-            </a:pPr>
-            <a:r>
-              <a:rPr sz="2550" b="0">
-                <a:solidFill>
-                  <a:srgbClr val="152B3A"/>
-                </a:solidFill>
+          <a:bodyPr xmlns:a="http://schemas.openxmlformats.org/drawingml/2006/main" wrap="square" lIns="0" tIns="0" rIns="0" bIns="0" anchor="ctr">
+            <a:noAutofit/>
+          </a:bodyPr>
+          <a:lstStyle xmlns:a="http://schemas.openxmlformats.org/drawingml/2006/main"/>
+          <a:p xmlns:a="http://schemas.openxmlformats.org/drawingml/2006/main">
+            <a:pPr>
+              <a:buNone/>
+              <a:defRPr sz="2550" b="1">
+                <a:solidFill>
+                  <a:srgbClr val="28685E"/>
+                </a:solidFill>
+                <a:latin typeface="Arial"/>
+                <a:ea typeface="Arial"/>
+                <a:cs typeface="Arial"/>
+              </a:defRPr>
+            </a:pPr>
+            <a:r>
+              <a:rPr sz="2550" b="1">
+                <a:solidFill>
+                  <a:srgbClr val="28685E"/>
+                </a:solidFill>
+                <a:latin typeface="Arial"/>
+                <a:ea typeface="Arial"/>
+                <a:cs typeface="Arial"/>
               </a:rPr>
               <a:t>Name, draw or point to one job.</a:t>
             </a:r>
@@ -4235,7 +4714,7 @@
     <p:bg>
       <p:bgPr>
         <a:solidFill xmlns:a="http://schemas.openxmlformats.org/drawingml/2006/main">
-          <a:srgbClr val="F5F1E8"/>
+          <a:srgbClr val="FBF9F3"/>
         </a:solidFill>
       </p:bgPr>
     </p:bg>
@@ -4264,8 +4743,8 @@
         </p:nvSpPr>
         <p:spPr>
           <a:xfrm xmlns:a="http://schemas.openxmlformats.org/drawingml/2006/main">
-            <a:off x="609600" y="552450"/>
-            <a:ext cx="781050" cy="57150"/>
+            <a:off x="609600" y="742950"/>
+            <a:ext cx="9906000" cy="38100"/>
           </a:xfrm>
           <a:prstGeom xmlns:a="http://schemas.openxmlformats.org/drawingml/2006/main" prst="rect">
             <a:avLst/>
@@ -4295,8 +4774,8 @@
         </p:nvSpPr>
         <p:spPr>
           <a:xfrm xmlns:a="http://schemas.openxmlformats.org/drawingml/2006/main">
-            <a:off x="609600" y="762000"/>
-            <a:ext cx="9334500" cy="285750"/>
+            <a:off x="609600" y="342900"/>
+            <a:ext cx="9334500" cy="266700"/>
           </a:xfrm>
           <a:prstGeom xmlns:a="http://schemas.openxmlformats.org/drawingml/2006/main" prst="rect">
             <a:avLst/>
@@ -4308,21 +4787,30 @@
           </a:ln>
         </p:spPr>
         <p:txBody>
-          <a:bodyPr xmlns:a="http://schemas.openxmlformats.org/drawingml/2006/main" lIns="0" tIns="0" rIns="0" bIns="0" anchor="ctr"/>
-          <a:lstStyle xmlns:a="http://schemas.openxmlformats.org/drawingml/2006/main"/>
-          <a:p xmlns:a="http://schemas.openxmlformats.org/drawingml/2006/main">
-            <a:pPr>
-              <a:defRPr sz="1500" b="1">
+          <a:bodyPr xmlns:a="http://schemas.openxmlformats.org/drawingml/2006/main" wrap="square" lIns="0" tIns="0" rIns="0" bIns="0" anchor="ctr">
+            <a:noAutofit/>
+          </a:bodyPr>
+          <a:lstStyle xmlns:a="http://schemas.openxmlformats.org/drawingml/2006/main"/>
+          <a:p xmlns:a="http://schemas.openxmlformats.org/drawingml/2006/main">
+            <a:pPr>
+              <a:buNone/>
+              <a:defRPr sz="1425" b="1">
                 <a:solidFill>
                   <a:srgbClr val="28685E"/>
                 </a:solidFill>
-              </a:defRPr>
-            </a:pPr>
-            <a:r>
-              <a:rPr sz="1500" b="1">
+                <a:latin typeface="Arial"/>
+                <a:ea typeface="Arial"/>
+                <a:cs typeface="Arial"/>
+              </a:defRPr>
+            </a:pPr>
+            <a:r>
+              <a:rPr sz="1425" b="1">
                 <a:solidFill>
                   <a:srgbClr val="28685E"/>
                 </a:solidFill>
+                <a:latin typeface="Arial"/>
+                <a:ea typeface="Arial"/>
+                <a:cs typeface="Arial"/>
               </a:rPr>
               <a:t>MADE BY MATT  /  BUILD SCIENCE</a:t>
             </a:r>
@@ -4331,14 +4819,14 @@
       </p:sp>
       <p:pic>
         <p:nvPicPr>
-          <p:cNvPr id="13" name=""/>
+          <p:cNvPr id="15" name=""/>
           <p:cNvPicPr>
             <a:picLocks xmlns:a="http://schemas.openxmlformats.org/drawingml/2006/main" noChangeAspect="1"/>
           </p:cNvPicPr>
           <p:nvPr/>
         </p:nvPicPr>
         <p:blipFill>
-          <a:blip xmlns:r="http://schemas.openxmlformats.org/officeDocument/2006/relationships" xmlns:a="http://schemas.openxmlformats.org/drawingml/2006/main" r:embed="R430251c364dd4179"/>
+          <a:blip xmlns:r="http://schemas.openxmlformats.org/officeDocument/2006/relationships" xmlns:a="http://schemas.openxmlformats.org/drawingml/2006/main" r:embed="R730ee45d2b7d4666"/>
           <a:stretch xmlns:a="http://schemas.openxmlformats.org/drawingml/2006/main"/>
         </p:blipFill>
         <p:spPr>
@@ -4367,8 +4855,8 @@
         </p:nvSpPr>
         <p:spPr>
           <a:xfrm xmlns:a="http://schemas.openxmlformats.org/drawingml/2006/main">
-            <a:off x="609600" y="1352550"/>
-            <a:ext cx="10972800" cy="952500"/>
+            <a:off x="609600" y="1047750"/>
+            <a:ext cx="10972800" cy="895350"/>
           </a:xfrm>
           <a:prstGeom xmlns:a="http://schemas.openxmlformats.org/drawingml/2006/main" prst="rect">
             <a:avLst/>
@@ -4380,21 +4868,30 @@
           </a:ln>
         </p:spPr>
         <p:txBody>
-          <a:bodyPr xmlns:a="http://schemas.openxmlformats.org/drawingml/2006/main" lIns="0" tIns="0" rIns="0" bIns="0" anchor="ctr"/>
-          <a:lstStyle xmlns:a="http://schemas.openxmlformats.org/drawingml/2006/main"/>
-          <a:p xmlns:a="http://schemas.openxmlformats.org/drawingml/2006/main">
-            <a:pPr>
-              <a:defRPr sz="3750" b="1">
-                <a:solidFill>
-                  <a:srgbClr val="152B3A"/>
-                </a:solidFill>
-              </a:defRPr>
-            </a:pPr>
-            <a:r>
-              <a:rPr sz="3750" b="1">
-                <a:solidFill>
-                  <a:srgbClr val="152B3A"/>
-                </a:solidFill>
+          <a:bodyPr xmlns:a="http://schemas.openxmlformats.org/drawingml/2006/main" wrap="square" lIns="0" tIns="0" rIns="0" bIns="0" anchor="ctr">
+            <a:noAutofit/>
+          </a:bodyPr>
+          <a:lstStyle xmlns:a="http://schemas.openxmlformats.org/drawingml/2006/main"/>
+          <a:p xmlns:a="http://schemas.openxmlformats.org/drawingml/2006/main">
+            <a:pPr>
+              <a:buNone/>
+              <a:defRPr sz="3600" b="1">
+                <a:solidFill>
+                  <a:srgbClr val="152B3A"/>
+                </a:solidFill>
+                <a:latin typeface="Arial"/>
+                <a:ea typeface="Arial"/>
+                <a:cs typeface="Arial"/>
+              </a:defRPr>
+            </a:pPr>
+            <a:r>
+              <a:rPr sz="3600" b="1">
+                <a:solidFill>
+                  <a:srgbClr val="152B3A"/>
+                </a:solidFill>
+                <a:latin typeface="Arial"/>
+                <a:ea typeface="Arial"/>
+                <a:cs typeface="Arial"/>
               </a:rPr>
               <a:t>Three things we will do</a:t>
             </a:r>
@@ -4461,21 +4958,30 @@
           </a:ln>
         </p:spPr>
         <p:txBody>
-          <a:bodyPr xmlns:a="http://schemas.openxmlformats.org/drawingml/2006/main" lIns="0" tIns="0" rIns="0" bIns="0" anchor="ctr"/>
-          <a:lstStyle xmlns:a="http://schemas.openxmlformats.org/drawingml/2006/main"/>
-          <a:p xmlns:a="http://schemas.openxmlformats.org/drawingml/2006/main">
-            <a:pPr>
-              <a:defRPr sz="1275" b="0">
+          <a:bodyPr xmlns:a="http://schemas.openxmlformats.org/drawingml/2006/main" wrap="square" lIns="0" tIns="0" rIns="0" bIns="0" anchor="ctr">
+            <a:noAutofit/>
+          </a:bodyPr>
+          <a:lstStyle xmlns:a="http://schemas.openxmlformats.org/drawingml/2006/main"/>
+          <a:p xmlns:a="http://schemas.openxmlformats.org/drawingml/2006/main">
+            <a:pPr>
+              <a:buNone/>
+              <a:defRPr sz="1200" b="0">
                 <a:solidFill>
                   <a:srgbClr val="50616B"/>
                 </a:solidFill>
-              </a:defRPr>
-            </a:pPr>
-            <a:r>
-              <a:rPr sz="1275" b="0">
+                <a:latin typeface="Arial"/>
+                <a:ea typeface="Arial"/>
+                <a:cs typeface="Arial"/>
+              </a:defRPr>
+            </a:pPr>
+            <a:r>
+              <a:rPr sz="1200" b="0">
                 <a:solidFill>
                   <a:srgbClr val="50616B"/>
                 </a:solidFill>
+                <a:latin typeface="Arial"/>
+                <a:ea typeface="Arial"/>
+                <a:cs typeface="Arial"/>
               </a:rPr>
               <a:t>AUTUMN 1  ·  WEEK 5  ·  LESSON A</a:t>
             </a:r>
@@ -4511,14 +5017,20 @@
           </a:ln>
         </p:spPr>
         <p:txBody>
-          <a:bodyPr xmlns:a="http://schemas.openxmlformats.org/drawingml/2006/main" lIns="0" tIns="0" rIns="0" bIns="0" anchor="ctr"/>
-          <a:lstStyle xmlns:a="http://schemas.openxmlformats.org/drawingml/2006/main"/>
-          <a:p xmlns:a="http://schemas.openxmlformats.org/drawingml/2006/main">
-            <a:pPr>
+          <a:bodyPr xmlns:a="http://schemas.openxmlformats.org/drawingml/2006/main" wrap="square" lIns="0" tIns="0" rIns="0" bIns="0" anchor="ctr">
+            <a:noAutofit/>
+          </a:bodyPr>
+          <a:lstStyle xmlns:a="http://schemas.openxmlformats.org/drawingml/2006/main"/>
+          <a:p xmlns:a="http://schemas.openxmlformats.org/drawingml/2006/main">
+            <a:pPr>
+              <a:buNone/>
               <a:defRPr sz="1350" b="1">
                 <a:solidFill>
                   <a:srgbClr val="28685E"/>
                 </a:solidFill>
+                <a:latin typeface="Arial"/>
+                <a:ea typeface="Arial"/>
+                <a:cs typeface="Arial"/>
               </a:defRPr>
             </a:pPr>
             <a:r>
@@ -4526,6 +5038,9 @@
                 <a:solidFill>
                   <a:srgbClr val="28685E"/>
                 </a:solidFill>
+                <a:latin typeface="Arial"/>
+                <a:ea typeface="Arial"/>
+                <a:cs typeface="Arial"/>
               </a:rPr>
               <a:t>03</a:t>
             </a:r>
@@ -4548,8 +5063,8 @@
         </p:nvSpPr>
         <p:spPr>
           <a:xfrm xmlns:a="http://schemas.openxmlformats.org/drawingml/2006/main">
-            <a:off x="609600" y="2619375"/>
-            <a:ext cx="10972800" cy="781050"/>
+            <a:off x="609600" y="2305050"/>
+            <a:ext cx="10972800" cy="914400"/>
           </a:xfrm>
           <a:prstGeom xmlns:a="http://schemas.openxmlformats.org/drawingml/2006/main" prst="rect">
             <a:avLst/>
@@ -4561,14 +5076,20 @@
           </a:ln>
         </p:spPr>
         <p:txBody>
-          <a:bodyPr xmlns:a="http://schemas.openxmlformats.org/drawingml/2006/main" lIns="0" tIns="0" rIns="0" bIns="0" anchor="ctr"/>
-          <a:lstStyle xmlns:a="http://schemas.openxmlformats.org/drawingml/2006/main"/>
-          <a:p xmlns:a="http://schemas.openxmlformats.org/drawingml/2006/main">
-            <a:pPr>
+          <a:bodyPr xmlns:a="http://schemas.openxmlformats.org/drawingml/2006/main" wrap="square" lIns="0" tIns="0" rIns="0" bIns="0" anchor="ctr">
+            <a:noAutofit/>
+          </a:bodyPr>
+          <a:lstStyle xmlns:a="http://schemas.openxmlformats.org/drawingml/2006/main"/>
+          <a:p xmlns:a="http://schemas.openxmlformats.org/drawingml/2006/main">
+            <a:pPr>
+              <a:buNone/>
               <a:defRPr sz="2550" b="0">
                 <a:solidFill>
                   <a:srgbClr val="152B3A"/>
                 </a:solidFill>
+                <a:latin typeface="Arial"/>
+                <a:ea typeface="Arial"/>
+                <a:cs typeface="Arial"/>
               </a:defRPr>
             </a:pPr>
             <a:r>
@@ -4576,6 +5097,9 @@
                 <a:solidFill>
                   <a:srgbClr val="152B3A"/>
                 </a:solidFill>
+                <a:latin typeface="Arial"/>
+                <a:ea typeface="Arial"/>
+                <a:cs typeface="Arial"/>
               </a:rPr>
               <a:t>Match food to body jobs.</a:t>
             </a:r>
@@ -4598,8 +5122,8 @@
         </p:nvSpPr>
         <p:spPr>
           <a:xfrm xmlns:a="http://schemas.openxmlformats.org/drawingml/2006/main">
-            <a:off x="609600" y="3476625"/>
-            <a:ext cx="10972800" cy="781050"/>
+            <a:off x="609600" y="3352800"/>
+            <a:ext cx="10972800" cy="914400"/>
           </a:xfrm>
           <a:prstGeom xmlns:a="http://schemas.openxmlformats.org/drawingml/2006/main" prst="rect">
             <a:avLst/>
@@ -4611,14 +5135,20 @@
           </a:ln>
         </p:spPr>
         <p:txBody>
-          <a:bodyPr xmlns:a="http://schemas.openxmlformats.org/drawingml/2006/main" lIns="0" tIns="0" rIns="0" bIns="0" anchor="ctr"/>
-          <a:lstStyle xmlns:a="http://schemas.openxmlformats.org/drawingml/2006/main"/>
-          <a:p xmlns:a="http://schemas.openxmlformats.org/drawingml/2006/main">
-            <a:pPr>
+          <a:bodyPr xmlns:a="http://schemas.openxmlformats.org/drawingml/2006/main" wrap="square" lIns="0" tIns="0" rIns="0" bIns="0" anchor="ctr">
+            <a:noAutofit/>
+          </a:bodyPr>
+          <a:lstStyle xmlns:a="http://schemas.openxmlformats.org/drawingml/2006/main"/>
+          <a:p xmlns:a="http://schemas.openxmlformats.org/drawingml/2006/main">
+            <a:pPr>
+              <a:buNone/>
               <a:defRPr sz="2550" b="0">
                 <a:solidFill>
                   <a:srgbClr val="152B3A"/>
                 </a:solidFill>
+                <a:latin typeface="Arial"/>
+                <a:ea typeface="Arial"/>
+                <a:cs typeface="Arial"/>
               </a:defRPr>
             </a:pPr>
             <a:r>
@@ -4626,6 +5156,9 @@
                 <a:solidFill>
                   <a:srgbClr val="152B3A"/>
                 </a:solidFill>
+                <a:latin typeface="Arial"/>
+                <a:ea typeface="Arial"/>
+                <a:cs typeface="Arial"/>
               </a:rPr>
               <a:t>Compare what different animals eat.</a:t>
             </a:r>
@@ -4648,8 +5181,8 @@
         </p:nvSpPr>
         <p:spPr>
           <a:xfrm xmlns:a="http://schemas.openxmlformats.org/drawingml/2006/main">
-            <a:off x="609600" y="4333875"/>
-            <a:ext cx="10972800" cy="781050"/>
+            <a:off x="609600" y="4400550"/>
+            <a:ext cx="10972800" cy="914400"/>
           </a:xfrm>
           <a:prstGeom xmlns:a="http://schemas.openxmlformats.org/drawingml/2006/main" prst="rect">
             <a:avLst/>
@@ -4661,21 +5194,30 @@
           </a:ln>
         </p:spPr>
         <p:txBody>
-          <a:bodyPr xmlns:a="http://schemas.openxmlformats.org/drawingml/2006/main" lIns="0" tIns="0" rIns="0" bIns="0" anchor="ctr"/>
-          <a:lstStyle xmlns:a="http://schemas.openxmlformats.org/drawingml/2006/main"/>
-          <a:p xmlns:a="http://schemas.openxmlformats.org/drawingml/2006/main">
-            <a:pPr>
-              <a:defRPr sz="2550" b="0">
-                <a:solidFill>
-                  <a:srgbClr val="152B3A"/>
-                </a:solidFill>
-              </a:defRPr>
-            </a:pPr>
-            <a:r>
-              <a:rPr sz="2550" b="0">
-                <a:solidFill>
-                  <a:srgbClr val="152B3A"/>
-                </a:solidFill>
+          <a:bodyPr xmlns:a="http://schemas.openxmlformats.org/drawingml/2006/main" wrap="square" lIns="0" tIns="0" rIns="0" bIns="0" anchor="ctr">
+            <a:noAutofit/>
+          </a:bodyPr>
+          <a:lstStyle xmlns:a="http://schemas.openxmlformats.org/drawingml/2006/main"/>
+          <a:p xmlns:a="http://schemas.openxmlformats.org/drawingml/2006/main">
+            <a:pPr>
+              <a:buNone/>
+              <a:defRPr sz="2550" b="1">
+                <a:solidFill>
+                  <a:srgbClr val="28685E"/>
+                </a:solidFill>
+                <a:latin typeface="Arial"/>
+                <a:ea typeface="Arial"/>
+                <a:cs typeface="Arial"/>
+              </a:defRPr>
+            </a:pPr>
+            <a:r>
+              <a:rPr sz="2550" b="1">
+                <a:solidFill>
+                  <a:srgbClr val="28685E"/>
+                </a:solidFill>
+                <a:latin typeface="Arial"/>
+                <a:ea typeface="Arial"/>
+                <a:cs typeface="Arial"/>
               </a:rPr>
               <a:t>Explain why variety matters.</a:t>
             </a:r>
@@ -4698,7 +5240,7 @@
     <p:bg>
       <p:bgPr>
         <a:solidFill xmlns:a="http://schemas.openxmlformats.org/drawingml/2006/main">
-          <a:srgbClr val="F5F1E8"/>
+          <a:srgbClr val="FBF9F3"/>
         </a:solidFill>
       </p:bgPr>
     </p:bg>
@@ -4727,8 +5269,8 @@
         </p:nvSpPr>
         <p:spPr>
           <a:xfrm xmlns:a="http://schemas.openxmlformats.org/drawingml/2006/main">
-            <a:off x="609600" y="552450"/>
-            <a:ext cx="781050" cy="57150"/>
+            <a:off x="609600" y="742950"/>
+            <a:ext cx="9906000" cy="38100"/>
           </a:xfrm>
           <a:prstGeom xmlns:a="http://schemas.openxmlformats.org/drawingml/2006/main" prst="rect">
             <a:avLst/>
@@ -4758,8 +5300,8 @@
         </p:nvSpPr>
         <p:spPr>
           <a:xfrm xmlns:a="http://schemas.openxmlformats.org/drawingml/2006/main">
-            <a:off x="609600" y="762000"/>
-            <a:ext cx="9334500" cy="285750"/>
+            <a:off x="609600" y="342900"/>
+            <a:ext cx="9334500" cy="266700"/>
           </a:xfrm>
           <a:prstGeom xmlns:a="http://schemas.openxmlformats.org/drawingml/2006/main" prst="rect">
             <a:avLst/>
@@ -4771,21 +5313,30 @@
           </a:ln>
         </p:spPr>
         <p:txBody>
-          <a:bodyPr xmlns:a="http://schemas.openxmlformats.org/drawingml/2006/main" lIns="0" tIns="0" rIns="0" bIns="0" anchor="ctr"/>
-          <a:lstStyle xmlns:a="http://schemas.openxmlformats.org/drawingml/2006/main"/>
-          <a:p xmlns:a="http://schemas.openxmlformats.org/drawingml/2006/main">
-            <a:pPr>
-              <a:defRPr sz="1500" b="1">
+          <a:bodyPr xmlns:a="http://schemas.openxmlformats.org/drawingml/2006/main" wrap="square" lIns="0" tIns="0" rIns="0" bIns="0" anchor="ctr">
+            <a:noAutofit/>
+          </a:bodyPr>
+          <a:lstStyle xmlns:a="http://schemas.openxmlformats.org/drawingml/2006/main"/>
+          <a:p xmlns:a="http://schemas.openxmlformats.org/drawingml/2006/main">
+            <a:pPr>
+              <a:buNone/>
+              <a:defRPr sz="1425" b="1">
                 <a:solidFill>
                   <a:srgbClr val="28685E"/>
                 </a:solidFill>
-              </a:defRPr>
-            </a:pPr>
-            <a:r>
-              <a:rPr sz="1500" b="1">
+                <a:latin typeface="Arial"/>
+                <a:ea typeface="Arial"/>
+                <a:cs typeface="Arial"/>
+              </a:defRPr>
+            </a:pPr>
+            <a:r>
+              <a:rPr sz="1425" b="1">
                 <a:solidFill>
                   <a:srgbClr val="28685E"/>
                 </a:solidFill>
+                <a:latin typeface="Arial"/>
+                <a:ea typeface="Arial"/>
+                <a:cs typeface="Arial"/>
               </a:rPr>
               <a:t>MADE BY MATT  /  BUILD SCIENCE</a:t>
             </a:r>
@@ -4794,14 +5345,14 @@
       </p:sp>
       <p:pic>
         <p:nvPicPr>
-          <p:cNvPr id="14" name=""/>
+          <p:cNvPr id="18" name=""/>
           <p:cNvPicPr>
             <a:picLocks xmlns:a="http://schemas.openxmlformats.org/drawingml/2006/main" noChangeAspect="1"/>
           </p:cNvPicPr>
           <p:nvPr/>
         </p:nvPicPr>
         <p:blipFill>
-          <a:blip xmlns:r="http://schemas.openxmlformats.org/officeDocument/2006/relationships" xmlns:a="http://schemas.openxmlformats.org/drawingml/2006/main" r:embed="R6a035a1cebb14671"/>
+          <a:blip xmlns:r="http://schemas.openxmlformats.org/officeDocument/2006/relationships" xmlns:a="http://schemas.openxmlformats.org/drawingml/2006/main" r:embed="R3921ad3ff95a4f92"/>
           <a:stretch xmlns:a="http://schemas.openxmlformats.org/drawingml/2006/main"/>
         </p:blipFill>
         <p:spPr>
@@ -4830,8 +5381,8 @@
         </p:nvSpPr>
         <p:spPr>
           <a:xfrm xmlns:a="http://schemas.openxmlformats.org/drawingml/2006/main">
-            <a:off x="609600" y="1352550"/>
-            <a:ext cx="10972800" cy="952500"/>
+            <a:off x="609600" y="1047750"/>
+            <a:ext cx="10972800" cy="895350"/>
           </a:xfrm>
           <a:prstGeom xmlns:a="http://schemas.openxmlformats.org/drawingml/2006/main" prst="rect">
             <a:avLst/>
@@ -4843,21 +5394,30 @@
           </a:ln>
         </p:spPr>
         <p:txBody>
-          <a:bodyPr xmlns:a="http://schemas.openxmlformats.org/drawingml/2006/main" lIns="0" tIns="0" rIns="0" bIns="0" anchor="ctr"/>
-          <a:lstStyle xmlns:a="http://schemas.openxmlformats.org/drawingml/2006/main"/>
-          <a:p xmlns:a="http://schemas.openxmlformats.org/drawingml/2006/main">
-            <a:pPr>
-              <a:defRPr sz="3750" b="1">
-                <a:solidFill>
-                  <a:srgbClr val="152B3A"/>
-                </a:solidFill>
-              </a:defRPr>
-            </a:pPr>
-            <a:r>
-              <a:rPr sz="3750" b="1">
-                <a:solidFill>
-                  <a:srgbClr val="152B3A"/>
-                </a:solidFill>
+          <a:bodyPr xmlns:a="http://schemas.openxmlformats.org/drawingml/2006/main" wrap="square" lIns="0" tIns="0" rIns="0" bIns="0" anchor="ctr">
+            <a:noAutofit/>
+          </a:bodyPr>
+          <a:lstStyle xmlns:a="http://schemas.openxmlformats.org/drawingml/2006/main"/>
+          <a:p xmlns:a="http://schemas.openxmlformats.org/drawingml/2006/main">
+            <a:pPr>
+              <a:buNone/>
+              <a:defRPr sz="3600" b="1">
+                <a:solidFill>
+                  <a:srgbClr val="152B3A"/>
+                </a:solidFill>
+                <a:latin typeface="Arial"/>
+                <a:ea typeface="Arial"/>
+                <a:cs typeface="Arial"/>
+              </a:defRPr>
+            </a:pPr>
+            <a:r>
+              <a:rPr sz="3600" b="1">
+                <a:solidFill>
+                  <a:srgbClr val="152B3A"/>
+                </a:solidFill>
+                <a:latin typeface="Arial"/>
+                <a:ea typeface="Arial"/>
+                <a:cs typeface="Arial"/>
               </a:rPr>
               <a:t>Food can help in several ways</a:t>
             </a:r>
@@ -4924,21 +5484,30 @@
           </a:ln>
         </p:spPr>
         <p:txBody>
-          <a:bodyPr xmlns:a="http://schemas.openxmlformats.org/drawingml/2006/main" lIns="0" tIns="0" rIns="0" bIns="0" anchor="ctr"/>
-          <a:lstStyle xmlns:a="http://schemas.openxmlformats.org/drawingml/2006/main"/>
-          <a:p xmlns:a="http://schemas.openxmlformats.org/drawingml/2006/main">
-            <a:pPr>
-              <a:defRPr sz="1275" b="0">
+          <a:bodyPr xmlns:a="http://schemas.openxmlformats.org/drawingml/2006/main" wrap="square" lIns="0" tIns="0" rIns="0" bIns="0" anchor="ctr">
+            <a:noAutofit/>
+          </a:bodyPr>
+          <a:lstStyle xmlns:a="http://schemas.openxmlformats.org/drawingml/2006/main"/>
+          <a:p xmlns:a="http://schemas.openxmlformats.org/drawingml/2006/main">
+            <a:pPr>
+              <a:buNone/>
+              <a:defRPr sz="1200" b="0">
                 <a:solidFill>
                   <a:srgbClr val="50616B"/>
                 </a:solidFill>
-              </a:defRPr>
-            </a:pPr>
-            <a:r>
-              <a:rPr sz="1275" b="0">
+                <a:latin typeface="Arial"/>
+                <a:ea typeface="Arial"/>
+                <a:cs typeface="Arial"/>
+              </a:defRPr>
+            </a:pPr>
+            <a:r>
+              <a:rPr sz="1200" b="0">
                 <a:solidFill>
                   <a:srgbClr val="50616B"/>
                 </a:solidFill>
+                <a:latin typeface="Arial"/>
+                <a:ea typeface="Arial"/>
+                <a:cs typeface="Arial"/>
               </a:rPr>
               <a:t>AUTUMN 1  ·  WEEK 5  ·  LESSON A</a:t>
             </a:r>
@@ -4974,14 +5543,20 @@
           </a:ln>
         </p:spPr>
         <p:txBody>
-          <a:bodyPr xmlns:a="http://schemas.openxmlformats.org/drawingml/2006/main" lIns="0" tIns="0" rIns="0" bIns="0" anchor="ctr"/>
-          <a:lstStyle xmlns:a="http://schemas.openxmlformats.org/drawingml/2006/main"/>
-          <a:p xmlns:a="http://schemas.openxmlformats.org/drawingml/2006/main">
-            <a:pPr>
+          <a:bodyPr xmlns:a="http://schemas.openxmlformats.org/drawingml/2006/main" wrap="square" lIns="0" tIns="0" rIns="0" bIns="0" anchor="ctr">
+            <a:noAutofit/>
+          </a:bodyPr>
+          <a:lstStyle xmlns:a="http://schemas.openxmlformats.org/drawingml/2006/main"/>
+          <a:p xmlns:a="http://schemas.openxmlformats.org/drawingml/2006/main">
+            <a:pPr>
+              <a:buNone/>
               <a:defRPr sz="1350" b="1">
                 <a:solidFill>
                   <a:srgbClr val="28685E"/>
                 </a:solidFill>
+                <a:latin typeface="Arial"/>
+                <a:ea typeface="Arial"/>
+                <a:cs typeface="Arial"/>
               </a:defRPr>
             </a:pPr>
             <a:r>
@@ -4989,6 +5564,9 @@
                 <a:solidFill>
                   <a:srgbClr val="28685E"/>
                 </a:solidFill>
+                <a:latin typeface="Arial"/>
+                <a:ea typeface="Arial"/>
+                <a:cs typeface="Arial"/>
               </a:rPr>
               <a:t>04</a:t>
             </a:r>
@@ -5011,8 +5589,8 @@
         </p:nvSpPr>
         <p:spPr>
           <a:xfrm xmlns:a="http://schemas.openxmlformats.org/drawingml/2006/main">
-            <a:off x="609600" y="2619375"/>
-            <a:ext cx="4953000" cy="428625"/>
+            <a:off x="609600" y="2257425"/>
+            <a:ext cx="5143500" cy="533400"/>
           </a:xfrm>
           <a:prstGeom xmlns:a="http://schemas.openxmlformats.org/drawingml/2006/main" prst="rect">
             <a:avLst/>
@@ -5024,21 +5602,30 @@
           </a:ln>
         </p:spPr>
         <p:txBody>
-          <a:bodyPr xmlns:a="http://schemas.openxmlformats.org/drawingml/2006/main" lIns="0" tIns="0" rIns="0" bIns="0" anchor="ctr"/>
-          <a:lstStyle xmlns:a="http://schemas.openxmlformats.org/drawingml/2006/main"/>
-          <a:p xmlns:a="http://schemas.openxmlformats.org/drawingml/2006/main">
-            <a:pPr>
-              <a:defRPr sz="2025" b="1">
+          <a:bodyPr xmlns:a="http://schemas.openxmlformats.org/drawingml/2006/main" wrap="square" lIns="0" tIns="0" rIns="0" bIns="0" anchor="ctr">
+            <a:noAutofit/>
+          </a:bodyPr>
+          <a:lstStyle xmlns:a="http://schemas.openxmlformats.org/drawingml/2006/main"/>
+          <a:p xmlns:a="http://schemas.openxmlformats.org/drawingml/2006/main">
+            <a:pPr>
+              <a:buNone/>
+              <a:defRPr sz="2100" b="1">
                 <a:solidFill>
                   <a:srgbClr val="28685E"/>
                 </a:solidFill>
-              </a:defRPr>
-            </a:pPr>
-            <a:r>
-              <a:rPr sz="2025" b="1">
+                <a:latin typeface="Arial"/>
+                <a:ea typeface="Arial"/>
+                <a:cs typeface="Arial"/>
+              </a:defRPr>
+            </a:pPr>
+            <a:r>
+              <a:rPr sz="2100" b="1">
                 <a:solidFill>
                   <a:srgbClr val="28685E"/>
                 </a:solidFill>
+                <a:latin typeface="Arial"/>
+                <a:ea typeface="Arial"/>
+                <a:cs typeface="Arial"/>
               </a:rPr>
               <a:t>EXAMPLE FOODS</a:t>
             </a:r>
@@ -5061,8 +5648,8 @@
         </p:nvSpPr>
         <p:spPr>
           <a:xfrm xmlns:a="http://schemas.openxmlformats.org/drawingml/2006/main">
-            <a:off x="6572250" y="2619375"/>
-            <a:ext cx="4953000" cy="428625"/>
+            <a:off x="6572250" y="2257425"/>
+            <a:ext cx="5010150" cy="533400"/>
           </a:xfrm>
           <a:prstGeom xmlns:a="http://schemas.openxmlformats.org/drawingml/2006/main" prst="rect">
             <a:avLst/>
@@ -5074,21 +5661,30 @@
           </a:ln>
         </p:spPr>
         <p:txBody>
-          <a:bodyPr xmlns:a="http://schemas.openxmlformats.org/drawingml/2006/main" lIns="0" tIns="0" rIns="0" bIns="0" anchor="ctr"/>
-          <a:lstStyle xmlns:a="http://schemas.openxmlformats.org/drawingml/2006/main"/>
-          <a:p xmlns:a="http://schemas.openxmlformats.org/drawingml/2006/main">
-            <a:pPr>
-              <a:defRPr sz="2025" b="1">
+          <a:bodyPr xmlns:a="http://schemas.openxmlformats.org/drawingml/2006/main" wrap="square" lIns="0" tIns="0" rIns="0" bIns="0" anchor="ctr">
+            <a:noAutofit/>
+          </a:bodyPr>
+          <a:lstStyle xmlns:a="http://schemas.openxmlformats.org/drawingml/2006/main"/>
+          <a:p xmlns:a="http://schemas.openxmlformats.org/drawingml/2006/main">
+            <a:pPr>
+              <a:buNone/>
+              <a:defRPr sz="2100" b="1">
                 <a:solidFill>
                   <a:srgbClr val="A65D25"/>
                 </a:solidFill>
-              </a:defRPr>
-            </a:pPr>
-            <a:r>
-              <a:rPr sz="2025" b="1">
+                <a:latin typeface="Arial"/>
+                <a:ea typeface="Arial"/>
+                <a:cs typeface="Arial"/>
+              </a:defRPr>
+            </a:pPr>
+            <a:r>
+              <a:rPr sz="2100" b="1">
                 <a:solidFill>
                   <a:srgbClr val="A65D25"/>
                 </a:solidFill>
+                <a:latin typeface="Arial"/>
+                <a:ea typeface="Arial"/>
+                <a:cs typeface="Arial"/>
               </a:rPr>
               <a:t>SOME OF THEIR JOBS</a:t>
             </a:r>
@@ -5111,8 +5707,8 @@
         </p:nvSpPr>
         <p:spPr>
           <a:xfrm xmlns:a="http://schemas.openxmlformats.org/drawingml/2006/main">
-            <a:off x="609600" y="3333750"/>
-            <a:ext cx="4953000" cy="2524125"/>
+            <a:off x="609600" y="3238500"/>
+            <a:ext cx="5143500" cy="2286000"/>
           </a:xfrm>
           <a:prstGeom xmlns:a="http://schemas.openxmlformats.org/drawingml/2006/main" prst="rect">
             <a:avLst/>
@@ -5124,14 +5720,20 @@
           </a:ln>
         </p:spPr>
         <p:txBody>
-          <a:bodyPr xmlns:a="http://schemas.openxmlformats.org/drawingml/2006/main" lIns="0" tIns="0" rIns="0" bIns="0" anchor="ctr"/>
-          <a:lstStyle xmlns:a="http://schemas.openxmlformats.org/drawingml/2006/main"/>
-          <a:p xmlns:a="http://schemas.openxmlformats.org/drawingml/2006/main">
-            <a:pPr>
+          <a:bodyPr xmlns:a="http://schemas.openxmlformats.org/drawingml/2006/main" wrap="square" lIns="0" tIns="0" rIns="0" bIns="0" anchor="ctr">
+            <a:noAutofit/>
+          </a:bodyPr>
+          <a:lstStyle xmlns:a="http://schemas.openxmlformats.org/drawingml/2006/main"/>
+          <a:p xmlns:a="http://schemas.openxmlformats.org/drawingml/2006/main">
+            <a:pPr>
+              <a:buNone/>
               <a:defRPr sz="2400" b="0">
                 <a:solidFill>
                   <a:srgbClr val="152B3A"/>
                 </a:solidFill>
+                <a:latin typeface="Arial"/>
+                <a:ea typeface="Arial"/>
+                <a:cs typeface="Arial"/>
               </a:defRPr>
             </a:pPr>
             <a:r>
@@ -5139,16 +5741,23 @@
                 <a:solidFill>
                   <a:srgbClr val="152B3A"/>
                 </a:solidFill>
+                <a:latin typeface="Arial"/>
+                <a:ea typeface="Arial"/>
+                <a:cs typeface="Arial"/>
               </a:rPr>
               <a:t>Bread or potatoes</a:t>
             </a:r>
           </a:p>
           <a:p xmlns:a="http://schemas.openxmlformats.org/drawingml/2006/main">
             <a:pPr>
+              <a:buNone/>
               <a:defRPr sz="2400" b="0">
                 <a:solidFill>
                   <a:srgbClr val="152B3A"/>
                 </a:solidFill>
+                <a:latin typeface="Arial"/>
+                <a:ea typeface="Arial"/>
+                <a:cs typeface="Arial"/>
               </a:defRPr>
             </a:pPr>
             <a:r>
@@ -5156,16 +5765,23 @@
                 <a:solidFill>
                   <a:srgbClr val="152B3A"/>
                 </a:solidFill>
+                <a:latin typeface="Arial"/>
+                <a:ea typeface="Arial"/>
+                <a:cs typeface="Arial"/>
               </a:rPr>
               <a:t>Beans or lentils</a:t>
             </a:r>
           </a:p>
           <a:p xmlns:a="http://schemas.openxmlformats.org/drawingml/2006/main">
             <a:pPr>
+              <a:buNone/>
               <a:defRPr sz="2400" b="0">
                 <a:solidFill>
                   <a:srgbClr val="152B3A"/>
                 </a:solidFill>
+                <a:latin typeface="Arial"/>
+                <a:ea typeface="Arial"/>
+                <a:cs typeface="Arial"/>
               </a:defRPr>
             </a:pPr>
             <a:r>
@@ -5173,6 +5789,9 @@
                 <a:solidFill>
                   <a:srgbClr val="152B3A"/>
                 </a:solidFill>
+                <a:latin typeface="Arial"/>
+                <a:ea typeface="Arial"/>
+                <a:cs typeface="Arial"/>
               </a:rPr>
               <a:t>Fruit and vegetables</a:t>
             </a:r>
@@ -5195,8 +5814,8 @@
         </p:nvSpPr>
         <p:spPr>
           <a:xfrm xmlns:a="http://schemas.openxmlformats.org/drawingml/2006/main">
-            <a:off x="6572250" y="3333750"/>
-            <a:ext cx="4857750" cy="2524125"/>
+            <a:off x="6572250" y="3238500"/>
+            <a:ext cx="5010150" cy="2286000"/>
           </a:xfrm>
           <a:prstGeom xmlns:a="http://schemas.openxmlformats.org/drawingml/2006/main" prst="rect">
             <a:avLst/>
@@ -5208,14 +5827,20 @@
           </a:ln>
         </p:spPr>
         <p:txBody>
-          <a:bodyPr xmlns:a="http://schemas.openxmlformats.org/drawingml/2006/main" lIns="0" tIns="0" rIns="0" bIns="0" anchor="ctr"/>
-          <a:lstStyle xmlns:a="http://schemas.openxmlformats.org/drawingml/2006/main"/>
-          <a:p xmlns:a="http://schemas.openxmlformats.org/drawingml/2006/main">
-            <a:pPr>
+          <a:bodyPr xmlns:a="http://schemas.openxmlformats.org/drawingml/2006/main" wrap="square" lIns="0" tIns="0" rIns="0" bIns="0" anchor="ctr">
+            <a:noAutofit/>
+          </a:bodyPr>
+          <a:lstStyle xmlns:a="http://schemas.openxmlformats.org/drawingml/2006/main"/>
+          <a:p xmlns:a="http://schemas.openxmlformats.org/drawingml/2006/main">
+            <a:pPr>
+              <a:buNone/>
               <a:defRPr sz="2400" b="0">
                 <a:solidFill>
                   <a:srgbClr val="152B3A"/>
                 </a:solidFill>
+                <a:latin typeface="Arial"/>
+                <a:ea typeface="Arial"/>
+                <a:cs typeface="Arial"/>
               </a:defRPr>
             </a:pPr>
             <a:r>
@@ -5223,16 +5848,23 @@
                 <a:solidFill>
                   <a:srgbClr val="152B3A"/>
                 </a:solidFill>
+                <a:latin typeface="Arial"/>
+                <a:ea typeface="Arial"/>
+                <a:cs typeface="Arial"/>
               </a:rPr>
               <a:t>Starchy carbohydrate gives energy.</a:t>
             </a:r>
           </a:p>
           <a:p xmlns:a="http://schemas.openxmlformats.org/drawingml/2006/main">
             <a:pPr>
+              <a:buNone/>
               <a:defRPr sz="2400" b="0">
                 <a:solidFill>
                   <a:srgbClr val="152B3A"/>
                 </a:solidFill>
+                <a:latin typeface="Arial"/>
+                <a:ea typeface="Arial"/>
+                <a:cs typeface="Arial"/>
               </a:defRPr>
             </a:pPr>
             <a:r>
@@ -5240,16 +5872,23 @@
                 <a:solidFill>
                   <a:srgbClr val="152B3A"/>
                 </a:solidFill>
+                <a:latin typeface="Arial"/>
+                <a:ea typeface="Arial"/>
+                <a:cs typeface="Arial"/>
               </a:rPr>
               <a:t>Protein supports growth and repair.</a:t>
             </a:r>
           </a:p>
           <a:p xmlns:a="http://schemas.openxmlformats.org/drawingml/2006/main">
             <a:pPr>
+              <a:buNone/>
               <a:defRPr sz="2400" b="0">
                 <a:solidFill>
                   <a:srgbClr val="152B3A"/>
                 </a:solidFill>
+                <a:latin typeface="Arial"/>
+                <a:ea typeface="Arial"/>
+                <a:cs typeface="Arial"/>
               </a:defRPr>
             </a:pPr>
             <a:r>
@@ -5257,11 +5896,76 @@
                 <a:solidFill>
                   <a:srgbClr val="152B3A"/>
                 </a:solidFill>
+                <a:latin typeface="Arial"/>
+                <a:ea typeface="Arial"/>
+                <a:cs typeface="Arial"/>
               </a:rPr>
               <a:t>Vitamins, minerals and fibre.</a:t>
             </a:r>
           </a:p>
         </p:txBody>
+      </p:sp>
+      <p:sp>
+        <p:nvSpPr>
+          <p:cNvPr id="14" name="">
+            <a:extLst xmlns:a="http://schemas.openxmlformats.org/drawingml/2006/main">
+              <a:ext uri="{FF2B5EF4-FFF2-40B4-BE49-F238E27FC236}">
+                <a16:creationId xmlns:a16="http://schemas.microsoft.com/office/drawing/2014/main" id="{56401EA7-38E3-4877-8DE4-7DFBD8F45817}"/>
+              </a:ext>
+            </a:extLst>
+          </p:cNvPr>
+          <p:cNvSpPr>
+            <a:spLocks xmlns:a="http://schemas.openxmlformats.org/drawingml/2006/main" noGrp="1"/>
+          </p:cNvSpPr>
+          <p:nvPr/>
+        </p:nvSpPr>
+        <p:spPr>
+          <a:xfrm xmlns:a="http://schemas.openxmlformats.org/drawingml/2006/main">
+            <a:off x="609600" y="2886075"/>
+            <a:ext cx="5048250" cy="0"/>
+          </a:xfrm>
+          <a:prstGeom xmlns:a="http://schemas.openxmlformats.org/drawingml/2006/main" prst="line">
+            <a:avLst/>
+          </a:prstGeom>
+          <a:noFill xmlns:a="http://schemas.openxmlformats.org/drawingml/2006/main"/>
+          <a:ln xmlns:a="http://schemas.openxmlformats.org/drawingml/2006/main" w="28575">
+            <a:solidFill>
+              <a:srgbClr val="DCE7DD"/>
+            </a:solidFill>
+            <a:prstDash val="solid"/>
+          </a:ln>
+        </p:spPr>
+      </p:sp>
+      <p:sp>
+        <p:nvSpPr>
+          <p:cNvPr id="15" name="">
+            <a:extLst xmlns:a="http://schemas.openxmlformats.org/drawingml/2006/main">
+              <a:ext uri="{FF2B5EF4-FFF2-40B4-BE49-F238E27FC236}">
+                <a16:creationId xmlns:a16="http://schemas.microsoft.com/office/drawing/2014/main" id="{74B77ED2-1F6D-4839-9156-8620C4FAD588}"/>
+              </a:ext>
+            </a:extLst>
+          </p:cNvPr>
+          <p:cNvSpPr>
+            <a:spLocks xmlns:a="http://schemas.openxmlformats.org/drawingml/2006/main" noGrp="1"/>
+          </p:cNvSpPr>
+          <p:nvPr/>
+        </p:nvSpPr>
+        <p:spPr>
+          <a:xfrm xmlns:a="http://schemas.openxmlformats.org/drawingml/2006/main">
+            <a:off x="6572250" y="2886075"/>
+            <a:ext cx="5010150" cy="0"/>
+          </a:xfrm>
+          <a:prstGeom xmlns:a="http://schemas.openxmlformats.org/drawingml/2006/main" prst="line">
+            <a:avLst/>
+          </a:prstGeom>
+          <a:noFill xmlns:a="http://schemas.openxmlformats.org/drawingml/2006/main"/>
+          <a:ln xmlns:a="http://schemas.openxmlformats.org/drawingml/2006/main" w="28575">
+            <a:solidFill>
+              <a:srgbClr val="DCE7DD"/>
+            </a:solidFill>
+            <a:prstDash val="solid"/>
+          </a:ln>
+        </p:spPr>
       </p:sp>
     </p:spTree>
     <p:extLst>
@@ -5279,7 +5983,7 @@
     <p:bg>
       <p:bgPr>
         <a:solidFill xmlns:a="http://schemas.openxmlformats.org/drawingml/2006/main">
-          <a:srgbClr val="F5F1E8"/>
+          <a:srgbClr val="FBF9F3"/>
         </a:solidFill>
       </p:bgPr>
     </p:bg>
@@ -5308,8 +6012,8 @@
         </p:nvSpPr>
         <p:spPr>
           <a:xfrm xmlns:a="http://schemas.openxmlformats.org/drawingml/2006/main">
-            <a:off x="609600" y="552450"/>
-            <a:ext cx="781050" cy="57150"/>
+            <a:off x="609600" y="742950"/>
+            <a:ext cx="9906000" cy="38100"/>
           </a:xfrm>
           <a:prstGeom xmlns:a="http://schemas.openxmlformats.org/drawingml/2006/main" prst="rect">
             <a:avLst/>
@@ -5339,8 +6043,8 @@
         </p:nvSpPr>
         <p:spPr>
           <a:xfrm xmlns:a="http://schemas.openxmlformats.org/drawingml/2006/main">
-            <a:off x="609600" y="762000"/>
-            <a:ext cx="9334500" cy="285750"/>
+            <a:off x="609600" y="342900"/>
+            <a:ext cx="9334500" cy="266700"/>
           </a:xfrm>
           <a:prstGeom xmlns:a="http://schemas.openxmlformats.org/drawingml/2006/main" prst="rect">
             <a:avLst/>
@@ -5352,21 +6056,30 @@
           </a:ln>
         </p:spPr>
         <p:txBody>
-          <a:bodyPr xmlns:a="http://schemas.openxmlformats.org/drawingml/2006/main" lIns="0" tIns="0" rIns="0" bIns="0" anchor="ctr"/>
-          <a:lstStyle xmlns:a="http://schemas.openxmlformats.org/drawingml/2006/main"/>
-          <a:p xmlns:a="http://schemas.openxmlformats.org/drawingml/2006/main">
-            <a:pPr>
-              <a:defRPr sz="1500" b="1">
+          <a:bodyPr xmlns:a="http://schemas.openxmlformats.org/drawingml/2006/main" wrap="square" lIns="0" tIns="0" rIns="0" bIns="0" anchor="ctr">
+            <a:noAutofit/>
+          </a:bodyPr>
+          <a:lstStyle xmlns:a="http://schemas.openxmlformats.org/drawingml/2006/main"/>
+          <a:p xmlns:a="http://schemas.openxmlformats.org/drawingml/2006/main">
+            <a:pPr>
+              <a:buNone/>
+              <a:defRPr sz="1425" b="1">
                 <a:solidFill>
                   <a:srgbClr val="28685E"/>
                 </a:solidFill>
-              </a:defRPr>
-            </a:pPr>
-            <a:r>
-              <a:rPr sz="1500" b="1">
+                <a:latin typeface="Arial"/>
+                <a:ea typeface="Arial"/>
+                <a:cs typeface="Arial"/>
+              </a:defRPr>
+            </a:pPr>
+            <a:r>
+              <a:rPr sz="1425" b="1">
                 <a:solidFill>
                   <a:srgbClr val="28685E"/>
                 </a:solidFill>
+                <a:latin typeface="Arial"/>
+                <a:ea typeface="Arial"/>
+                <a:cs typeface="Arial"/>
               </a:rPr>
               <a:t>MADE BY MATT  /  BUILD SCIENCE</a:t>
             </a:r>
@@ -5375,14 +6088,14 @@
       </p:sp>
       <p:pic>
         <p:nvPicPr>
-          <p:cNvPr id="12" name=""/>
+          <p:cNvPr id="15" name=""/>
           <p:cNvPicPr>
             <a:picLocks xmlns:a="http://schemas.openxmlformats.org/drawingml/2006/main" noChangeAspect="1"/>
           </p:cNvPicPr>
           <p:nvPr/>
         </p:nvPicPr>
         <p:blipFill>
-          <a:blip xmlns:r="http://schemas.openxmlformats.org/officeDocument/2006/relationships" xmlns:a="http://schemas.openxmlformats.org/drawingml/2006/main" r:embed="Rfc5103bcb33b41e8"/>
+          <a:blip xmlns:r="http://schemas.openxmlformats.org/officeDocument/2006/relationships" xmlns:a="http://schemas.openxmlformats.org/drawingml/2006/main" r:embed="R621ce80f249346e4"/>
           <a:stretch xmlns:a="http://schemas.openxmlformats.org/drawingml/2006/main"/>
         </p:blipFill>
         <p:spPr>
@@ -5411,8 +6124,8 @@
         </p:nvSpPr>
         <p:spPr>
           <a:xfrm xmlns:a="http://schemas.openxmlformats.org/drawingml/2006/main">
-            <a:off x="609600" y="1352550"/>
-            <a:ext cx="10972800" cy="952500"/>
+            <a:off x="609600" y="1047750"/>
+            <a:ext cx="10972800" cy="895350"/>
           </a:xfrm>
           <a:prstGeom xmlns:a="http://schemas.openxmlformats.org/drawingml/2006/main" prst="rect">
             <a:avLst/>
@@ -5424,21 +6137,30 @@
           </a:ln>
         </p:spPr>
         <p:txBody>
-          <a:bodyPr xmlns:a="http://schemas.openxmlformats.org/drawingml/2006/main" lIns="0" tIns="0" rIns="0" bIns="0" anchor="ctr"/>
-          <a:lstStyle xmlns:a="http://schemas.openxmlformats.org/drawingml/2006/main"/>
-          <a:p xmlns:a="http://schemas.openxmlformats.org/drawingml/2006/main">
-            <a:pPr>
-              <a:defRPr sz="3750" b="1">
-                <a:solidFill>
-                  <a:srgbClr val="152B3A"/>
-                </a:solidFill>
-              </a:defRPr>
-            </a:pPr>
-            <a:r>
-              <a:rPr sz="3750" b="1">
-                <a:solidFill>
-                  <a:srgbClr val="152B3A"/>
-                </a:solidFill>
+          <a:bodyPr xmlns:a="http://schemas.openxmlformats.org/drawingml/2006/main" wrap="square" lIns="0" tIns="0" rIns="0" bIns="0" anchor="ctr">
+            <a:noAutofit/>
+          </a:bodyPr>
+          <a:lstStyle xmlns:a="http://schemas.openxmlformats.org/drawingml/2006/main"/>
+          <a:p xmlns:a="http://schemas.openxmlformats.org/drawingml/2006/main">
+            <a:pPr>
+              <a:buNone/>
+              <a:defRPr sz="3600" b="1">
+                <a:solidFill>
+                  <a:srgbClr val="152B3A"/>
+                </a:solidFill>
+                <a:latin typeface="Arial"/>
+                <a:ea typeface="Arial"/>
+                <a:cs typeface="Arial"/>
+              </a:defRPr>
+            </a:pPr>
+            <a:r>
+              <a:rPr sz="3600" b="1">
+                <a:solidFill>
+                  <a:srgbClr val="152B3A"/>
+                </a:solidFill>
+                <a:latin typeface="Arial"/>
+                <a:ea typeface="Arial"/>
+                <a:cs typeface="Arial"/>
               </a:rPr>
               <a:t>Water matters too</a:t>
             </a:r>
@@ -5505,21 +6227,30 @@
           </a:ln>
         </p:spPr>
         <p:txBody>
-          <a:bodyPr xmlns:a="http://schemas.openxmlformats.org/drawingml/2006/main" lIns="0" tIns="0" rIns="0" bIns="0" anchor="ctr"/>
-          <a:lstStyle xmlns:a="http://schemas.openxmlformats.org/drawingml/2006/main"/>
-          <a:p xmlns:a="http://schemas.openxmlformats.org/drawingml/2006/main">
-            <a:pPr>
-              <a:defRPr sz="1275" b="0">
+          <a:bodyPr xmlns:a="http://schemas.openxmlformats.org/drawingml/2006/main" wrap="square" lIns="0" tIns="0" rIns="0" bIns="0" anchor="ctr">
+            <a:noAutofit/>
+          </a:bodyPr>
+          <a:lstStyle xmlns:a="http://schemas.openxmlformats.org/drawingml/2006/main"/>
+          <a:p xmlns:a="http://schemas.openxmlformats.org/drawingml/2006/main">
+            <a:pPr>
+              <a:buNone/>
+              <a:defRPr sz="1200" b="0">
                 <a:solidFill>
                   <a:srgbClr val="50616B"/>
                 </a:solidFill>
-              </a:defRPr>
-            </a:pPr>
-            <a:r>
-              <a:rPr sz="1275" b="0">
+                <a:latin typeface="Arial"/>
+                <a:ea typeface="Arial"/>
+                <a:cs typeface="Arial"/>
+              </a:defRPr>
+            </a:pPr>
+            <a:r>
+              <a:rPr sz="1200" b="0">
                 <a:solidFill>
                   <a:srgbClr val="50616B"/>
                 </a:solidFill>
+                <a:latin typeface="Arial"/>
+                <a:ea typeface="Arial"/>
+                <a:cs typeface="Arial"/>
               </a:rPr>
               <a:t>AUTUMN 1  ·  WEEK 5  ·  LESSON A</a:t>
             </a:r>
@@ -5555,14 +6286,20 @@
           </a:ln>
         </p:spPr>
         <p:txBody>
-          <a:bodyPr xmlns:a="http://schemas.openxmlformats.org/drawingml/2006/main" lIns="0" tIns="0" rIns="0" bIns="0" anchor="ctr"/>
-          <a:lstStyle xmlns:a="http://schemas.openxmlformats.org/drawingml/2006/main"/>
-          <a:p xmlns:a="http://schemas.openxmlformats.org/drawingml/2006/main">
-            <a:pPr>
+          <a:bodyPr xmlns:a="http://schemas.openxmlformats.org/drawingml/2006/main" wrap="square" lIns="0" tIns="0" rIns="0" bIns="0" anchor="ctr">
+            <a:noAutofit/>
+          </a:bodyPr>
+          <a:lstStyle xmlns:a="http://schemas.openxmlformats.org/drawingml/2006/main"/>
+          <a:p xmlns:a="http://schemas.openxmlformats.org/drawingml/2006/main">
+            <a:pPr>
+              <a:buNone/>
               <a:defRPr sz="1350" b="1">
                 <a:solidFill>
                   <a:srgbClr val="28685E"/>
                 </a:solidFill>
+                <a:latin typeface="Arial"/>
+                <a:ea typeface="Arial"/>
+                <a:cs typeface="Arial"/>
               </a:defRPr>
             </a:pPr>
             <a:r>
@@ -5570,6 +6307,9 @@
                 <a:solidFill>
                   <a:srgbClr val="28685E"/>
                 </a:solidFill>
+                <a:latin typeface="Arial"/>
+                <a:ea typeface="Arial"/>
+                <a:cs typeface="Arial"/>
               </a:rPr>
               <a:t>05</a:t>
             </a:r>
@@ -5592,8 +6332,8 @@
         </p:nvSpPr>
         <p:spPr>
           <a:xfrm xmlns:a="http://schemas.openxmlformats.org/drawingml/2006/main">
-            <a:off x="609600" y="2686050"/>
-            <a:ext cx="10858500" cy="1524000"/>
+            <a:off x="609600" y="2428875"/>
+            <a:ext cx="6762750" cy="2190750"/>
           </a:xfrm>
           <a:prstGeom xmlns:a="http://schemas.openxmlformats.org/drawingml/2006/main" prst="rect">
             <a:avLst/>
@@ -5605,21 +6345,30 @@
           </a:ln>
         </p:spPr>
         <p:txBody>
-          <a:bodyPr xmlns:a="http://schemas.openxmlformats.org/drawingml/2006/main" lIns="0" tIns="0" rIns="0" bIns="0" anchor="ctr"/>
-          <a:lstStyle xmlns:a="http://schemas.openxmlformats.org/drawingml/2006/main"/>
-          <a:p xmlns:a="http://schemas.openxmlformats.org/drawingml/2006/main">
-            <a:pPr>
-              <a:defRPr sz="2925" b="1">
+          <a:bodyPr xmlns:a="http://schemas.openxmlformats.org/drawingml/2006/main" wrap="square" lIns="0" tIns="0" rIns="0" bIns="0" anchor="ctr">
+            <a:noAutofit/>
+          </a:bodyPr>
+          <a:lstStyle xmlns:a="http://schemas.openxmlformats.org/drawingml/2006/main"/>
+          <a:p xmlns:a="http://schemas.openxmlformats.org/drawingml/2006/main">
+            <a:pPr>
+              <a:buNone/>
+              <a:defRPr sz="2850" b="1">
                 <a:solidFill>
                   <a:srgbClr val="28685E"/>
                 </a:solidFill>
-              </a:defRPr>
-            </a:pPr>
-            <a:r>
-              <a:rPr sz="2925" b="1">
+                <a:latin typeface="Arial"/>
+                <a:ea typeface="Arial"/>
+                <a:cs typeface="Arial"/>
+              </a:defRPr>
+            </a:pPr>
+            <a:r>
+              <a:rPr sz="2850" b="1">
                 <a:solidFill>
                   <a:srgbClr val="28685E"/>
                 </a:solidFill>
+                <a:latin typeface="Arial"/>
+                <a:ea typeface="Arial"/>
+                <a:cs typeface="Arial"/>
               </a:rPr>
               <a:t>Water helps move substances around the body and helps control body temperature.</a:t>
             </a:r>
@@ -5642,8 +6391,8 @@
         </p:nvSpPr>
         <p:spPr>
           <a:xfrm xmlns:a="http://schemas.openxmlformats.org/drawingml/2006/main">
-            <a:off x="609600" y="4552950"/>
-            <a:ext cx="10858500" cy="1285875"/>
+            <a:off x="609600" y="4972050"/>
+            <a:ext cx="7191375" cy="981075"/>
           </a:xfrm>
           <a:prstGeom xmlns:a="http://schemas.openxmlformats.org/drawingml/2006/main" prst="rect">
             <a:avLst/>
@@ -5655,27 +6404,58 @@
           </a:ln>
         </p:spPr>
         <p:txBody>
-          <a:bodyPr xmlns:a="http://schemas.openxmlformats.org/drawingml/2006/main" lIns="0" tIns="0" rIns="0" bIns="0" anchor="ctr"/>
-          <a:lstStyle xmlns:a="http://schemas.openxmlformats.org/drawingml/2006/main"/>
-          <a:p xmlns:a="http://schemas.openxmlformats.org/drawingml/2006/main">
-            <a:pPr>
-              <a:defRPr sz="2700" b="0">
-                <a:solidFill>
-                  <a:srgbClr val="152B3A"/>
-                </a:solidFill>
-              </a:defRPr>
-            </a:pPr>
-            <a:r>
-              <a:rPr sz="2700" b="0">
-                <a:solidFill>
-                  <a:srgbClr val="152B3A"/>
-                </a:solidFill>
+          <a:bodyPr xmlns:a="http://schemas.openxmlformats.org/drawingml/2006/main" wrap="square" lIns="0" tIns="0" rIns="0" bIns="0" anchor="ctr">
+            <a:noAutofit/>
+          </a:bodyPr>
+          <a:lstStyle xmlns:a="http://schemas.openxmlformats.org/drawingml/2006/main"/>
+          <a:p xmlns:a="http://schemas.openxmlformats.org/drawingml/2006/main">
+            <a:pPr>
+              <a:buNone/>
+              <a:defRPr sz="2325" b="0">
+                <a:solidFill>
+                  <a:srgbClr val="152B3A"/>
+                </a:solidFill>
+                <a:latin typeface="Arial"/>
+                <a:ea typeface="Arial"/>
+                <a:cs typeface="Arial"/>
+              </a:defRPr>
+            </a:pPr>
+            <a:r>
+              <a:rPr sz="2325" b="0">
+                <a:solidFill>
+                  <a:srgbClr val="152B3A"/>
+                </a:solidFill>
+                <a:latin typeface="Arial"/>
+                <a:ea typeface="Arial"/>
+                <a:cs typeface="Arial"/>
               </a:rPr>
               <a:t>Water does not supply food energy.</a:t>
             </a:r>
           </a:p>
         </p:txBody>
       </p:sp>
+      <p:pic>
+        <p:nvPicPr>
+          <p:cNvPr id="22" name=""/>
+          <p:cNvPicPr>
+            <a:picLocks xmlns:a="http://schemas.openxmlformats.org/drawingml/2006/main" noChangeAspect="1"/>
+          </p:cNvPicPr>
+          <p:nvPr/>
+        </p:nvPicPr>
+        <p:blipFill>
+          <a:blip xmlns:r="http://schemas.openxmlformats.org/officeDocument/2006/relationships" xmlns:a="http://schemas.openxmlformats.org/drawingml/2006/main" r:embed="Rc407b0e9cd374899"/>
+          <a:stretch xmlns:a="http://schemas.openxmlformats.org/drawingml/2006/main"/>
+        </p:blipFill>
+        <p:spPr>
+          <a:xfrm xmlns:a="http://schemas.openxmlformats.org/drawingml/2006/main">
+            <a:off x="8896456" y="2628900"/>
+            <a:ext cx="1828588" cy="2524125"/>
+          </a:xfrm>
+          <a:prstGeom xmlns:a="http://schemas.openxmlformats.org/drawingml/2006/main" prst="rect">
+            <a:avLst/>
+          </a:prstGeom>
+        </p:spPr>
+      </p:pic>
     </p:spTree>
     <p:extLst>
       <p:ext uri="{BB962C8B-B14F-4D97-AF65-F5344CB8AC3E}">
@@ -5692,7 +6472,7 @@
     <p:bg>
       <p:bgPr>
         <a:solidFill xmlns:a="http://schemas.openxmlformats.org/drawingml/2006/main">
-          <a:srgbClr val="F5F1E8"/>
+          <a:srgbClr val="FBF9F3"/>
         </a:solidFill>
       </p:bgPr>
     </p:bg>
@@ -5721,8 +6501,8 @@
         </p:nvSpPr>
         <p:spPr>
           <a:xfrm xmlns:a="http://schemas.openxmlformats.org/drawingml/2006/main">
-            <a:off x="609600" y="552450"/>
-            <a:ext cx="781050" cy="57150"/>
+            <a:off x="609600" y="742950"/>
+            <a:ext cx="9906000" cy="38100"/>
           </a:xfrm>
           <a:prstGeom xmlns:a="http://schemas.openxmlformats.org/drawingml/2006/main" prst="rect">
             <a:avLst/>
@@ -5752,8 +6532,8 @@
         </p:nvSpPr>
         <p:spPr>
           <a:xfrm xmlns:a="http://schemas.openxmlformats.org/drawingml/2006/main">
-            <a:off x="609600" y="762000"/>
-            <a:ext cx="9334500" cy="285750"/>
+            <a:off x="609600" y="342900"/>
+            <a:ext cx="9334500" cy="266700"/>
           </a:xfrm>
           <a:prstGeom xmlns:a="http://schemas.openxmlformats.org/drawingml/2006/main" prst="rect">
             <a:avLst/>
@@ -5765,21 +6545,30 @@
           </a:ln>
         </p:spPr>
         <p:txBody>
-          <a:bodyPr xmlns:a="http://schemas.openxmlformats.org/drawingml/2006/main" lIns="0" tIns="0" rIns="0" bIns="0" anchor="ctr"/>
-          <a:lstStyle xmlns:a="http://schemas.openxmlformats.org/drawingml/2006/main"/>
-          <a:p xmlns:a="http://schemas.openxmlformats.org/drawingml/2006/main">
-            <a:pPr>
-              <a:defRPr sz="1500" b="1">
+          <a:bodyPr xmlns:a="http://schemas.openxmlformats.org/drawingml/2006/main" wrap="square" lIns="0" tIns="0" rIns="0" bIns="0" anchor="ctr">
+            <a:noAutofit/>
+          </a:bodyPr>
+          <a:lstStyle xmlns:a="http://schemas.openxmlformats.org/drawingml/2006/main"/>
+          <a:p xmlns:a="http://schemas.openxmlformats.org/drawingml/2006/main">
+            <a:pPr>
+              <a:buNone/>
+              <a:defRPr sz="1425" b="1">
                 <a:solidFill>
                   <a:srgbClr val="28685E"/>
                 </a:solidFill>
-              </a:defRPr>
-            </a:pPr>
-            <a:r>
-              <a:rPr sz="1500" b="1">
+                <a:latin typeface="Arial"/>
+                <a:ea typeface="Arial"/>
+                <a:cs typeface="Arial"/>
+              </a:defRPr>
+            </a:pPr>
+            <a:r>
+              <a:rPr sz="1425" b="1">
                 <a:solidFill>
                   <a:srgbClr val="28685E"/>
                 </a:solidFill>
+                <a:latin typeface="Arial"/>
+                <a:ea typeface="Arial"/>
+                <a:cs typeface="Arial"/>
               </a:rPr>
               <a:t>MADE BY MATT  /  BUILD SCIENCE</a:t>
             </a:r>
@@ -5788,14 +6577,14 @@
       </p:sp>
       <p:pic>
         <p:nvPicPr>
-          <p:cNvPr id="13" name=""/>
+          <p:cNvPr id="16" name=""/>
           <p:cNvPicPr>
             <a:picLocks xmlns:a="http://schemas.openxmlformats.org/drawingml/2006/main" noChangeAspect="1"/>
           </p:cNvPicPr>
           <p:nvPr/>
         </p:nvPicPr>
         <p:blipFill>
-          <a:blip xmlns:r="http://schemas.openxmlformats.org/officeDocument/2006/relationships" xmlns:a="http://schemas.openxmlformats.org/drawingml/2006/main" r:embed="R14acee18f1284b72"/>
+          <a:blip xmlns:r="http://schemas.openxmlformats.org/officeDocument/2006/relationships" xmlns:a="http://schemas.openxmlformats.org/drawingml/2006/main" r:embed="R38aa9ea15a1e4f02"/>
           <a:stretch xmlns:a="http://schemas.openxmlformats.org/drawingml/2006/main"/>
         </p:blipFill>
         <p:spPr>
@@ -5824,8 +6613,8 @@
         </p:nvSpPr>
         <p:spPr>
           <a:xfrm xmlns:a="http://schemas.openxmlformats.org/drawingml/2006/main">
-            <a:off x="609600" y="1352550"/>
-            <a:ext cx="10972800" cy="952500"/>
+            <a:off x="609600" y="1047750"/>
+            <a:ext cx="10972800" cy="895350"/>
           </a:xfrm>
           <a:prstGeom xmlns:a="http://schemas.openxmlformats.org/drawingml/2006/main" prst="rect">
             <a:avLst/>
@@ -5837,21 +6626,30 @@
           </a:ln>
         </p:spPr>
         <p:txBody>
-          <a:bodyPr xmlns:a="http://schemas.openxmlformats.org/drawingml/2006/main" lIns="0" tIns="0" rIns="0" bIns="0" anchor="ctr"/>
-          <a:lstStyle xmlns:a="http://schemas.openxmlformats.org/drawingml/2006/main"/>
-          <a:p xmlns:a="http://schemas.openxmlformats.org/drawingml/2006/main">
-            <a:pPr>
-              <a:defRPr sz="3750" b="1">
-                <a:solidFill>
-                  <a:srgbClr val="152B3A"/>
-                </a:solidFill>
-              </a:defRPr>
-            </a:pPr>
-            <a:r>
-              <a:rPr sz="3750" b="1">
-                <a:solidFill>
-                  <a:srgbClr val="152B3A"/>
-                </a:solidFill>
+          <a:bodyPr xmlns:a="http://schemas.openxmlformats.org/drawingml/2006/main" wrap="square" lIns="0" tIns="0" rIns="0" bIns="0" anchor="ctr">
+            <a:noAutofit/>
+          </a:bodyPr>
+          <a:lstStyle xmlns:a="http://schemas.openxmlformats.org/drawingml/2006/main"/>
+          <a:p xmlns:a="http://schemas.openxmlformats.org/drawingml/2006/main">
+            <a:pPr>
+              <a:buNone/>
+              <a:defRPr sz="3600" b="1">
+                <a:solidFill>
+                  <a:srgbClr val="152B3A"/>
+                </a:solidFill>
+                <a:latin typeface="Arial"/>
+                <a:ea typeface="Arial"/>
+                <a:cs typeface="Arial"/>
+              </a:defRPr>
+            </a:pPr>
+            <a:r>
+              <a:rPr sz="3600" b="1">
+                <a:solidFill>
+                  <a:srgbClr val="152B3A"/>
+                </a:solidFill>
+                <a:latin typeface="Arial"/>
+                <a:ea typeface="Arial"/>
+                <a:cs typeface="Arial"/>
               </a:rPr>
               <a:t>Name one job, then check</a:t>
             </a:r>
@@ -5918,21 +6716,30 @@
           </a:ln>
         </p:spPr>
         <p:txBody>
-          <a:bodyPr xmlns:a="http://schemas.openxmlformats.org/drawingml/2006/main" lIns="0" tIns="0" rIns="0" bIns="0" anchor="ctr"/>
-          <a:lstStyle xmlns:a="http://schemas.openxmlformats.org/drawingml/2006/main"/>
-          <a:p xmlns:a="http://schemas.openxmlformats.org/drawingml/2006/main">
-            <a:pPr>
-              <a:defRPr sz="1275" b="0">
+          <a:bodyPr xmlns:a="http://schemas.openxmlformats.org/drawingml/2006/main" wrap="square" lIns="0" tIns="0" rIns="0" bIns="0" anchor="ctr">
+            <a:noAutofit/>
+          </a:bodyPr>
+          <a:lstStyle xmlns:a="http://schemas.openxmlformats.org/drawingml/2006/main"/>
+          <a:p xmlns:a="http://schemas.openxmlformats.org/drawingml/2006/main">
+            <a:pPr>
+              <a:buNone/>
+              <a:defRPr sz="1200" b="0">
                 <a:solidFill>
                   <a:srgbClr val="50616B"/>
                 </a:solidFill>
-              </a:defRPr>
-            </a:pPr>
-            <a:r>
-              <a:rPr sz="1275" b="0">
+                <a:latin typeface="Arial"/>
+                <a:ea typeface="Arial"/>
+                <a:cs typeface="Arial"/>
+              </a:defRPr>
+            </a:pPr>
+            <a:r>
+              <a:rPr sz="1200" b="0">
                 <a:solidFill>
                   <a:srgbClr val="50616B"/>
                 </a:solidFill>
+                <a:latin typeface="Arial"/>
+                <a:ea typeface="Arial"/>
+                <a:cs typeface="Arial"/>
               </a:rPr>
               <a:t>AUTUMN 1  ·  WEEK 5  ·  LESSON A</a:t>
             </a:r>
@@ -5968,14 +6775,20 @@
           </a:ln>
         </p:spPr>
         <p:txBody>
-          <a:bodyPr xmlns:a="http://schemas.openxmlformats.org/drawingml/2006/main" lIns="0" tIns="0" rIns="0" bIns="0" anchor="ctr"/>
-          <a:lstStyle xmlns:a="http://schemas.openxmlformats.org/drawingml/2006/main"/>
-          <a:p xmlns:a="http://schemas.openxmlformats.org/drawingml/2006/main">
-            <a:pPr>
+          <a:bodyPr xmlns:a="http://schemas.openxmlformats.org/drawingml/2006/main" wrap="square" lIns="0" tIns="0" rIns="0" bIns="0" anchor="ctr">
+            <a:noAutofit/>
+          </a:bodyPr>
+          <a:lstStyle xmlns:a="http://schemas.openxmlformats.org/drawingml/2006/main"/>
+          <a:p xmlns:a="http://schemas.openxmlformats.org/drawingml/2006/main">
+            <a:pPr>
+              <a:buNone/>
               <a:defRPr sz="1350" b="1">
                 <a:solidFill>
                   <a:srgbClr val="28685E"/>
                 </a:solidFill>
+                <a:latin typeface="Arial"/>
+                <a:ea typeface="Arial"/>
+                <a:cs typeface="Arial"/>
               </a:defRPr>
             </a:pPr>
             <a:r>
@@ -5983,6 +6796,9 @@
                 <a:solidFill>
                   <a:srgbClr val="28685E"/>
                 </a:solidFill>
+                <a:latin typeface="Arial"/>
+                <a:ea typeface="Arial"/>
+                <a:cs typeface="Arial"/>
               </a:rPr>
               <a:t>06</a:t>
             </a:r>
@@ -6005,8 +6821,8 @@
         </p:nvSpPr>
         <p:spPr>
           <a:xfrm xmlns:a="http://schemas.openxmlformats.org/drawingml/2006/main">
-            <a:off x="609600" y="2619375"/>
-            <a:ext cx="10972800" cy="781050"/>
+            <a:off x="609600" y="2305050"/>
+            <a:ext cx="7096125" cy="914400"/>
           </a:xfrm>
           <a:prstGeom xmlns:a="http://schemas.openxmlformats.org/drawingml/2006/main" prst="rect">
             <a:avLst/>
@@ -6018,14 +6834,20 @@
           </a:ln>
         </p:spPr>
         <p:txBody>
-          <a:bodyPr xmlns:a="http://schemas.openxmlformats.org/drawingml/2006/main" lIns="0" tIns="0" rIns="0" bIns="0" anchor="ctr"/>
-          <a:lstStyle xmlns:a="http://schemas.openxmlformats.org/drawingml/2006/main"/>
-          <a:p xmlns:a="http://schemas.openxmlformats.org/drawingml/2006/main">
-            <a:pPr>
+          <a:bodyPr xmlns:a="http://schemas.openxmlformats.org/drawingml/2006/main" wrap="square" lIns="0" tIns="0" rIns="0" bIns="0" anchor="ctr">
+            <a:noAutofit/>
+          </a:bodyPr>
+          <a:lstStyle xmlns:a="http://schemas.openxmlformats.org/drawingml/2006/main"/>
+          <a:p xmlns:a="http://schemas.openxmlformats.org/drawingml/2006/main">
+            <a:pPr>
+              <a:buNone/>
               <a:defRPr sz="2550" b="0">
                 <a:solidFill>
                   <a:srgbClr val="152B3A"/>
                 </a:solidFill>
+                <a:latin typeface="Arial"/>
+                <a:ea typeface="Arial"/>
+                <a:cs typeface="Arial"/>
               </a:defRPr>
             </a:pPr>
             <a:r>
@@ -6033,6 +6855,9 @@
                 <a:solidFill>
                   <a:srgbClr val="152B3A"/>
                 </a:solidFill>
+                <a:latin typeface="Arial"/>
+                <a:ea typeface="Arial"/>
+                <a:cs typeface="Arial"/>
               </a:rPr>
               <a:t>Bread or potato: which body job fits?</a:t>
             </a:r>
@@ -6055,8 +6880,8 @@
         </p:nvSpPr>
         <p:spPr>
           <a:xfrm xmlns:a="http://schemas.openxmlformats.org/drawingml/2006/main">
-            <a:off x="609600" y="3476625"/>
-            <a:ext cx="10972800" cy="781050"/>
+            <a:off x="609600" y="3352800"/>
+            <a:ext cx="7096125" cy="914400"/>
           </a:xfrm>
           <a:prstGeom xmlns:a="http://schemas.openxmlformats.org/drawingml/2006/main" prst="rect">
             <a:avLst/>
@@ -6068,14 +6893,20 @@
           </a:ln>
         </p:spPr>
         <p:txBody>
-          <a:bodyPr xmlns:a="http://schemas.openxmlformats.org/drawingml/2006/main" lIns="0" tIns="0" rIns="0" bIns="0" anchor="ctr"/>
-          <a:lstStyle xmlns:a="http://schemas.openxmlformats.org/drawingml/2006/main"/>
-          <a:p xmlns:a="http://schemas.openxmlformats.org/drawingml/2006/main">
-            <a:pPr>
+          <a:bodyPr xmlns:a="http://schemas.openxmlformats.org/drawingml/2006/main" wrap="square" lIns="0" tIns="0" rIns="0" bIns="0" anchor="ctr">
+            <a:noAutofit/>
+          </a:bodyPr>
+          <a:lstStyle xmlns:a="http://schemas.openxmlformats.org/drawingml/2006/main"/>
+          <a:p xmlns:a="http://schemas.openxmlformats.org/drawingml/2006/main">
+            <a:pPr>
+              <a:buNone/>
               <a:defRPr sz="2550" b="0">
                 <a:solidFill>
                   <a:srgbClr val="152B3A"/>
                 </a:solidFill>
+                <a:latin typeface="Arial"/>
+                <a:ea typeface="Arial"/>
+                <a:cs typeface="Arial"/>
               </a:defRPr>
             </a:pPr>
             <a:r>
@@ -6083,6 +6914,9 @@
                 <a:solidFill>
                   <a:srgbClr val="152B3A"/>
                 </a:solidFill>
+                <a:latin typeface="Arial"/>
+                <a:ea typeface="Arial"/>
+                <a:cs typeface="Arial"/>
               </a:rPr>
               <a:t>Beans or lentils: which job fits?</a:t>
             </a:r>
@@ -6105,8 +6939,8 @@
         </p:nvSpPr>
         <p:spPr>
           <a:xfrm xmlns:a="http://schemas.openxmlformats.org/drawingml/2006/main">
-            <a:off x="609600" y="4333875"/>
-            <a:ext cx="10972800" cy="781050"/>
+            <a:off x="609600" y="4400550"/>
+            <a:ext cx="7096125" cy="914400"/>
           </a:xfrm>
           <a:prstGeom xmlns:a="http://schemas.openxmlformats.org/drawingml/2006/main" prst="rect">
             <a:avLst/>
@@ -6118,27 +6952,58 @@
           </a:ln>
         </p:spPr>
         <p:txBody>
-          <a:bodyPr xmlns:a="http://schemas.openxmlformats.org/drawingml/2006/main" lIns="0" tIns="0" rIns="0" bIns="0" anchor="ctr"/>
-          <a:lstStyle xmlns:a="http://schemas.openxmlformats.org/drawingml/2006/main"/>
-          <a:p xmlns:a="http://schemas.openxmlformats.org/drawingml/2006/main">
-            <a:pPr>
-              <a:defRPr sz="2550" b="0">
-                <a:solidFill>
-                  <a:srgbClr val="152B3A"/>
-                </a:solidFill>
-              </a:defRPr>
-            </a:pPr>
-            <a:r>
-              <a:rPr sz="2550" b="0">
-                <a:solidFill>
-                  <a:srgbClr val="152B3A"/>
-                </a:solidFill>
+          <a:bodyPr xmlns:a="http://schemas.openxmlformats.org/drawingml/2006/main" wrap="square" lIns="0" tIns="0" rIns="0" bIns="0" anchor="ctr">
+            <a:noAutofit/>
+          </a:bodyPr>
+          <a:lstStyle xmlns:a="http://schemas.openxmlformats.org/drawingml/2006/main"/>
+          <a:p xmlns:a="http://schemas.openxmlformats.org/drawingml/2006/main">
+            <a:pPr>
+              <a:buNone/>
+              <a:defRPr sz="2550" b="1">
+                <a:solidFill>
+                  <a:srgbClr val="28685E"/>
+                </a:solidFill>
+                <a:latin typeface="Arial"/>
+                <a:ea typeface="Arial"/>
+                <a:cs typeface="Arial"/>
+              </a:defRPr>
+            </a:pPr>
+            <a:r>
+              <a:rPr sz="2550" b="1">
+                <a:solidFill>
+                  <a:srgbClr val="28685E"/>
+                </a:solidFill>
+                <a:latin typeface="Arial"/>
+                <a:ea typeface="Arial"/>
+                <a:cs typeface="Arial"/>
               </a:rPr>
               <a:t>Give your reason before the explanation.</a:t>
             </a:r>
           </a:p>
         </p:txBody>
       </p:sp>
+      <p:pic>
+        <p:nvPicPr>
+          <p:cNvPr id="24" name=""/>
+          <p:cNvPicPr>
+            <a:picLocks xmlns:a="http://schemas.openxmlformats.org/drawingml/2006/main" noChangeAspect="1"/>
+          </p:cNvPicPr>
+          <p:nvPr/>
+        </p:nvPicPr>
+        <p:blipFill>
+          <a:blip xmlns:r="http://schemas.openxmlformats.org/officeDocument/2006/relationships" xmlns:a="http://schemas.openxmlformats.org/drawingml/2006/main" r:embed="R1386f3a3fee44948"/>
+          <a:stretch xmlns:a="http://schemas.openxmlformats.org/drawingml/2006/main"/>
+        </p:blipFill>
+        <p:spPr>
+          <a:xfrm xmlns:a="http://schemas.openxmlformats.org/drawingml/2006/main">
+            <a:off x="8763476" y="2686050"/>
+            <a:ext cx="2189798" cy="2714625"/>
+          </a:xfrm>
+          <a:prstGeom xmlns:a="http://schemas.openxmlformats.org/drawingml/2006/main" prst="rect">
+            <a:avLst/>
+          </a:prstGeom>
+        </p:spPr>
+      </p:pic>
     </p:spTree>
     <p:extLst>
       <p:ext uri="{BB962C8B-B14F-4D97-AF65-F5344CB8AC3E}">
@@ -6155,7 +7020,7 @@
     <p:bg>
       <p:bgPr>
         <a:solidFill xmlns:a="http://schemas.openxmlformats.org/drawingml/2006/main">
-          <a:srgbClr val="F5F1E8"/>
+          <a:srgbClr val="FBF9F3"/>
         </a:solidFill>
       </p:bgPr>
     </p:bg>
@@ -6184,8 +7049,8 @@
         </p:nvSpPr>
         <p:spPr>
           <a:xfrm xmlns:a="http://schemas.openxmlformats.org/drawingml/2006/main">
-            <a:off x="609600" y="552450"/>
-            <a:ext cx="781050" cy="57150"/>
+            <a:off x="609600" y="742950"/>
+            <a:ext cx="9906000" cy="38100"/>
           </a:xfrm>
           <a:prstGeom xmlns:a="http://schemas.openxmlformats.org/drawingml/2006/main" prst="rect">
             <a:avLst/>
@@ -6215,8 +7080,8 @@
         </p:nvSpPr>
         <p:spPr>
           <a:xfrm xmlns:a="http://schemas.openxmlformats.org/drawingml/2006/main">
-            <a:off x="609600" y="762000"/>
-            <a:ext cx="9334500" cy="285750"/>
+            <a:off x="609600" y="342900"/>
+            <a:ext cx="9334500" cy="266700"/>
           </a:xfrm>
           <a:prstGeom xmlns:a="http://schemas.openxmlformats.org/drawingml/2006/main" prst="rect">
             <a:avLst/>
@@ -6228,21 +7093,30 @@
           </a:ln>
         </p:spPr>
         <p:txBody>
-          <a:bodyPr xmlns:a="http://schemas.openxmlformats.org/drawingml/2006/main" lIns="0" tIns="0" rIns="0" bIns="0" anchor="ctr"/>
-          <a:lstStyle xmlns:a="http://schemas.openxmlformats.org/drawingml/2006/main"/>
-          <a:p xmlns:a="http://schemas.openxmlformats.org/drawingml/2006/main">
-            <a:pPr>
-              <a:defRPr sz="1500" b="1">
+          <a:bodyPr xmlns:a="http://schemas.openxmlformats.org/drawingml/2006/main" wrap="square" lIns="0" tIns="0" rIns="0" bIns="0" anchor="ctr">
+            <a:noAutofit/>
+          </a:bodyPr>
+          <a:lstStyle xmlns:a="http://schemas.openxmlformats.org/drawingml/2006/main"/>
+          <a:p xmlns:a="http://schemas.openxmlformats.org/drawingml/2006/main">
+            <a:pPr>
+              <a:buNone/>
+              <a:defRPr sz="1425" b="1">
                 <a:solidFill>
                   <a:srgbClr val="28685E"/>
                 </a:solidFill>
-              </a:defRPr>
-            </a:pPr>
-            <a:r>
-              <a:rPr sz="1500" b="1">
+                <a:latin typeface="Arial"/>
+                <a:ea typeface="Arial"/>
+                <a:cs typeface="Arial"/>
+              </a:defRPr>
+            </a:pPr>
+            <a:r>
+              <a:rPr sz="1425" b="1">
                 <a:solidFill>
                   <a:srgbClr val="28685E"/>
                 </a:solidFill>
+                <a:latin typeface="Arial"/>
+                <a:ea typeface="Arial"/>
+                <a:cs typeface="Arial"/>
               </a:rPr>
               <a:t>MADE BY MATT  /  BUILD SCIENCE</a:t>
             </a:r>
@@ -6251,14 +7125,14 @@
       </p:sp>
       <p:pic>
         <p:nvPicPr>
-          <p:cNvPr id="13" name=""/>
+          <p:cNvPr id="15" name=""/>
           <p:cNvPicPr>
             <a:picLocks xmlns:a="http://schemas.openxmlformats.org/drawingml/2006/main" noChangeAspect="1"/>
           </p:cNvPicPr>
           <p:nvPr/>
         </p:nvPicPr>
         <p:blipFill>
-          <a:blip xmlns:r="http://schemas.openxmlformats.org/officeDocument/2006/relationships" xmlns:a="http://schemas.openxmlformats.org/drawingml/2006/main" r:embed="Ra9a2ef8991fb4141"/>
+          <a:blip xmlns:r="http://schemas.openxmlformats.org/officeDocument/2006/relationships" xmlns:a="http://schemas.openxmlformats.org/drawingml/2006/main" r:embed="R7963c24d3f5c414e"/>
           <a:stretch xmlns:a="http://schemas.openxmlformats.org/drawingml/2006/main"/>
         </p:blipFill>
         <p:spPr>
@@ -6287,8 +7161,8 @@
         </p:nvSpPr>
         <p:spPr>
           <a:xfrm xmlns:a="http://schemas.openxmlformats.org/drawingml/2006/main">
-            <a:off x="609600" y="1352550"/>
-            <a:ext cx="10972800" cy="952500"/>
+            <a:off x="609600" y="1047750"/>
+            <a:ext cx="10972800" cy="895350"/>
           </a:xfrm>
           <a:prstGeom xmlns:a="http://schemas.openxmlformats.org/drawingml/2006/main" prst="rect">
             <a:avLst/>
@@ -6300,21 +7174,30 @@
           </a:ln>
         </p:spPr>
         <p:txBody>
-          <a:bodyPr xmlns:a="http://schemas.openxmlformats.org/drawingml/2006/main" lIns="0" tIns="0" rIns="0" bIns="0" anchor="ctr"/>
-          <a:lstStyle xmlns:a="http://schemas.openxmlformats.org/drawingml/2006/main"/>
-          <a:p xmlns:a="http://schemas.openxmlformats.org/drawingml/2006/main">
-            <a:pPr>
-              <a:defRPr sz="3750" b="1">
-                <a:solidFill>
-                  <a:srgbClr val="152B3A"/>
-                </a:solidFill>
-              </a:defRPr>
-            </a:pPr>
-            <a:r>
-              <a:rPr sz="3750" b="1">
-                <a:solidFill>
-                  <a:srgbClr val="152B3A"/>
-                </a:solidFill>
+          <a:bodyPr xmlns:a="http://schemas.openxmlformats.org/drawingml/2006/main" wrap="square" lIns="0" tIns="0" rIns="0" bIns="0" anchor="ctr">
+            <a:noAutofit/>
+          </a:bodyPr>
+          <a:lstStyle xmlns:a="http://schemas.openxmlformats.org/drawingml/2006/main"/>
+          <a:p xmlns:a="http://schemas.openxmlformats.org/drawingml/2006/main">
+            <a:pPr>
+              <a:buNone/>
+              <a:defRPr sz="3600" b="1">
+                <a:solidFill>
+                  <a:srgbClr val="152B3A"/>
+                </a:solidFill>
+                <a:latin typeface="Arial"/>
+                <a:ea typeface="Arial"/>
+                <a:cs typeface="Arial"/>
+              </a:defRPr>
+            </a:pPr>
+            <a:r>
+              <a:rPr sz="3600" b="1">
+                <a:solidFill>
+                  <a:srgbClr val="152B3A"/>
+                </a:solidFill>
+                <a:latin typeface="Arial"/>
+                <a:ea typeface="Arial"/>
+                <a:cs typeface="Arial"/>
               </a:rPr>
               <a:t>Can one food do more than one job?</a:t>
             </a:r>
@@ -6381,21 +7264,30 @@
           </a:ln>
         </p:spPr>
         <p:txBody>
-          <a:bodyPr xmlns:a="http://schemas.openxmlformats.org/drawingml/2006/main" lIns="0" tIns="0" rIns="0" bIns="0" anchor="ctr"/>
-          <a:lstStyle xmlns:a="http://schemas.openxmlformats.org/drawingml/2006/main"/>
-          <a:p xmlns:a="http://schemas.openxmlformats.org/drawingml/2006/main">
-            <a:pPr>
-              <a:defRPr sz="1275" b="0">
+          <a:bodyPr xmlns:a="http://schemas.openxmlformats.org/drawingml/2006/main" wrap="square" lIns="0" tIns="0" rIns="0" bIns="0" anchor="ctr">
+            <a:noAutofit/>
+          </a:bodyPr>
+          <a:lstStyle xmlns:a="http://schemas.openxmlformats.org/drawingml/2006/main"/>
+          <a:p xmlns:a="http://schemas.openxmlformats.org/drawingml/2006/main">
+            <a:pPr>
+              <a:buNone/>
+              <a:defRPr sz="1200" b="0">
                 <a:solidFill>
                   <a:srgbClr val="50616B"/>
                 </a:solidFill>
-              </a:defRPr>
-            </a:pPr>
-            <a:r>
-              <a:rPr sz="1275" b="0">
+                <a:latin typeface="Arial"/>
+                <a:ea typeface="Arial"/>
+                <a:cs typeface="Arial"/>
+              </a:defRPr>
+            </a:pPr>
+            <a:r>
+              <a:rPr sz="1200" b="0">
                 <a:solidFill>
                   <a:srgbClr val="50616B"/>
                 </a:solidFill>
+                <a:latin typeface="Arial"/>
+                <a:ea typeface="Arial"/>
+                <a:cs typeface="Arial"/>
               </a:rPr>
               <a:t>AUTUMN 1  ·  WEEK 5  ·  LESSON A</a:t>
             </a:r>
@@ -6431,14 +7323,20 @@
           </a:ln>
         </p:spPr>
         <p:txBody>
-          <a:bodyPr xmlns:a="http://schemas.openxmlformats.org/drawingml/2006/main" lIns="0" tIns="0" rIns="0" bIns="0" anchor="ctr"/>
-          <a:lstStyle xmlns:a="http://schemas.openxmlformats.org/drawingml/2006/main"/>
-          <a:p xmlns:a="http://schemas.openxmlformats.org/drawingml/2006/main">
-            <a:pPr>
+          <a:bodyPr xmlns:a="http://schemas.openxmlformats.org/drawingml/2006/main" wrap="square" lIns="0" tIns="0" rIns="0" bIns="0" anchor="ctr">
+            <a:noAutofit/>
+          </a:bodyPr>
+          <a:lstStyle xmlns:a="http://schemas.openxmlformats.org/drawingml/2006/main"/>
+          <a:p xmlns:a="http://schemas.openxmlformats.org/drawingml/2006/main">
+            <a:pPr>
+              <a:buNone/>
               <a:defRPr sz="1350" b="1">
                 <a:solidFill>
                   <a:srgbClr val="28685E"/>
                 </a:solidFill>
+                <a:latin typeface="Arial"/>
+                <a:ea typeface="Arial"/>
+                <a:cs typeface="Arial"/>
               </a:defRPr>
             </a:pPr>
             <a:r>
@@ -6446,6 +7344,9 @@
                 <a:solidFill>
                   <a:srgbClr val="28685E"/>
                 </a:solidFill>
+                <a:latin typeface="Arial"/>
+                <a:ea typeface="Arial"/>
+                <a:cs typeface="Arial"/>
               </a:rPr>
               <a:t>07</a:t>
             </a:r>
@@ -6468,8 +7369,8 @@
         </p:nvSpPr>
         <p:spPr>
           <a:xfrm xmlns:a="http://schemas.openxmlformats.org/drawingml/2006/main">
-            <a:off x="609600" y="2619375"/>
-            <a:ext cx="10972800" cy="781050"/>
+            <a:off x="609600" y="2305050"/>
+            <a:ext cx="10972800" cy="914400"/>
           </a:xfrm>
           <a:prstGeom xmlns:a="http://schemas.openxmlformats.org/drawingml/2006/main" prst="rect">
             <a:avLst/>
@@ -6481,14 +7382,20 @@
           </a:ln>
         </p:spPr>
         <p:txBody>
-          <a:bodyPr xmlns:a="http://schemas.openxmlformats.org/drawingml/2006/main" lIns="0" tIns="0" rIns="0" bIns="0" anchor="ctr"/>
-          <a:lstStyle xmlns:a="http://schemas.openxmlformats.org/drawingml/2006/main"/>
-          <a:p xmlns:a="http://schemas.openxmlformats.org/drawingml/2006/main">
-            <a:pPr>
+          <a:bodyPr xmlns:a="http://schemas.openxmlformats.org/drawingml/2006/main" wrap="square" lIns="0" tIns="0" rIns="0" bIns="0" anchor="ctr">
+            <a:noAutofit/>
+          </a:bodyPr>
+          <a:lstStyle xmlns:a="http://schemas.openxmlformats.org/drawingml/2006/main"/>
+          <a:p xmlns:a="http://schemas.openxmlformats.org/drawingml/2006/main">
+            <a:pPr>
+              <a:buNone/>
               <a:defRPr sz="2550" b="0">
                 <a:solidFill>
                   <a:srgbClr val="152B3A"/>
                 </a:solidFill>
+                <a:latin typeface="Arial"/>
+                <a:ea typeface="Arial"/>
+                <a:cs typeface="Arial"/>
               </a:defRPr>
             </a:pPr>
             <a:r>
@@ -6496,6 +7403,9 @@
                 <a:solidFill>
                   <a:srgbClr val="152B3A"/>
                 </a:solidFill>
+                <a:latin typeface="Arial"/>
+                <a:ea typeface="Arial"/>
+                <a:cs typeface="Arial"/>
               </a:rPr>
               <a:t>Beans can provide protein and carbohydrate.</a:t>
             </a:r>
@@ -6518,8 +7428,8 @@
         </p:nvSpPr>
         <p:spPr>
           <a:xfrm xmlns:a="http://schemas.openxmlformats.org/drawingml/2006/main">
-            <a:off x="609600" y="3476625"/>
-            <a:ext cx="10972800" cy="781050"/>
+            <a:off x="609600" y="3352800"/>
+            <a:ext cx="10972800" cy="914400"/>
           </a:xfrm>
           <a:prstGeom xmlns:a="http://schemas.openxmlformats.org/drawingml/2006/main" prst="rect">
             <a:avLst/>
@@ -6531,14 +7441,20 @@
           </a:ln>
         </p:spPr>
         <p:txBody>
-          <a:bodyPr xmlns:a="http://schemas.openxmlformats.org/drawingml/2006/main" lIns="0" tIns="0" rIns="0" bIns="0" anchor="ctr"/>
-          <a:lstStyle xmlns:a="http://schemas.openxmlformats.org/drawingml/2006/main"/>
-          <a:p xmlns:a="http://schemas.openxmlformats.org/drawingml/2006/main">
-            <a:pPr>
+          <a:bodyPr xmlns:a="http://schemas.openxmlformats.org/drawingml/2006/main" wrap="square" lIns="0" tIns="0" rIns="0" bIns="0" anchor="ctr">
+            <a:noAutofit/>
+          </a:bodyPr>
+          <a:lstStyle xmlns:a="http://schemas.openxmlformats.org/drawingml/2006/main"/>
+          <a:p xmlns:a="http://schemas.openxmlformats.org/drawingml/2006/main">
+            <a:pPr>
+              <a:buNone/>
               <a:defRPr sz="2550" b="0">
                 <a:solidFill>
                   <a:srgbClr val="152B3A"/>
                 </a:solidFill>
+                <a:latin typeface="Arial"/>
+                <a:ea typeface="Arial"/>
+                <a:cs typeface="Arial"/>
               </a:defRPr>
             </a:pPr>
             <a:r>
@@ -6546,6 +7462,9 @@
                 <a:solidFill>
                   <a:srgbClr val="152B3A"/>
                 </a:solidFill>
+                <a:latin typeface="Arial"/>
+                <a:ea typeface="Arial"/>
+                <a:cs typeface="Arial"/>
               </a:rPr>
               <a:t>Fruit and vegetables provide different nutrients.</a:t>
             </a:r>
@@ -6568,8 +7487,8 @@
         </p:nvSpPr>
         <p:spPr>
           <a:xfrm xmlns:a="http://schemas.openxmlformats.org/drawingml/2006/main">
-            <a:off x="609600" y="4333875"/>
-            <a:ext cx="10972800" cy="781050"/>
+            <a:off x="609600" y="4400550"/>
+            <a:ext cx="10972800" cy="914400"/>
           </a:xfrm>
           <a:prstGeom xmlns:a="http://schemas.openxmlformats.org/drawingml/2006/main" prst="rect">
             <a:avLst/>
@@ -6581,21 +7500,30 @@
           </a:ln>
         </p:spPr>
         <p:txBody>
-          <a:bodyPr xmlns:a="http://schemas.openxmlformats.org/drawingml/2006/main" lIns="0" tIns="0" rIns="0" bIns="0" anchor="ctr"/>
-          <a:lstStyle xmlns:a="http://schemas.openxmlformats.org/drawingml/2006/main"/>
-          <a:p xmlns:a="http://schemas.openxmlformats.org/drawingml/2006/main">
-            <a:pPr>
-              <a:defRPr sz="2550" b="0">
-                <a:solidFill>
-                  <a:srgbClr val="152B3A"/>
-                </a:solidFill>
-              </a:defRPr>
-            </a:pPr>
-            <a:r>
-              <a:rPr sz="2550" b="0">
-                <a:solidFill>
-                  <a:srgbClr val="152B3A"/>
-                </a:solidFill>
+          <a:bodyPr xmlns:a="http://schemas.openxmlformats.org/drawingml/2006/main" wrap="square" lIns="0" tIns="0" rIns="0" bIns="0" anchor="ctr">
+            <a:noAutofit/>
+          </a:bodyPr>
+          <a:lstStyle xmlns:a="http://schemas.openxmlformats.org/drawingml/2006/main"/>
+          <a:p xmlns:a="http://schemas.openxmlformats.org/drawingml/2006/main">
+            <a:pPr>
+              <a:buNone/>
+              <a:defRPr sz="2550" b="1">
+                <a:solidFill>
+                  <a:srgbClr val="28685E"/>
+                </a:solidFill>
+                <a:latin typeface="Arial"/>
+                <a:ea typeface="Arial"/>
+                <a:cs typeface="Arial"/>
+              </a:defRPr>
+            </a:pPr>
+            <a:r>
+              <a:rPr sz="2550" b="1">
+                <a:solidFill>
+                  <a:srgbClr val="28685E"/>
+                </a:solidFill>
+                <a:latin typeface="Arial"/>
+                <a:ea typeface="Arial"/>
+                <a:cs typeface="Arial"/>
               </a:rPr>
               <a:t>Why might a range of foods help?</a:t>
             </a:r>
@@ -6618,7 +7546,7 @@
     <p:bg>
       <p:bgPr>
         <a:solidFill xmlns:a="http://schemas.openxmlformats.org/drawingml/2006/main">
-          <a:srgbClr val="F5F1E8"/>
+          <a:srgbClr val="FBF9F3"/>
         </a:solidFill>
       </p:bgPr>
     </p:bg>
@@ -6647,8 +7575,8 @@
         </p:nvSpPr>
         <p:spPr>
           <a:xfrm xmlns:a="http://schemas.openxmlformats.org/drawingml/2006/main">
-            <a:off x="609600" y="552450"/>
-            <a:ext cx="781050" cy="57150"/>
+            <a:off x="609600" y="742950"/>
+            <a:ext cx="9906000" cy="38100"/>
           </a:xfrm>
           <a:prstGeom xmlns:a="http://schemas.openxmlformats.org/drawingml/2006/main" prst="rect">
             <a:avLst/>
@@ -6678,8 +7606,8 @@
         </p:nvSpPr>
         <p:spPr>
           <a:xfrm xmlns:a="http://schemas.openxmlformats.org/drawingml/2006/main">
-            <a:off x="609600" y="762000"/>
-            <a:ext cx="9334500" cy="285750"/>
+            <a:off x="609600" y="342900"/>
+            <a:ext cx="9334500" cy="266700"/>
           </a:xfrm>
           <a:prstGeom xmlns:a="http://schemas.openxmlformats.org/drawingml/2006/main" prst="rect">
             <a:avLst/>
@@ -6691,21 +7619,30 @@
           </a:ln>
         </p:spPr>
         <p:txBody>
-          <a:bodyPr xmlns:a="http://schemas.openxmlformats.org/drawingml/2006/main" lIns="0" tIns="0" rIns="0" bIns="0" anchor="ctr"/>
-          <a:lstStyle xmlns:a="http://schemas.openxmlformats.org/drawingml/2006/main"/>
-          <a:p xmlns:a="http://schemas.openxmlformats.org/drawingml/2006/main">
-            <a:pPr>
-              <a:defRPr sz="1500" b="1">
+          <a:bodyPr xmlns:a="http://schemas.openxmlformats.org/drawingml/2006/main" wrap="square" lIns="0" tIns="0" rIns="0" bIns="0" anchor="ctr">
+            <a:noAutofit/>
+          </a:bodyPr>
+          <a:lstStyle xmlns:a="http://schemas.openxmlformats.org/drawingml/2006/main"/>
+          <a:p xmlns:a="http://schemas.openxmlformats.org/drawingml/2006/main">
+            <a:pPr>
+              <a:buNone/>
+              <a:defRPr sz="1425" b="1">
                 <a:solidFill>
                   <a:srgbClr val="28685E"/>
                 </a:solidFill>
-              </a:defRPr>
-            </a:pPr>
-            <a:r>
-              <a:rPr sz="1500" b="1">
+                <a:latin typeface="Arial"/>
+                <a:ea typeface="Arial"/>
+                <a:cs typeface="Arial"/>
+              </a:defRPr>
+            </a:pPr>
+            <a:r>
+              <a:rPr sz="1425" b="1">
                 <a:solidFill>
                   <a:srgbClr val="28685E"/>
                 </a:solidFill>
+                <a:latin typeface="Arial"/>
+                <a:ea typeface="Arial"/>
+                <a:cs typeface="Arial"/>
               </a:rPr>
               <a:t>MADE BY MATT  /  BUILD SCIENCE</a:t>
             </a:r>
@@ -6714,14 +7651,14 @@
       </p:sp>
       <p:pic>
         <p:nvPicPr>
-          <p:cNvPr id="14" name=""/>
+          <p:cNvPr id="18" name=""/>
           <p:cNvPicPr>
             <a:picLocks xmlns:a="http://schemas.openxmlformats.org/drawingml/2006/main" noChangeAspect="1"/>
           </p:cNvPicPr>
           <p:nvPr/>
         </p:nvPicPr>
         <p:blipFill>
-          <a:blip xmlns:r="http://schemas.openxmlformats.org/officeDocument/2006/relationships" xmlns:a="http://schemas.openxmlformats.org/drawingml/2006/main" r:embed="Rba4aeb6958304ed4"/>
+          <a:blip xmlns:r="http://schemas.openxmlformats.org/officeDocument/2006/relationships" xmlns:a="http://schemas.openxmlformats.org/drawingml/2006/main" r:embed="R35e5473c7d59403b"/>
           <a:stretch xmlns:a="http://schemas.openxmlformats.org/drawingml/2006/main"/>
         </p:blipFill>
         <p:spPr>
@@ -6750,8 +7687,8 @@
         </p:nvSpPr>
         <p:spPr>
           <a:xfrm xmlns:a="http://schemas.openxmlformats.org/drawingml/2006/main">
-            <a:off x="609600" y="1352550"/>
-            <a:ext cx="10972800" cy="952500"/>
+            <a:off x="609600" y="1047750"/>
+            <a:ext cx="10972800" cy="895350"/>
           </a:xfrm>
           <a:prstGeom xmlns:a="http://schemas.openxmlformats.org/drawingml/2006/main" prst="rect">
             <a:avLst/>
@@ -6763,21 +7700,30 @@
           </a:ln>
         </p:spPr>
         <p:txBody>
-          <a:bodyPr xmlns:a="http://schemas.openxmlformats.org/drawingml/2006/main" lIns="0" tIns="0" rIns="0" bIns="0" anchor="ctr"/>
-          <a:lstStyle xmlns:a="http://schemas.openxmlformats.org/drawingml/2006/main"/>
-          <a:p xmlns:a="http://schemas.openxmlformats.org/drawingml/2006/main">
-            <a:pPr>
-              <a:defRPr sz="3750" b="1">
-                <a:solidFill>
-                  <a:srgbClr val="152B3A"/>
-                </a:solidFill>
-              </a:defRPr>
-            </a:pPr>
-            <a:r>
-              <a:rPr sz="3750" b="1">
-                <a:solidFill>
-                  <a:srgbClr val="152B3A"/>
-                </a:solidFill>
+          <a:bodyPr xmlns:a="http://schemas.openxmlformats.org/drawingml/2006/main" wrap="square" lIns="0" tIns="0" rIns="0" bIns="0" anchor="ctr">
+            <a:noAutofit/>
+          </a:bodyPr>
+          <a:lstStyle xmlns:a="http://schemas.openxmlformats.org/drawingml/2006/main"/>
+          <a:p xmlns:a="http://schemas.openxmlformats.org/drawingml/2006/main">
+            <a:pPr>
+              <a:buNone/>
+              <a:defRPr sz="3600" b="1">
+                <a:solidFill>
+                  <a:srgbClr val="152B3A"/>
+                </a:solidFill>
+                <a:latin typeface="Arial"/>
+                <a:ea typeface="Arial"/>
+                <a:cs typeface="Arial"/>
+              </a:defRPr>
+            </a:pPr>
+            <a:r>
+              <a:rPr sz="3600" b="1">
+                <a:solidFill>
+                  <a:srgbClr val="152B3A"/>
+                </a:solidFill>
+                <a:latin typeface="Arial"/>
+                <a:ea typeface="Arial"/>
+                <a:cs typeface="Arial"/>
               </a:rPr>
               <a:t>Different animals, different needs</a:t>
             </a:r>
@@ -6844,21 +7790,30 @@
           </a:ln>
         </p:spPr>
         <p:txBody>
-          <a:bodyPr xmlns:a="http://schemas.openxmlformats.org/drawingml/2006/main" lIns="0" tIns="0" rIns="0" bIns="0" anchor="ctr"/>
-          <a:lstStyle xmlns:a="http://schemas.openxmlformats.org/drawingml/2006/main"/>
-          <a:p xmlns:a="http://schemas.openxmlformats.org/drawingml/2006/main">
-            <a:pPr>
-              <a:defRPr sz="1275" b="0">
+          <a:bodyPr xmlns:a="http://schemas.openxmlformats.org/drawingml/2006/main" wrap="square" lIns="0" tIns="0" rIns="0" bIns="0" anchor="ctr">
+            <a:noAutofit/>
+          </a:bodyPr>
+          <a:lstStyle xmlns:a="http://schemas.openxmlformats.org/drawingml/2006/main"/>
+          <a:p xmlns:a="http://schemas.openxmlformats.org/drawingml/2006/main">
+            <a:pPr>
+              <a:buNone/>
+              <a:defRPr sz="1200" b="0">
                 <a:solidFill>
                   <a:srgbClr val="50616B"/>
                 </a:solidFill>
-              </a:defRPr>
-            </a:pPr>
-            <a:r>
-              <a:rPr sz="1275" b="0">
+                <a:latin typeface="Arial"/>
+                <a:ea typeface="Arial"/>
+                <a:cs typeface="Arial"/>
+              </a:defRPr>
+            </a:pPr>
+            <a:r>
+              <a:rPr sz="1200" b="0">
                 <a:solidFill>
                   <a:srgbClr val="50616B"/>
                 </a:solidFill>
+                <a:latin typeface="Arial"/>
+                <a:ea typeface="Arial"/>
+                <a:cs typeface="Arial"/>
               </a:rPr>
               <a:t>AUTUMN 1  ·  WEEK 5  ·  LESSON A</a:t>
             </a:r>
@@ -6894,14 +7849,20 @@
           </a:ln>
         </p:spPr>
         <p:txBody>
-          <a:bodyPr xmlns:a="http://schemas.openxmlformats.org/drawingml/2006/main" lIns="0" tIns="0" rIns="0" bIns="0" anchor="ctr"/>
-          <a:lstStyle xmlns:a="http://schemas.openxmlformats.org/drawingml/2006/main"/>
-          <a:p xmlns:a="http://schemas.openxmlformats.org/drawingml/2006/main">
-            <a:pPr>
+          <a:bodyPr xmlns:a="http://schemas.openxmlformats.org/drawingml/2006/main" wrap="square" lIns="0" tIns="0" rIns="0" bIns="0" anchor="ctr">
+            <a:noAutofit/>
+          </a:bodyPr>
+          <a:lstStyle xmlns:a="http://schemas.openxmlformats.org/drawingml/2006/main"/>
+          <a:p xmlns:a="http://schemas.openxmlformats.org/drawingml/2006/main">
+            <a:pPr>
+              <a:buNone/>
               <a:defRPr sz="1350" b="1">
                 <a:solidFill>
                   <a:srgbClr val="28685E"/>
                 </a:solidFill>
+                <a:latin typeface="Arial"/>
+                <a:ea typeface="Arial"/>
+                <a:cs typeface="Arial"/>
               </a:defRPr>
             </a:pPr>
             <a:r>
@@ -6909,6 +7870,9 @@
                 <a:solidFill>
                   <a:srgbClr val="28685E"/>
                 </a:solidFill>
+                <a:latin typeface="Arial"/>
+                <a:ea typeface="Arial"/>
+                <a:cs typeface="Arial"/>
               </a:rPr>
               <a:t>08</a:t>
             </a:r>
@@ -6931,8 +7895,8 @@
         </p:nvSpPr>
         <p:spPr>
           <a:xfrm xmlns:a="http://schemas.openxmlformats.org/drawingml/2006/main">
-            <a:off x="609600" y="2619375"/>
-            <a:ext cx="4953000" cy="428625"/>
+            <a:off x="609600" y="2257425"/>
+            <a:ext cx="5143500" cy="533400"/>
           </a:xfrm>
           <a:prstGeom xmlns:a="http://schemas.openxmlformats.org/drawingml/2006/main" prst="rect">
             <a:avLst/>
@@ -6944,21 +7908,30 @@
           </a:ln>
         </p:spPr>
         <p:txBody>
-          <a:bodyPr xmlns:a="http://schemas.openxmlformats.org/drawingml/2006/main" lIns="0" tIns="0" rIns="0" bIns="0" anchor="ctr"/>
-          <a:lstStyle xmlns:a="http://schemas.openxmlformats.org/drawingml/2006/main"/>
-          <a:p xmlns:a="http://schemas.openxmlformats.org/drawingml/2006/main">
-            <a:pPr>
-              <a:defRPr sz="2025" b="1">
+          <a:bodyPr xmlns:a="http://schemas.openxmlformats.org/drawingml/2006/main" wrap="square" lIns="0" tIns="0" rIns="0" bIns="0" anchor="ctr">
+            <a:noAutofit/>
+          </a:bodyPr>
+          <a:lstStyle xmlns:a="http://schemas.openxmlformats.org/drawingml/2006/main"/>
+          <a:p xmlns:a="http://schemas.openxmlformats.org/drawingml/2006/main">
+            <a:pPr>
+              <a:buNone/>
+              <a:defRPr sz="2100" b="1">
                 <a:solidFill>
                   <a:srgbClr val="28685E"/>
                 </a:solidFill>
-              </a:defRPr>
-            </a:pPr>
-            <a:r>
-              <a:rPr sz="2025" b="1">
+                <a:latin typeface="Arial"/>
+                <a:ea typeface="Arial"/>
+                <a:cs typeface="Arial"/>
+              </a:defRPr>
+            </a:pPr>
+            <a:r>
+              <a:rPr sz="2100" b="1">
                 <a:solidFill>
                   <a:srgbClr val="28685E"/>
                 </a:solidFill>
+                <a:latin typeface="Arial"/>
+                <a:ea typeface="Arial"/>
+                <a:cs typeface="Arial"/>
               </a:rPr>
               <a:t>EXAMPLE ANIMALS</a:t>
             </a:r>
@@ -6981,8 +7954,8 @@
         </p:nvSpPr>
         <p:spPr>
           <a:xfrm xmlns:a="http://schemas.openxmlformats.org/drawingml/2006/main">
-            <a:off x="6572250" y="2619375"/>
-            <a:ext cx="4953000" cy="428625"/>
+            <a:off x="6572250" y="2257425"/>
+            <a:ext cx="5010150" cy="533400"/>
           </a:xfrm>
           <a:prstGeom xmlns:a="http://schemas.openxmlformats.org/drawingml/2006/main" prst="rect">
             <a:avLst/>
@@ -6994,21 +7967,30 @@
           </a:ln>
         </p:spPr>
         <p:txBody>
-          <a:bodyPr xmlns:a="http://schemas.openxmlformats.org/drawingml/2006/main" lIns="0" tIns="0" rIns="0" bIns="0" anchor="ctr"/>
-          <a:lstStyle xmlns:a="http://schemas.openxmlformats.org/drawingml/2006/main"/>
-          <a:p xmlns:a="http://schemas.openxmlformats.org/drawingml/2006/main">
-            <a:pPr>
-              <a:defRPr sz="2025" b="1">
+          <a:bodyPr xmlns:a="http://schemas.openxmlformats.org/drawingml/2006/main" wrap="square" lIns="0" tIns="0" rIns="0" bIns="0" anchor="ctr">
+            <a:noAutofit/>
+          </a:bodyPr>
+          <a:lstStyle xmlns:a="http://schemas.openxmlformats.org/drawingml/2006/main"/>
+          <a:p xmlns:a="http://schemas.openxmlformats.org/drawingml/2006/main">
+            <a:pPr>
+              <a:buNone/>
+              <a:defRPr sz="2100" b="1">
                 <a:solidFill>
                   <a:srgbClr val="A65D25"/>
                 </a:solidFill>
-              </a:defRPr>
-            </a:pPr>
-            <a:r>
-              <a:rPr sz="2025" b="1">
+                <a:latin typeface="Arial"/>
+                <a:ea typeface="Arial"/>
+                <a:cs typeface="Arial"/>
+              </a:defRPr>
+            </a:pPr>
+            <a:r>
+              <a:rPr sz="2100" b="1">
                 <a:solidFill>
                   <a:srgbClr val="A65D25"/>
                 </a:solidFill>
+                <a:latin typeface="Arial"/>
+                <a:ea typeface="Arial"/>
+                <a:cs typeface="Arial"/>
               </a:rPr>
               <a:t>EXAMPLE FOOD LINKS</a:t>
             </a:r>
@@ -7031,8 +8013,8 @@
         </p:nvSpPr>
         <p:spPr>
           <a:xfrm xmlns:a="http://schemas.openxmlformats.org/drawingml/2006/main">
-            <a:off x="609600" y="3333750"/>
-            <a:ext cx="4953000" cy="2524125"/>
+            <a:off x="609600" y="3238500"/>
+            <a:ext cx="5143500" cy="2286000"/>
           </a:xfrm>
           <a:prstGeom xmlns:a="http://schemas.openxmlformats.org/drawingml/2006/main" prst="rect">
             <a:avLst/>
@@ -7044,14 +8026,20 @@
           </a:ln>
         </p:spPr>
         <p:txBody>
-          <a:bodyPr xmlns:a="http://schemas.openxmlformats.org/drawingml/2006/main" lIns="0" tIns="0" rIns="0" bIns="0" anchor="ctr"/>
-          <a:lstStyle xmlns:a="http://schemas.openxmlformats.org/drawingml/2006/main"/>
-          <a:p xmlns:a="http://schemas.openxmlformats.org/drawingml/2006/main">
-            <a:pPr>
+          <a:bodyPr xmlns:a="http://schemas.openxmlformats.org/drawingml/2006/main" wrap="square" lIns="0" tIns="0" rIns="0" bIns="0" anchor="ctr">
+            <a:noAutofit/>
+          </a:bodyPr>
+          <a:lstStyle xmlns:a="http://schemas.openxmlformats.org/drawingml/2006/main"/>
+          <a:p xmlns:a="http://schemas.openxmlformats.org/drawingml/2006/main">
+            <a:pPr>
+              <a:buNone/>
               <a:defRPr sz="2400" b="0">
                 <a:solidFill>
                   <a:srgbClr val="152B3A"/>
                 </a:solidFill>
+                <a:latin typeface="Arial"/>
+                <a:ea typeface="Arial"/>
+                <a:cs typeface="Arial"/>
               </a:defRPr>
             </a:pPr>
             <a:r>
@@ -7059,16 +8047,23 @@
                 <a:solidFill>
                   <a:srgbClr val="152B3A"/>
                 </a:solidFill>
+                <a:latin typeface="Arial"/>
+                <a:ea typeface="Arial"/>
+                <a:cs typeface="Arial"/>
               </a:rPr>
               <a:t>Cow</a:t>
             </a:r>
           </a:p>
           <a:p xmlns:a="http://schemas.openxmlformats.org/drawingml/2006/main">
             <a:pPr>
+              <a:buNone/>
               <a:defRPr sz="2400" b="0">
                 <a:solidFill>
                   <a:srgbClr val="152B3A"/>
                 </a:solidFill>
+                <a:latin typeface="Arial"/>
+                <a:ea typeface="Arial"/>
+                <a:cs typeface="Arial"/>
               </a:defRPr>
             </a:pPr>
             <a:r>
@@ -7076,16 +8071,23 @@
                 <a:solidFill>
                   <a:srgbClr val="152B3A"/>
                 </a:solidFill>
+                <a:latin typeface="Arial"/>
+                <a:ea typeface="Arial"/>
+                <a:cs typeface="Arial"/>
               </a:rPr>
               <a:t>Owl</a:t>
             </a:r>
           </a:p>
           <a:p xmlns:a="http://schemas.openxmlformats.org/drawingml/2006/main">
             <a:pPr>
+              <a:buNone/>
               <a:defRPr sz="2400" b="0">
                 <a:solidFill>
                   <a:srgbClr val="152B3A"/>
                 </a:solidFill>
+                <a:latin typeface="Arial"/>
+                <a:ea typeface="Arial"/>
+                <a:cs typeface="Arial"/>
               </a:defRPr>
             </a:pPr>
             <a:r>
@@ -7093,16 +8095,23 @@
                 <a:solidFill>
                   <a:srgbClr val="152B3A"/>
                 </a:solidFill>
+                <a:latin typeface="Arial"/>
+                <a:ea typeface="Arial"/>
+                <a:cs typeface="Arial"/>
               </a:rPr>
               <a:t>Caterpillar</a:t>
             </a:r>
           </a:p>
           <a:p xmlns:a="http://schemas.openxmlformats.org/drawingml/2006/main">
             <a:pPr>
+              <a:buNone/>
               <a:defRPr sz="2400" b="0">
                 <a:solidFill>
                   <a:srgbClr val="152B3A"/>
                 </a:solidFill>
+                <a:latin typeface="Arial"/>
+                <a:ea typeface="Arial"/>
+                <a:cs typeface="Arial"/>
               </a:defRPr>
             </a:pPr>
             <a:r>
@@ -7110,6 +8119,9 @@
                 <a:solidFill>
                   <a:srgbClr val="152B3A"/>
                 </a:solidFill>
+                <a:latin typeface="Arial"/>
+                <a:ea typeface="Arial"/>
+                <a:cs typeface="Arial"/>
               </a:rPr>
               <a:t>Goldfish</a:t>
             </a:r>
@@ -7132,8 +8144,8 @@
         </p:nvSpPr>
         <p:spPr>
           <a:xfrm xmlns:a="http://schemas.openxmlformats.org/drawingml/2006/main">
-            <a:off x="6572250" y="3333750"/>
-            <a:ext cx="4857750" cy="2524125"/>
+            <a:off x="6572250" y="3238500"/>
+            <a:ext cx="5010150" cy="2286000"/>
           </a:xfrm>
           <a:prstGeom xmlns:a="http://schemas.openxmlformats.org/drawingml/2006/main" prst="rect">
             <a:avLst/>
@@ -7145,14 +8157,20 @@
           </a:ln>
         </p:spPr>
         <p:txBody>
-          <a:bodyPr xmlns:a="http://schemas.openxmlformats.org/drawingml/2006/main" lIns="0" tIns="0" rIns="0" bIns="0" anchor="ctr"/>
-          <a:lstStyle xmlns:a="http://schemas.openxmlformats.org/drawingml/2006/main"/>
-          <a:p xmlns:a="http://schemas.openxmlformats.org/drawingml/2006/main">
-            <a:pPr>
+          <a:bodyPr xmlns:a="http://schemas.openxmlformats.org/drawingml/2006/main" wrap="square" lIns="0" tIns="0" rIns="0" bIns="0" anchor="ctr">
+            <a:noAutofit/>
+          </a:bodyPr>
+          <a:lstStyle xmlns:a="http://schemas.openxmlformats.org/drawingml/2006/main"/>
+          <a:p xmlns:a="http://schemas.openxmlformats.org/drawingml/2006/main">
+            <a:pPr>
+              <a:buNone/>
               <a:defRPr sz="2400" b="0">
                 <a:solidFill>
                   <a:srgbClr val="152B3A"/>
                 </a:solidFill>
+                <a:latin typeface="Arial"/>
+                <a:ea typeface="Arial"/>
+                <a:cs typeface="Arial"/>
               </a:defRPr>
             </a:pPr>
             <a:r>
@@ -7160,16 +8178,23 @@
                 <a:solidFill>
                   <a:srgbClr val="152B3A"/>
                 </a:solidFill>
+                <a:latin typeface="Arial"/>
+                <a:ea typeface="Arial"/>
+                <a:cs typeface="Arial"/>
               </a:rPr>
               <a:t>Grass</a:t>
             </a:r>
           </a:p>
           <a:p xmlns:a="http://schemas.openxmlformats.org/drawingml/2006/main">
             <a:pPr>
+              <a:buNone/>
               <a:defRPr sz="2400" b="0">
                 <a:solidFill>
                   <a:srgbClr val="152B3A"/>
                 </a:solidFill>
+                <a:latin typeface="Arial"/>
+                <a:ea typeface="Arial"/>
+                <a:cs typeface="Arial"/>
               </a:defRPr>
             </a:pPr>
             <a:r>
@@ -7177,16 +8202,23 @@
                 <a:solidFill>
                   <a:srgbClr val="152B3A"/>
                 </a:solidFill>
+                <a:latin typeface="Arial"/>
+                <a:ea typeface="Arial"/>
+                <a:cs typeface="Arial"/>
               </a:rPr>
               <a:t>Mouse</a:t>
             </a:r>
           </a:p>
           <a:p xmlns:a="http://schemas.openxmlformats.org/drawingml/2006/main">
             <a:pPr>
+              <a:buNone/>
               <a:defRPr sz="2400" b="0">
                 <a:solidFill>
                   <a:srgbClr val="152B3A"/>
                 </a:solidFill>
+                <a:latin typeface="Arial"/>
+                <a:ea typeface="Arial"/>
+                <a:cs typeface="Arial"/>
               </a:defRPr>
             </a:pPr>
             <a:r>
@@ -7194,16 +8226,23 @@
                 <a:solidFill>
                   <a:srgbClr val="152B3A"/>
                 </a:solidFill>
+                <a:latin typeface="Arial"/>
+                <a:ea typeface="Arial"/>
+                <a:cs typeface="Arial"/>
               </a:rPr>
               <a:t>Leaves</a:t>
             </a:r>
           </a:p>
           <a:p xmlns:a="http://schemas.openxmlformats.org/drawingml/2006/main">
             <a:pPr>
+              <a:buNone/>
               <a:defRPr sz="2400" b="0">
                 <a:solidFill>
                   <a:srgbClr val="152B3A"/>
                 </a:solidFill>
+                <a:latin typeface="Arial"/>
+                <a:ea typeface="Arial"/>
+                <a:cs typeface="Arial"/>
               </a:defRPr>
             </a:pPr>
             <a:r>
@@ -7211,11 +8250,76 @@
                 <a:solidFill>
                   <a:srgbClr val="152B3A"/>
                 </a:solidFill>
+                <a:latin typeface="Arial"/>
+                <a:ea typeface="Arial"/>
+                <a:cs typeface="Arial"/>
               </a:rPr>
               <a:t>Suitable fish food</a:t>
             </a:r>
           </a:p>
         </p:txBody>
+      </p:sp>
+      <p:sp>
+        <p:nvSpPr>
+          <p:cNvPr id="14" name="">
+            <a:extLst xmlns:a="http://schemas.openxmlformats.org/drawingml/2006/main">
+              <a:ext uri="{FF2B5EF4-FFF2-40B4-BE49-F238E27FC236}">
+                <a16:creationId xmlns:a16="http://schemas.microsoft.com/office/drawing/2014/main" id="{D4F9521F-B932-4F01-9B2D-459691FCD6FF}"/>
+              </a:ext>
+            </a:extLst>
+          </p:cNvPr>
+          <p:cNvSpPr>
+            <a:spLocks xmlns:a="http://schemas.openxmlformats.org/drawingml/2006/main" noGrp="1"/>
+          </p:cNvSpPr>
+          <p:nvPr/>
+        </p:nvSpPr>
+        <p:spPr>
+          <a:xfrm xmlns:a="http://schemas.openxmlformats.org/drawingml/2006/main">
+            <a:off x="609600" y="2886075"/>
+            <a:ext cx="5048250" cy="0"/>
+          </a:xfrm>
+          <a:prstGeom xmlns:a="http://schemas.openxmlformats.org/drawingml/2006/main" prst="line">
+            <a:avLst/>
+          </a:prstGeom>
+          <a:noFill xmlns:a="http://schemas.openxmlformats.org/drawingml/2006/main"/>
+          <a:ln xmlns:a="http://schemas.openxmlformats.org/drawingml/2006/main" w="28575">
+            <a:solidFill>
+              <a:srgbClr val="DCE7DD"/>
+            </a:solidFill>
+            <a:prstDash val="solid"/>
+          </a:ln>
+        </p:spPr>
+      </p:sp>
+      <p:sp>
+        <p:nvSpPr>
+          <p:cNvPr id="15" name="">
+            <a:extLst xmlns:a="http://schemas.openxmlformats.org/drawingml/2006/main">
+              <a:ext uri="{FF2B5EF4-FFF2-40B4-BE49-F238E27FC236}">
+                <a16:creationId xmlns:a16="http://schemas.microsoft.com/office/drawing/2014/main" id="{F8EEC983-81DE-49D8-9CEF-2C8C2B3510F4}"/>
+              </a:ext>
+            </a:extLst>
+          </p:cNvPr>
+          <p:cNvSpPr>
+            <a:spLocks xmlns:a="http://schemas.openxmlformats.org/drawingml/2006/main" noGrp="1"/>
+          </p:cNvSpPr>
+          <p:nvPr/>
+        </p:nvSpPr>
+        <p:spPr>
+          <a:xfrm xmlns:a="http://schemas.openxmlformats.org/drawingml/2006/main">
+            <a:off x="6572250" y="2886075"/>
+            <a:ext cx="5010150" cy="0"/>
+          </a:xfrm>
+          <a:prstGeom xmlns:a="http://schemas.openxmlformats.org/drawingml/2006/main" prst="line">
+            <a:avLst/>
+          </a:prstGeom>
+          <a:noFill xmlns:a="http://schemas.openxmlformats.org/drawingml/2006/main"/>
+          <a:ln xmlns:a="http://schemas.openxmlformats.org/drawingml/2006/main" w="28575">
+            <a:solidFill>
+              <a:srgbClr val="DCE7DD"/>
+            </a:solidFill>
+            <a:prstDash val="solid"/>
+          </a:ln>
+        </p:spPr>
       </p:sp>
     </p:spTree>
     <p:extLst>
@@ -7233,7 +8337,7 @@
     <p:bg>
       <p:bgPr>
         <a:solidFill xmlns:a="http://schemas.openxmlformats.org/drawingml/2006/main">
-          <a:srgbClr val="F5F1E8"/>
+          <a:srgbClr val="FBF9F3"/>
         </a:solidFill>
       </p:bgPr>
     </p:bg>
@@ -7262,8 +8366,8 @@
         </p:nvSpPr>
         <p:spPr>
           <a:xfrm xmlns:a="http://schemas.openxmlformats.org/drawingml/2006/main">
-            <a:off x="609600" y="552450"/>
-            <a:ext cx="781050" cy="57150"/>
+            <a:off x="609600" y="742950"/>
+            <a:ext cx="9906000" cy="38100"/>
           </a:xfrm>
           <a:prstGeom xmlns:a="http://schemas.openxmlformats.org/drawingml/2006/main" prst="rect">
             <a:avLst/>
@@ -7293,8 +8397,8 @@
         </p:nvSpPr>
         <p:spPr>
           <a:xfrm xmlns:a="http://schemas.openxmlformats.org/drawingml/2006/main">
-            <a:off x="609600" y="762000"/>
-            <a:ext cx="9334500" cy="285750"/>
+            <a:off x="609600" y="342900"/>
+            <a:ext cx="9334500" cy="266700"/>
           </a:xfrm>
           <a:prstGeom xmlns:a="http://schemas.openxmlformats.org/drawingml/2006/main" prst="rect">
             <a:avLst/>
@@ -7306,21 +8410,30 @@
           </a:ln>
         </p:spPr>
         <p:txBody>
-          <a:bodyPr xmlns:a="http://schemas.openxmlformats.org/drawingml/2006/main" lIns="0" tIns="0" rIns="0" bIns="0" anchor="ctr"/>
-          <a:lstStyle xmlns:a="http://schemas.openxmlformats.org/drawingml/2006/main"/>
-          <a:p xmlns:a="http://schemas.openxmlformats.org/drawingml/2006/main">
-            <a:pPr>
-              <a:defRPr sz="1500" b="1">
+          <a:bodyPr xmlns:a="http://schemas.openxmlformats.org/drawingml/2006/main" wrap="square" lIns="0" tIns="0" rIns="0" bIns="0" anchor="ctr">
+            <a:noAutofit/>
+          </a:bodyPr>
+          <a:lstStyle xmlns:a="http://schemas.openxmlformats.org/drawingml/2006/main"/>
+          <a:p xmlns:a="http://schemas.openxmlformats.org/drawingml/2006/main">
+            <a:pPr>
+              <a:buNone/>
+              <a:defRPr sz="1425" b="1">
                 <a:solidFill>
                   <a:srgbClr val="28685E"/>
                 </a:solidFill>
-              </a:defRPr>
-            </a:pPr>
-            <a:r>
-              <a:rPr sz="1500" b="1">
+                <a:latin typeface="Arial"/>
+                <a:ea typeface="Arial"/>
+                <a:cs typeface="Arial"/>
+              </a:defRPr>
+            </a:pPr>
+            <a:r>
+              <a:rPr sz="1425" b="1">
                 <a:solidFill>
                   <a:srgbClr val="28685E"/>
                 </a:solidFill>
+                <a:latin typeface="Arial"/>
+                <a:ea typeface="Arial"/>
+                <a:cs typeface="Arial"/>
               </a:rPr>
               <a:t>MADE BY MATT  /  BUILD SCIENCE</a:t>
             </a:r>
@@ -7329,14 +8442,14 @@
       </p:sp>
       <p:pic>
         <p:nvPicPr>
-          <p:cNvPr id="12" name=""/>
+          <p:cNvPr id="15" name=""/>
           <p:cNvPicPr>
             <a:picLocks xmlns:a="http://schemas.openxmlformats.org/drawingml/2006/main" noChangeAspect="1"/>
           </p:cNvPicPr>
           <p:nvPr/>
         </p:nvPicPr>
         <p:blipFill>
-          <a:blip xmlns:r="http://schemas.openxmlformats.org/officeDocument/2006/relationships" xmlns:a="http://schemas.openxmlformats.org/drawingml/2006/main" r:embed="R289f8aaaa805460b"/>
+          <a:blip xmlns:r="http://schemas.openxmlformats.org/officeDocument/2006/relationships" xmlns:a="http://schemas.openxmlformats.org/drawingml/2006/main" r:embed="R6f6fb0c2ad544cdd"/>
           <a:stretch xmlns:a="http://schemas.openxmlformats.org/drawingml/2006/main"/>
         </p:blipFill>
         <p:spPr>
@@ -7365,8 +8478,8 @@
         </p:nvSpPr>
         <p:spPr>
           <a:xfrm xmlns:a="http://schemas.openxmlformats.org/drawingml/2006/main">
-            <a:off x="609600" y="1352550"/>
-            <a:ext cx="10972800" cy="952500"/>
+            <a:off x="609600" y="1047750"/>
+            <a:ext cx="10972800" cy="895350"/>
           </a:xfrm>
           <a:prstGeom xmlns:a="http://schemas.openxmlformats.org/drawingml/2006/main" prst="rect">
             <a:avLst/>
@@ -7378,21 +8491,30 @@
           </a:ln>
         </p:spPr>
         <p:txBody>
-          <a:bodyPr xmlns:a="http://schemas.openxmlformats.org/drawingml/2006/main" lIns="0" tIns="0" rIns="0" bIns="0" anchor="ctr"/>
-          <a:lstStyle xmlns:a="http://schemas.openxmlformats.org/drawingml/2006/main"/>
-          <a:p xmlns:a="http://schemas.openxmlformats.org/drawingml/2006/main">
-            <a:pPr>
-              <a:defRPr sz="3750" b="1">
-                <a:solidFill>
-                  <a:srgbClr val="152B3A"/>
-                </a:solidFill>
-              </a:defRPr>
-            </a:pPr>
-            <a:r>
-              <a:rPr sz="3750" b="1">
-                <a:solidFill>
-                  <a:srgbClr val="152B3A"/>
-                </a:solidFill>
+          <a:bodyPr xmlns:a="http://schemas.openxmlformats.org/drawingml/2006/main" wrap="square" lIns="0" tIns="0" rIns="0" bIns="0" anchor="ctr">
+            <a:noAutofit/>
+          </a:bodyPr>
+          <a:lstStyle xmlns:a="http://schemas.openxmlformats.org/drawingml/2006/main"/>
+          <a:p xmlns:a="http://schemas.openxmlformats.org/drawingml/2006/main">
+            <a:pPr>
+              <a:buNone/>
+              <a:defRPr sz="3600" b="1">
+                <a:solidFill>
+                  <a:srgbClr val="152B3A"/>
+                </a:solidFill>
+                <a:latin typeface="Arial"/>
+                <a:ea typeface="Arial"/>
+                <a:cs typeface="Arial"/>
+              </a:defRPr>
+            </a:pPr>
+            <a:r>
+              <a:rPr sz="3600" b="1">
+                <a:solidFill>
+                  <a:srgbClr val="152B3A"/>
+                </a:solidFill>
+                <a:latin typeface="Arial"/>
+                <a:ea typeface="Arial"/>
+                <a:cs typeface="Arial"/>
               </a:rPr>
               <a:t>Build a reason with because</a:t>
             </a:r>
@@ -7459,21 +8581,30 @@
           </a:ln>
         </p:spPr>
         <p:txBody>
-          <a:bodyPr xmlns:a="http://schemas.openxmlformats.org/drawingml/2006/main" lIns="0" tIns="0" rIns="0" bIns="0" anchor="ctr"/>
-          <a:lstStyle xmlns:a="http://schemas.openxmlformats.org/drawingml/2006/main"/>
-          <a:p xmlns:a="http://schemas.openxmlformats.org/drawingml/2006/main">
-            <a:pPr>
-              <a:defRPr sz="1275" b="0">
+          <a:bodyPr xmlns:a="http://schemas.openxmlformats.org/drawingml/2006/main" wrap="square" lIns="0" tIns="0" rIns="0" bIns="0" anchor="ctr">
+            <a:noAutofit/>
+          </a:bodyPr>
+          <a:lstStyle xmlns:a="http://schemas.openxmlformats.org/drawingml/2006/main"/>
+          <a:p xmlns:a="http://schemas.openxmlformats.org/drawingml/2006/main">
+            <a:pPr>
+              <a:buNone/>
+              <a:defRPr sz="1200" b="0">
                 <a:solidFill>
                   <a:srgbClr val="50616B"/>
                 </a:solidFill>
-              </a:defRPr>
-            </a:pPr>
-            <a:r>
-              <a:rPr sz="1275" b="0">
+                <a:latin typeface="Arial"/>
+                <a:ea typeface="Arial"/>
+                <a:cs typeface="Arial"/>
+              </a:defRPr>
+            </a:pPr>
+            <a:r>
+              <a:rPr sz="1200" b="0">
                 <a:solidFill>
                   <a:srgbClr val="50616B"/>
                 </a:solidFill>
+                <a:latin typeface="Arial"/>
+                <a:ea typeface="Arial"/>
+                <a:cs typeface="Arial"/>
               </a:rPr>
               <a:t>AUTUMN 1  ·  WEEK 5  ·  LESSON A</a:t>
             </a:r>
@@ -7509,14 +8640,20 @@
           </a:ln>
         </p:spPr>
         <p:txBody>
-          <a:bodyPr xmlns:a="http://schemas.openxmlformats.org/drawingml/2006/main" lIns="0" tIns="0" rIns="0" bIns="0" anchor="ctr"/>
-          <a:lstStyle xmlns:a="http://schemas.openxmlformats.org/drawingml/2006/main"/>
-          <a:p xmlns:a="http://schemas.openxmlformats.org/drawingml/2006/main">
-            <a:pPr>
+          <a:bodyPr xmlns:a="http://schemas.openxmlformats.org/drawingml/2006/main" wrap="square" lIns="0" tIns="0" rIns="0" bIns="0" anchor="ctr">
+            <a:noAutofit/>
+          </a:bodyPr>
+          <a:lstStyle xmlns:a="http://schemas.openxmlformats.org/drawingml/2006/main"/>
+          <a:p xmlns:a="http://schemas.openxmlformats.org/drawingml/2006/main">
+            <a:pPr>
+              <a:buNone/>
               <a:defRPr sz="1350" b="1">
                 <a:solidFill>
                   <a:srgbClr val="28685E"/>
                 </a:solidFill>
+                <a:latin typeface="Arial"/>
+                <a:ea typeface="Arial"/>
+                <a:cs typeface="Arial"/>
               </a:defRPr>
             </a:pPr>
             <a:r>
@@ -7524,6 +8661,9 @@
                 <a:solidFill>
                   <a:srgbClr val="28685E"/>
                 </a:solidFill>
+                <a:latin typeface="Arial"/>
+                <a:ea typeface="Arial"/>
+                <a:cs typeface="Arial"/>
               </a:rPr>
               <a:t>09</a:t>
             </a:r>
@@ -7546,8 +8686,8 @@
         </p:nvSpPr>
         <p:spPr>
           <a:xfrm xmlns:a="http://schemas.openxmlformats.org/drawingml/2006/main">
-            <a:off x="609600" y="2686050"/>
-            <a:ext cx="10858500" cy="1524000"/>
+            <a:off x="609600" y="2428875"/>
+            <a:ext cx="6762750" cy="2190750"/>
           </a:xfrm>
           <a:prstGeom xmlns:a="http://schemas.openxmlformats.org/drawingml/2006/main" prst="rect">
             <a:avLst/>
@@ -7559,21 +8699,30 @@
           </a:ln>
         </p:spPr>
         <p:txBody>
-          <a:bodyPr xmlns:a="http://schemas.openxmlformats.org/drawingml/2006/main" lIns="0" tIns="0" rIns="0" bIns="0" anchor="ctr"/>
-          <a:lstStyle xmlns:a="http://schemas.openxmlformats.org/drawingml/2006/main"/>
-          <a:p xmlns:a="http://schemas.openxmlformats.org/drawingml/2006/main">
-            <a:pPr>
-              <a:defRPr sz="2925" b="1">
+          <a:bodyPr xmlns:a="http://schemas.openxmlformats.org/drawingml/2006/main" wrap="square" lIns="0" tIns="0" rIns="0" bIns="0" anchor="ctr">
+            <a:noAutofit/>
+          </a:bodyPr>
+          <a:lstStyle xmlns:a="http://schemas.openxmlformats.org/drawingml/2006/main"/>
+          <a:p xmlns:a="http://schemas.openxmlformats.org/drawingml/2006/main">
+            <a:pPr>
+              <a:buNone/>
+              <a:defRPr sz="2850" b="1">
                 <a:solidFill>
                   <a:srgbClr val="28685E"/>
                 </a:solidFill>
-              </a:defRPr>
-            </a:pPr>
-            <a:r>
-              <a:rPr sz="2925" b="1">
+                <a:latin typeface="Arial"/>
+                <a:ea typeface="Arial"/>
+                <a:cs typeface="Arial"/>
+              </a:defRPr>
+            </a:pPr>
+            <a:r>
+              <a:rPr sz="2850" b="1">
                 <a:solidFill>
                   <a:srgbClr val="28685E"/>
                 </a:solidFill>
+                <a:latin typeface="Arial"/>
+                <a:ea typeface="Arial"/>
+                <a:cs typeface="Arial"/>
               </a:rPr>
               <a:t>A model body needs a variety of foods because foods provide different nutrients.</a:t>
             </a:r>
@@ -7596,8 +8745,8 @@
         </p:nvSpPr>
         <p:spPr>
           <a:xfrm xmlns:a="http://schemas.openxmlformats.org/drawingml/2006/main">
-            <a:off x="609600" y="4552950"/>
-            <a:ext cx="10858500" cy="1285875"/>
+            <a:off x="609600" y="4972050"/>
+            <a:ext cx="7191375" cy="981075"/>
           </a:xfrm>
           <a:prstGeom xmlns:a="http://schemas.openxmlformats.org/drawingml/2006/main" prst="rect">
             <a:avLst/>
@@ -7609,27 +8758,58 @@
           </a:ln>
         </p:spPr>
         <p:txBody>
-          <a:bodyPr xmlns:a="http://schemas.openxmlformats.org/drawingml/2006/main" lIns="0" tIns="0" rIns="0" bIns="0" anchor="ctr"/>
-          <a:lstStyle xmlns:a="http://schemas.openxmlformats.org/drawingml/2006/main"/>
-          <a:p xmlns:a="http://schemas.openxmlformats.org/drawingml/2006/main">
-            <a:pPr>
-              <a:defRPr sz="2700" b="0">
-                <a:solidFill>
-                  <a:srgbClr val="152B3A"/>
-                </a:solidFill>
-              </a:defRPr>
-            </a:pPr>
-            <a:r>
-              <a:rPr sz="2700" b="0">
-                <a:solidFill>
-                  <a:srgbClr val="152B3A"/>
-                </a:solidFill>
+          <a:bodyPr xmlns:a="http://schemas.openxmlformats.org/drawingml/2006/main" wrap="square" lIns="0" tIns="0" rIns="0" bIns="0" anchor="ctr">
+            <a:noAutofit/>
+          </a:bodyPr>
+          <a:lstStyle xmlns:a="http://schemas.openxmlformats.org/drawingml/2006/main"/>
+          <a:p xmlns:a="http://schemas.openxmlformats.org/drawingml/2006/main">
+            <a:pPr>
+              <a:buNone/>
+              <a:defRPr sz="2325" b="0">
+                <a:solidFill>
+                  <a:srgbClr val="152B3A"/>
+                </a:solidFill>
+                <a:latin typeface="Arial"/>
+                <a:ea typeface="Arial"/>
+                <a:cs typeface="Arial"/>
+              </a:defRPr>
+            </a:pPr>
+            <a:r>
+              <a:rPr sz="2325" b="0">
+                <a:solidFill>
+                  <a:srgbClr val="152B3A"/>
+                </a:solidFill>
+                <a:latin typeface="Arial"/>
+                <a:ea typeface="Arial"/>
+                <a:cs typeface="Arial"/>
               </a:rPr>
               <a:t>One food can do several jobs; it does not provide everything.</a:t>
             </a:r>
           </a:p>
         </p:txBody>
       </p:sp>
+      <p:pic>
+        <p:nvPicPr>
+          <p:cNvPr id="22" name=""/>
+          <p:cNvPicPr>
+            <a:picLocks xmlns:a="http://schemas.openxmlformats.org/drawingml/2006/main" noChangeAspect="1"/>
+          </p:cNvPicPr>
+          <p:nvPr/>
+        </p:nvPicPr>
+        <p:blipFill>
+          <a:blip xmlns:r="http://schemas.openxmlformats.org/officeDocument/2006/relationships" xmlns:a="http://schemas.openxmlformats.org/drawingml/2006/main" r:embed="R8272b4e1acaa49e8"/>
+          <a:stretch xmlns:a="http://schemas.openxmlformats.org/drawingml/2006/main"/>
+        </p:blipFill>
+        <p:spPr>
+          <a:xfrm xmlns:a="http://schemas.openxmlformats.org/drawingml/2006/main">
+            <a:off x="8286750" y="2919413"/>
+            <a:ext cx="3048000" cy="1943100"/>
+          </a:xfrm>
+          <a:prstGeom xmlns:a="http://schemas.openxmlformats.org/drawingml/2006/main" prst="rect">
+            <a:avLst/>
+          </a:prstGeom>
+        </p:spPr>
+      </p:pic>
     </p:spTree>
     <p:extLst>
       <p:ext uri="{BB962C8B-B14F-4D97-AF65-F5344CB8AC3E}">
